--- a/docs/mid_review_update.pptx
+++ b/docs/mid_review_update.pptx
@@ -12,6 +12,7 @@
     <p:sldId id="260" r:id="rId11"/>
     <p:sldId id="261" r:id="rId12"/>
     <p:sldId id="262" r:id="rId13"/>
+    <p:sldId id="264" r:id="rId15"/>
     <p:sldId id="263" r:id="rId14"/>
   </p:sldIdLst>
   <p:sldSz cx="12191695" cy="6858000" type="screen4x3"/>
@@ -4218,7 +4219,7 @@
                 </a:solidFill>
                 <a:latin typeface="Calibri"/>
               </a:rPr>
-              <a:t>2/8</a:t>
+              <a:t>2/9</a:t>
             </a:r>
           </a:p>
         </p:txBody>
@@ -5465,7 +5466,7 @@
                 </a:solidFill>
                 <a:latin typeface="Calibri"/>
               </a:rPr>
-              <a:t>3/8</a:t>
+              <a:t>3/9</a:t>
             </a:r>
           </a:p>
         </p:txBody>
@@ -6568,7 +6569,7 @@
                 </a:solidFill>
                 <a:latin typeface="Calibri"/>
               </a:rPr>
-              <a:t>4/8</a:t>
+              <a:t>4/9</a:t>
             </a:r>
           </a:p>
         </p:txBody>
@@ -6933,11 +6934,11 @@
           <a:p>
             <a:pPr algn="l">
               <a:spcAft>
-                <a:spcPts val="1000"/>
+                <a:spcPts val="1400"/>
               </a:spcAft>
             </a:pPr>
             <a:r>
-              <a:rPr sz="1250" b="1" i="0">
+              <a:rPr sz="1250" b="1">
                 <a:solidFill>
                   <a:srgbClr val="16A34A"/>
                 </a:solidFill>
@@ -6946,7 +6947,7 @@
               <a:t>▸  </a:t>
             </a:r>
             <a:r>
-              <a:rPr sz="1250" b="0" i="0">
+              <a:rPr sz="1250" b="0">
                 <a:solidFill>
                   <a:srgbClr val="1A202C"/>
                 </a:solidFill>
@@ -6958,11 +6959,11 @@
           <a:p>
             <a:pPr>
               <a:spcAft>
-                <a:spcPts val="1000"/>
+                <a:spcPts val="1400"/>
               </a:spcAft>
             </a:pPr>
             <a:r>
-              <a:rPr sz="1250" b="1" i="0">
+              <a:rPr sz="1250" b="1">
                 <a:solidFill>
                   <a:srgbClr val="16A34A"/>
                 </a:solidFill>
@@ -6971,7 +6972,7 @@
               <a:t>▸  </a:t>
             </a:r>
             <a:r>
-              <a:rPr sz="1250" b="0" i="0">
+              <a:rPr sz="1250" b="0">
                 <a:solidFill>
                   <a:srgbClr val="1A202C"/>
                 </a:solidFill>
@@ -6983,11 +6984,11 @@
           <a:p>
             <a:pPr>
               <a:spcAft>
-                <a:spcPts val="1000"/>
+                <a:spcPts val="1400"/>
               </a:spcAft>
             </a:pPr>
             <a:r>
-              <a:rPr sz="1250" b="1" i="0">
+              <a:rPr sz="1250" b="1">
                 <a:solidFill>
                   <a:srgbClr val="16A34A"/>
                 </a:solidFill>
@@ -6996,7 +6997,7 @@
               <a:t>▸  </a:t>
             </a:r>
             <a:r>
-              <a:rPr sz="1250" b="0" i="0">
+              <a:rPr sz="1250" b="0">
                 <a:solidFill>
                   <a:srgbClr val="1A202C"/>
                 </a:solidFill>
@@ -7008,11 +7009,11 @@
           <a:p>
             <a:pPr>
               <a:spcAft>
-                <a:spcPts val="1000"/>
+                <a:spcPts val="1400"/>
               </a:spcAft>
             </a:pPr>
             <a:r>
-              <a:rPr sz="1250" b="1" i="0">
+              <a:rPr sz="1250" b="1">
                 <a:solidFill>
                   <a:srgbClr val="16A34A"/>
                 </a:solidFill>
@@ -7021,7 +7022,7 @@
               <a:t>▸  </a:t>
             </a:r>
             <a:r>
-              <a:rPr sz="1250" b="0" i="0">
+              <a:rPr sz="1250" b="0">
                 <a:solidFill>
                   <a:srgbClr val="1A202C"/>
                 </a:solidFill>
@@ -7033,11 +7034,11 @@
           <a:p>
             <a:pPr>
               <a:spcAft>
-                <a:spcPts val="1000"/>
+                <a:spcPts val="1400"/>
               </a:spcAft>
             </a:pPr>
             <a:r>
-              <a:rPr sz="1250" b="1" i="0">
+              <a:rPr sz="1250" b="1">
                 <a:solidFill>
                   <a:srgbClr val="16A34A"/>
                 </a:solidFill>
@@ -7046,7 +7047,7 @@
               <a:t>▸  </a:t>
             </a:r>
             <a:r>
-              <a:rPr sz="1250" b="0" i="0">
+              <a:rPr sz="1250" b="0">
                 <a:solidFill>
                   <a:srgbClr val="1A202C"/>
                 </a:solidFill>
@@ -7058,11 +7059,11 @@
           <a:p>
             <a:pPr>
               <a:spcAft>
-                <a:spcPts val="1000"/>
+                <a:spcPts val="1400"/>
               </a:spcAft>
             </a:pPr>
             <a:r>
-              <a:rPr sz="1250" b="1" i="0">
+              <a:rPr sz="1250" b="1">
                 <a:solidFill>
                   <a:srgbClr val="16A34A"/>
                 </a:solidFill>
@@ -7071,23 +7072,23 @@
               <a:t>▸  </a:t>
             </a:r>
             <a:r>
-              <a:rPr sz="1250" b="0" i="0">
+              <a:rPr sz="1250" b="0">
                 <a:solidFill>
                   <a:srgbClr val="1A202C"/>
                 </a:solidFill>
                 <a:latin typeface="Calibri"/>
               </a:rPr>
-              <a:t>Colab fallback notebook prepared as backup compute</a:t>
+              <a:t>Dataset downloaded (Kaggle c23 mirror) &amp; mapped to the official FF++ layout</a:t>
             </a:r>
           </a:p>
           <a:p>
             <a:pPr>
               <a:spcAft>
-                <a:spcPts val="1000"/>
+                <a:spcPts val="1400"/>
               </a:spcAft>
             </a:pPr>
             <a:r>
-              <a:rPr sz="1250" b="1" i="0">
+              <a:rPr sz="1250" b="1">
                 <a:solidFill>
                   <a:srgbClr val="16A34A"/>
                 </a:solidFill>
@@ -7096,13 +7097,38 @@
               <a:t>▸  </a:t>
             </a:r>
             <a:r>
-              <a:rPr sz="1250" b="0" i="0">
+              <a:rPr sz="1250" b="0">
                 <a:solidFill>
                   <a:srgbClr val="1A202C"/>
                 </a:solidFill>
                 <a:latin typeface="Calibri"/>
               </a:rPr>
-              <a:t>Code version-controlled and pushed to GitHub</a:t>
+              <a:t>Outliers checked via box plot (IQR) — 502 of 5,000 videos flagged</a:t>
+            </a:r>
+          </a:p>
+          <a:p>
+            <a:pPr>
+              <a:spcAft>
+                <a:spcPts val="1400"/>
+              </a:spcAft>
+            </a:pPr>
+            <a:r>
+              <a:rPr sz="1250" b="1">
+                <a:solidFill>
+                  <a:srgbClr val="16A34A"/>
+                </a:solidFill>
+                <a:latin typeface="Calibri"/>
+              </a:rPr>
+              <a:t>▸  </a:t>
+            </a:r>
+            <a:r>
+              <a:rPr sz="1250" b="0">
+                <a:solidFill>
+                  <a:srgbClr val="1A202C"/>
+                </a:solidFill>
+                <a:latin typeface="Calibri"/>
+              </a:rPr>
+              <a:t>Preprocessing dry-run verified: MTCNN face crops confirmed on GPU</a:t>
             </a:r>
           </a:p>
         </p:txBody>
@@ -7260,7 +7286,7 @@
               </a:spcAft>
             </a:pPr>
             <a:r>
-              <a:rPr sz="1250" b="1" i="0">
+              <a:rPr sz="1250" b="1">
                 <a:solidFill>
                   <a:srgbClr val="F59E0B"/>
                 </a:solidFill>
@@ -7269,22 +7295,22 @@
               <a:t>▸  </a:t>
             </a:r>
             <a:r>
-              <a:rPr sz="1250" b="1" i="0">
+              <a:rPr sz="1250" b="1">
                 <a:solidFill>
                   <a:srgbClr val="1A202C"/>
                 </a:solidFill>
                 <a:latin typeface="Calibri"/>
               </a:rPr>
-              <a:t>Dataset access: </a:t>
-            </a:r>
-            <a:r>
-              <a:rPr sz="1250" b="0" i="0">
+              <a:t>Full preprocessing: </a:t>
+            </a:r>
+            <a:r>
+              <a:rPr sz="1250" b="0">
                 <a:solidFill>
                   <a:srgbClr val="1A202C"/>
                 </a:solidFill>
                 <a:latin typeface="Calibri"/>
               </a:rPr>
-              <a:t>official FF++ form submitted, approval pending (~days)</a:t>
+              <a:t>extracting face crops for all ~5,000 videos</a:t>
             </a:r>
           </a:p>
           <a:p>
@@ -7294,7 +7320,7 @@
               </a:spcAft>
             </a:pPr>
             <a:r>
-              <a:rPr sz="1250" b="1" i="0">
+              <a:rPr sz="1250" b="1">
                 <a:solidFill>
                   <a:srgbClr val="F59E0B"/>
                 </a:solidFill>
@@ -7303,22 +7329,22 @@
               <a:t>▸  </a:t>
             </a:r>
             <a:r>
-              <a:rPr sz="1250" b="1" i="0">
+              <a:rPr sz="1250" b="1">
                 <a:solidFill>
                   <a:srgbClr val="1A202C"/>
                 </a:solidFill>
                 <a:latin typeface="Calibri"/>
               </a:rPr>
-              <a:t>Dataset bridge: </a:t>
-            </a:r>
-            <a:r>
-              <a:rPr sz="1250" b="0" i="0">
+              <a:t>Training runs: </a:t>
+            </a:r>
+            <a:r>
+              <a:rPr sz="1250" b="0">
                 <a:solidFill>
                   <a:srgbClr val="1A202C"/>
                 </a:solidFill>
                 <a:latin typeface="Calibri"/>
               </a:rPr>
-              <a:t>Kaggle mirror identified for c23 data, download next</a:t>
+              <a:t>12 training runs across both models, not yet started</a:t>
             </a:r>
           </a:p>
           <a:p>
@@ -7328,7 +7354,7 @@
               </a:spcAft>
             </a:pPr>
             <a:r>
-              <a:rPr sz="1250" b="1" i="0">
+              <a:rPr sz="1250" b="1">
                 <a:solidFill>
                   <a:srgbClr val="F59E0B"/>
                 </a:solidFill>
@@ -7337,22 +7363,22 @@
               <a:t>▸  </a:t>
             </a:r>
             <a:r>
-              <a:rPr sz="1250" b="1" i="0">
+              <a:rPr sz="1250" b="1">
                 <a:solidFill>
                   <a:srgbClr val="1A202C"/>
                 </a:solidFill>
                 <a:latin typeface="Calibri"/>
               </a:rPr>
-              <a:t>Not yet started: </a:t>
-            </a:r>
-            <a:r>
-              <a:rPr sz="1250" b="0" i="0">
+              <a:t>Evaluation &amp; analysis: </a:t>
+            </a:r>
+            <a:r>
+              <a:rPr sz="1250" b="0">
                 <a:solidFill>
                   <a:srgbClr val="1A202C"/>
                 </a:solidFill>
                 <a:latin typeface="Calibri"/>
               </a:rPr>
-              <a:t>preprocessing, training runs, evaluation, analysis</a:t>
+              <a:t>cross-manipulation + compression experiments</a:t>
             </a:r>
           </a:p>
         </p:txBody>
@@ -7422,7 +7448,7 @@
                 </a:solidFill>
                 <a:latin typeface="Calibri"/>
               </a:rPr>
-              <a:t>5/8</a:t>
+              <a:t>5/9</a:t>
             </a:r>
           </a:p>
         </p:txBody>
@@ -9432,7 +9458,7 @@
                 </a:solidFill>
                 <a:latin typeface="Calibri"/>
               </a:rPr>
-              <a:t>6/8</a:t>
+              <a:t>6/9</a:t>
             </a:r>
           </a:p>
         </p:txBody>
@@ -10281,7 +10307,7 @@
                 </a:solidFill>
                 <a:latin typeface="Calibri"/>
               </a:rPr>
-              <a:t>7/8</a:t>
+              <a:t>7/9</a:t>
             </a:r>
           </a:p>
         </p:txBody>
@@ -10319,6 +10345,784 @@
             <a:avLst/>
           </a:prstGeom>
           <a:solidFill>
+            <a:srgbClr val="FFFFFF"/>
+          </a:solidFill>
+          <a:ln>
+            <a:noFill/>
+          </a:ln>
+          <a:effectLst/>
+        </p:spPr>
+        <p:style>
+          <a:lnRef idx="1">
+            <a:schemeClr val="accent1"/>
+          </a:lnRef>
+          <a:fillRef idx="3">
+            <a:schemeClr val="accent1"/>
+          </a:fillRef>
+          <a:effectRef idx="2">
+            <a:schemeClr val="accent1"/>
+          </a:effectRef>
+          <a:fontRef idx="minor">
+            <a:schemeClr val="lt1"/>
+          </a:fontRef>
+        </p:style>
+        <p:txBody>
+          <a:bodyPr rtlCol="0" anchor="ctr"/>
+          <a:lstStyle/>
+          <a:p>
+            <a:pPr algn="ctr"/>
+          </a:p>
+        </p:txBody>
+      </p:sp>
+      <p:sp>
+        <p:nvSpPr>
+          <p:cNvPr id="3" name="TextBox 2"/>
+          <p:cNvSpPr txBox="1"/>
+          <p:nvPr/>
+        </p:nvSpPr>
+        <p:spPr>
+          <a:xfrm>
+            <a:off x="640080" y="384048"/>
+            <a:ext cx="9144000" cy="320040"/>
+          </a:xfrm>
+          <a:prstGeom prst="rect">
+            <a:avLst/>
+          </a:prstGeom>
+          <a:noFill/>
+        </p:spPr>
+        <p:txBody>
+          <a:bodyPr wrap="square" lIns="0" rIns="0" tIns="0" bIns="0">
+            <a:spAutoFit/>
+          </a:bodyPr>
+          <a:lstStyle/>
+          <a:p>
+            <a:pPr algn="l"/>
+            <a:r>
+              <a:rPr sz="1300" b="1">
+                <a:solidFill>
+                  <a:srgbClr val="0E7490"/>
+                </a:solidFill>
+                <a:latin typeface="Calibri"/>
+              </a:rPr>
+              <a:t>DATA QUALITY</a:t>
+            </a:r>
+          </a:p>
+        </p:txBody>
+      </p:sp>
+      <p:sp>
+        <p:nvSpPr>
+          <p:cNvPr id="4" name="TextBox 3"/>
+          <p:cNvSpPr txBox="1"/>
+          <p:nvPr/>
+        </p:nvSpPr>
+        <p:spPr>
+          <a:xfrm>
+            <a:off x="640080" y="658368"/>
+            <a:ext cx="10515600" cy="640080"/>
+          </a:xfrm>
+          <a:prstGeom prst="rect">
+            <a:avLst/>
+          </a:prstGeom>
+          <a:noFill/>
+        </p:spPr>
+        <p:txBody>
+          <a:bodyPr wrap="square" lIns="0" rIns="0" tIns="0" bIns="0">
+            <a:spAutoFit/>
+          </a:bodyPr>
+          <a:lstStyle/>
+          <a:p>
+            <a:pPr algn="l"/>
+            <a:r>
+              <a:rPr sz="3000" b="1">
+                <a:solidFill>
+                  <a:srgbClr val="1A202C"/>
+                </a:solidFill>
+                <a:latin typeface="Calibri"/>
+              </a:rPr>
+              <a:t>Outlier Removal via Box Plot (IQR)</a:t>
+            </a:r>
+          </a:p>
+        </p:txBody>
+      </p:sp>
+      <p:sp>
+        <p:nvSpPr>
+          <p:cNvPr id="5" name="Rectangle 4"/>
+          <p:cNvSpPr/>
+          <p:nvPr/>
+        </p:nvSpPr>
+        <p:spPr>
+          <a:xfrm>
+            <a:off x="640080" y="1353312"/>
+            <a:ext cx="502920" cy="41148"/>
+          </a:xfrm>
+          <a:prstGeom prst="rect">
+            <a:avLst/>
+          </a:prstGeom>
+          <a:solidFill>
+            <a:srgbClr val="22B8CF"/>
+          </a:solidFill>
+          <a:ln>
+            <a:noFill/>
+          </a:ln>
+          <a:effectLst/>
+        </p:spPr>
+        <p:style>
+          <a:lnRef idx="1">
+            <a:schemeClr val="accent1"/>
+          </a:lnRef>
+          <a:fillRef idx="3">
+            <a:schemeClr val="accent1"/>
+          </a:fillRef>
+          <a:effectRef idx="2">
+            <a:schemeClr val="accent1"/>
+          </a:effectRef>
+          <a:fontRef idx="minor">
+            <a:schemeClr val="lt1"/>
+          </a:fontRef>
+        </p:style>
+        <p:txBody>
+          <a:bodyPr rtlCol="0" anchor="ctr"/>
+          <a:lstStyle/>
+          <a:p>
+            <a:pPr algn="ctr"/>
+          </a:p>
+        </p:txBody>
+      </p:sp>
+      <p:sp>
+        <p:nvSpPr>
+          <p:cNvPr id="6" name="TextBox 5"/>
+          <p:cNvSpPr txBox="1"/>
+          <p:nvPr/>
+        </p:nvSpPr>
+        <p:spPr>
+          <a:xfrm>
+            <a:off x="640080" y="1691640"/>
+            <a:ext cx="10515600" cy="457200"/>
+          </a:xfrm>
+          <a:prstGeom prst="rect">
+            <a:avLst/>
+          </a:prstGeom>
+          <a:noFill/>
+        </p:spPr>
+        <p:txBody>
+          <a:bodyPr wrap="square" lIns="0" rIns="0" tIns="0" bIns="0">
+            <a:spAutoFit/>
+          </a:bodyPr>
+          <a:lstStyle/>
+          <a:p>
+            <a:pPr algn="l"/>
+            <a:r>
+              <a:rPr sz="1350" b="0">
+                <a:solidFill>
+                  <a:srgbClr val="475569"/>
+                </a:solidFill>
+                <a:latin typeface="Calibri"/>
+              </a:rPr>
+              <a:t>Per-video metadata (frame count, file size) from the FF++ Kaggle mirror, checked with Tukey's IQR method — flags anything beyond Q1 − 1.5×IQR / Q3 + 1.5×IQR.</a:t>
+            </a:r>
+          </a:p>
+        </p:txBody>
+      </p:sp>
+      <p:pic>
+        <p:nvPicPr>
+          <p:cNvPr id="7" name="Picture 6" descr="outlier_boxplots.png"/>
+          <p:cNvPicPr>
+            <a:picLocks noChangeAspect="1"/>
+          </p:cNvPicPr>
+          <p:nvPr/>
+        </p:nvPicPr>
+        <p:blipFill>
+          <a:blip r:embed="rId2"/>
+          <a:stretch>
+            <a:fillRect/>
+          </a:stretch>
+        </p:blipFill>
+        <p:spPr>
+          <a:xfrm>
+            <a:off x="640080" y="2286000"/>
+            <a:ext cx="7406640" cy="3648169"/>
+          </a:xfrm>
+          <a:prstGeom prst="rect">
+            <a:avLst/>
+          </a:prstGeom>
+        </p:spPr>
+      </p:pic>
+      <p:sp>
+        <p:nvSpPr>
+          <p:cNvPr id="8" name="Rectangle 7"/>
+          <p:cNvSpPr/>
+          <p:nvPr/>
+        </p:nvSpPr>
+        <p:spPr>
+          <a:xfrm>
+            <a:off x="8321040" y="2286000"/>
+            <a:ext cx="3200400" cy="4114800"/>
+          </a:xfrm>
+          <a:prstGeom prst="rect">
+            <a:avLst/>
+          </a:prstGeom>
+          <a:solidFill>
+            <a:srgbClr val="F1F5F9"/>
+          </a:solidFill>
+          <a:ln>
+            <a:noFill/>
+          </a:ln>
+          <a:effectLst/>
+        </p:spPr>
+        <p:style>
+          <a:lnRef idx="1">
+            <a:schemeClr val="accent1"/>
+          </a:lnRef>
+          <a:fillRef idx="3">
+            <a:schemeClr val="accent1"/>
+          </a:fillRef>
+          <a:effectRef idx="2">
+            <a:schemeClr val="accent1"/>
+          </a:effectRef>
+          <a:fontRef idx="minor">
+            <a:schemeClr val="lt1"/>
+          </a:fontRef>
+        </p:style>
+        <p:txBody>
+          <a:bodyPr rtlCol="0" anchor="ctr"/>
+          <a:lstStyle/>
+          <a:p>
+            <a:pPr algn="ctr"/>
+          </a:p>
+        </p:txBody>
+      </p:sp>
+      <p:sp>
+        <p:nvSpPr>
+          <p:cNvPr id="9" name="TextBox 8"/>
+          <p:cNvSpPr txBox="1"/>
+          <p:nvPr/>
+        </p:nvSpPr>
+        <p:spPr>
+          <a:xfrm>
+            <a:off x="8549640" y="2513965"/>
+            <a:ext cx="2743200" cy="320040"/>
+          </a:xfrm>
+          <a:prstGeom prst="rect">
+            <a:avLst/>
+          </a:prstGeom>
+          <a:noFill/>
+        </p:spPr>
+        <p:txBody>
+          <a:bodyPr wrap="square" lIns="0" rIns="0" tIns="0" bIns="0">
+            <a:spAutoFit/>
+          </a:bodyPr>
+          <a:lstStyle/>
+          <a:p>
+            <a:pPr algn="l"/>
+            <a:r>
+              <a:rPr sz="1100" b="1">
+                <a:solidFill>
+                  <a:srgbClr val="0E7490"/>
+                </a:solidFill>
+                <a:latin typeface="Calibri"/>
+              </a:rPr>
+              <a:t>RESULT</a:t>
+            </a:r>
+          </a:p>
+        </p:txBody>
+      </p:sp>
+      <p:sp>
+        <p:nvSpPr>
+          <p:cNvPr id="10" name="TextBox 9"/>
+          <p:cNvSpPr txBox="1"/>
+          <p:nvPr/>
+        </p:nvSpPr>
+        <p:spPr>
+          <a:xfrm>
+            <a:off x="8549640" y="2895600"/>
+            <a:ext cx="2743200" cy="365760"/>
+          </a:xfrm>
+          <a:prstGeom prst="rect">
+            <a:avLst/>
+          </a:prstGeom>
+          <a:noFill/>
+        </p:spPr>
+        <p:txBody>
+          <a:bodyPr wrap="square" lIns="0" rIns="0" tIns="0" bIns="0">
+            <a:spAutoFit/>
+          </a:bodyPr>
+          <a:lstStyle/>
+          <a:p>
+            <a:pPr algn="l"/>
+            <a:r>
+              <a:rPr sz="2200" b="1">
+                <a:solidFill>
+                  <a:srgbClr val="0F172A"/>
+                </a:solidFill>
+                <a:latin typeface="Calibri"/>
+              </a:rPr>
+              <a:t>5,000</a:t>
+            </a:r>
+          </a:p>
+        </p:txBody>
+      </p:sp>
+      <p:sp>
+        <p:nvSpPr>
+          <p:cNvPr id="11" name="TextBox 10"/>
+          <p:cNvSpPr txBox="1"/>
+          <p:nvPr/>
+        </p:nvSpPr>
+        <p:spPr>
+          <a:xfrm>
+            <a:off x="8549640" y="3252216"/>
+            <a:ext cx="2743200" cy="320040"/>
+          </a:xfrm>
+          <a:prstGeom prst="rect">
+            <a:avLst/>
+          </a:prstGeom>
+          <a:noFill/>
+        </p:spPr>
+        <p:txBody>
+          <a:bodyPr wrap="square" lIns="0" rIns="0" tIns="0" bIns="0">
+            <a:spAutoFit/>
+          </a:bodyPr>
+          <a:lstStyle/>
+          <a:p>
+            <a:pPr algn="l"/>
+            <a:r>
+              <a:rPr sz="1050" b="0">
+                <a:solidFill>
+                  <a:srgbClr val="475569"/>
+                </a:solidFill>
+                <a:latin typeface="Calibri"/>
+              </a:rPr>
+              <a:t>videos analyzed (real + 4 manipulation methods)</a:t>
+            </a:r>
+          </a:p>
+        </p:txBody>
+      </p:sp>
+      <p:sp>
+        <p:nvSpPr>
+          <p:cNvPr id="12" name="TextBox 11"/>
+          <p:cNvSpPr txBox="1"/>
+          <p:nvPr/>
+        </p:nvSpPr>
+        <p:spPr>
+          <a:xfrm>
+            <a:off x="8549640" y="3515600"/>
+            <a:ext cx="2743200" cy="365760"/>
+          </a:xfrm>
+          <a:prstGeom prst="rect">
+            <a:avLst/>
+          </a:prstGeom>
+          <a:noFill/>
+        </p:spPr>
+        <p:txBody>
+          <a:bodyPr wrap="square" lIns="0" rIns="0" tIns="0" bIns="0">
+            <a:spAutoFit/>
+          </a:bodyPr>
+          <a:lstStyle/>
+          <a:p>
+            <a:pPr algn="l"/>
+            <a:r>
+              <a:rPr sz="2200" b="1">
+                <a:solidFill>
+                  <a:srgbClr val="0F172A"/>
+                </a:solidFill>
+                <a:latin typeface="Calibri"/>
+              </a:rPr>
+              <a:t>209</a:t>
+            </a:r>
+          </a:p>
+        </p:txBody>
+      </p:sp>
+      <p:sp>
+        <p:nvSpPr>
+          <p:cNvPr id="13" name="TextBox 12"/>
+          <p:cNvSpPr txBox="1"/>
+          <p:nvPr/>
+        </p:nvSpPr>
+        <p:spPr>
+          <a:xfrm>
+            <a:off x="8549640" y="3872216"/>
+            <a:ext cx="2743200" cy="320040"/>
+          </a:xfrm>
+          <a:prstGeom prst="rect">
+            <a:avLst/>
+          </a:prstGeom>
+          <a:noFill/>
+        </p:spPr>
+        <p:txBody>
+          <a:bodyPr wrap="square" lIns="0" rIns="0" tIns="0" bIns="0">
+            <a:spAutoFit/>
+          </a:bodyPr>
+          <a:lstStyle/>
+          <a:p>
+            <a:pPr algn="l"/>
+            <a:r>
+              <a:rPr sz="1050" b="0">
+                <a:solidFill>
+                  <a:srgbClr val="475569"/>
+                </a:solidFill>
+                <a:latin typeface="Calibri"/>
+              </a:rPr>
+              <a:t>flagged on frame count (4.2%)</a:t>
+            </a:r>
+          </a:p>
+        </p:txBody>
+      </p:sp>
+      <p:sp>
+        <p:nvSpPr>
+          <p:cNvPr id="14" name="TextBox 13"/>
+          <p:cNvSpPr txBox="1"/>
+          <p:nvPr/>
+        </p:nvSpPr>
+        <p:spPr>
+          <a:xfrm>
+            <a:off x="8549640" y="4135600"/>
+            <a:ext cx="2743200" cy="365760"/>
+          </a:xfrm>
+          <a:prstGeom prst="rect">
+            <a:avLst/>
+          </a:prstGeom>
+          <a:noFill/>
+        </p:spPr>
+        <p:txBody>
+          <a:bodyPr wrap="square" lIns="0" rIns="0" tIns="0" bIns="0">
+            <a:spAutoFit/>
+          </a:bodyPr>
+          <a:lstStyle/>
+          <a:p>
+            <a:pPr algn="l"/>
+            <a:r>
+              <a:rPr sz="2200" b="1">
+                <a:solidFill>
+                  <a:srgbClr val="0F172A"/>
+                </a:solidFill>
+                <a:latin typeface="Calibri"/>
+              </a:rPr>
+              <a:t>326</a:t>
+            </a:r>
+          </a:p>
+        </p:txBody>
+      </p:sp>
+      <p:sp>
+        <p:nvSpPr>
+          <p:cNvPr id="15" name="TextBox 14"/>
+          <p:cNvSpPr txBox="1"/>
+          <p:nvPr/>
+        </p:nvSpPr>
+        <p:spPr>
+          <a:xfrm>
+            <a:off x="8549640" y="4492216"/>
+            <a:ext cx="2743200" cy="320040"/>
+          </a:xfrm>
+          <a:prstGeom prst="rect">
+            <a:avLst/>
+          </a:prstGeom>
+          <a:noFill/>
+        </p:spPr>
+        <p:txBody>
+          <a:bodyPr wrap="square" lIns="0" rIns="0" tIns="0" bIns="0">
+            <a:spAutoFit/>
+          </a:bodyPr>
+          <a:lstStyle/>
+          <a:p>
+            <a:pPr algn="l"/>
+            <a:r>
+              <a:rPr sz="1050" b="0">
+                <a:solidFill>
+                  <a:srgbClr val="475569"/>
+                </a:solidFill>
+                <a:latin typeface="Calibri"/>
+              </a:rPr>
+              <a:t>flagged on file size (6.5%)</a:t>
+            </a:r>
+          </a:p>
+        </p:txBody>
+      </p:sp>
+      <p:sp>
+        <p:nvSpPr>
+          <p:cNvPr id="16" name="TextBox 15"/>
+          <p:cNvSpPr txBox="1"/>
+          <p:nvPr/>
+        </p:nvSpPr>
+        <p:spPr>
+          <a:xfrm>
+            <a:off x="8549640" y="4755600"/>
+            <a:ext cx="2743200" cy="365760"/>
+          </a:xfrm>
+          <a:prstGeom prst="rect">
+            <a:avLst/>
+          </a:prstGeom>
+          <a:noFill/>
+        </p:spPr>
+        <p:txBody>
+          <a:bodyPr wrap="square" lIns="0" rIns="0" tIns="0" bIns="0">
+            <a:spAutoFit/>
+          </a:bodyPr>
+          <a:lstStyle/>
+          <a:p>
+            <a:pPr algn="l"/>
+            <a:r>
+              <a:rPr sz="2200" b="1">
+                <a:solidFill>
+                  <a:srgbClr val="0F172A"/>
+                </a:solidFill>
+                <a:latin typeface="Calibri"/>
+              </a:rPr>
+              <a:t>502</a:t>
+            </a:r>
+          </a:p>
+        </p:txBody>
+      </p:sp>
+      <p:sp>
+        <p:nvSpPr>
+          <p:cNvPr id="17" name="TextBox 16"/>
+          <p:cNvSpPr txBox="1"/>
+          <p:nvPr/>
+        </p:nvSpPr>
+        <p:spPr>
+          <a:xfrm>
+            <a:off x="8549640" y="5112216"/>
+            <a:ext cx="2743200" cy="320040"/>
+          </a:xfrm>
+          <a:prstGeom prst="rect">
+            <a:avLst/>
+          </a:prstGeom>
+          <a:noFill/>
+        </p:spPr>
+        <p:txBody>
+          <a:bodyPr wrap="square" lIns="0" rIns="0" tIns="0" bIns="0">
+            <a:spAutoFit/>
+          </a:bodyPr>
+          <a:lstStyle/>
+          <a:p>
+            <a:pPr algn="l"/>
+            <a:r>
+              <a:rPr sz="1050" b="0">
+                <a:solidFill>
+                  <a:srgbClr val="475569"/>
+                </a:solidFill>
+                <a:latin typeface="Calibri"/>
+              </a:rPr>
+              <a:t>unique outlier videos overall (10.0%)</a:t>
+            </a:r>
+          </a:p>
+        </p:txBody>
+      </p:sp>
+      <p:sp>
+        <p:nvSpPr>
+          <p:cNvPr id="18" name="Rectangle 17"/>
+          <p:cNvSpPr/>
+          <p:nvPr/>
+        </p:nvSpPr>
+        <p:spPr>
+          <a:xfrm>
+            <a:off x="8549640" y="5635600"/>
+            <a:ext cx="2743200" cy="18288"/>
+          </a:xfrm>
+          <a:prstGeom prst="rect">
+            <a:avLst/>
+          </a:prstGeom>
+          <a:solidFill>
+            <a:srgbClr val="E2E8F0"/>
+          </a:solidFill>
+          <a:ln>
+            <a:noFill/>
+          </a:ln>
+          <a:effectLst/>
+        </p:spPr>
+        <p:style>
+          <a:lnRef idx="1">
+            <a:schemeClr val="accent1"/>
+          </a:lnRef>
+          <a:fillRef idx="3">
+            <a:schemeClr val="accent1"/>
+          </a:fillRef>
+          <a:effectRef idx="2">
+            <a:schemeClr val="accent1"/>
+          </a:effectRef>
+          <a:fontRef idx="minor">
+            <a:schemeClr val="lt1"/>
+          </a:fontRef>
+        </p:style>
+        <p:txBody>
+          <a:bodyPr rtlCol="0" anchor="ctr"/>
+          <a:lstStyle/>
+          <a:p>
+            <a:pPr algn="ctr"/>
+          </a:p>
+        </p:txBody>
+      </p:sp>
+      <p:sp>
+        <p:nvSpPr>
+          <p:cNvPr id="19" name="TextBox 18"/>
+          <p:cNvSpPr txBox="1"/>
+          <p:nvPr/>
+        </p:nvSpPr>
+        <p:spPr>
+          <a:xfrm>
+            <a:off x="8549640" y="5415600"/>
+            <a:ext cx="2743200" cy="320040"/>
+          </a:xfrm>
+          <a:prstGeom prst="rect">
+            <a:avLst/>
+          </a:prstGeom>
+          <a:noFill/>
+        </p:spPr>
+        <p:txBody>
+          <a:bodyPr wrap="square" lIns="0" rIns="0" tIns="0" bIns="0">
+            <a:spAutoFit/>
+          </a:bodyPr>
+          <a:lstStyle/>
+          <a:p>
+            <a:pPr algn="l"/>
+            <a:r>
+              <a:rPr sz="1100" b="1">
+                <a:solidFill>
+                  <a:srgbClr val="0E7490"/>
+                </a:solidFill>
+                <a:latin typeface="Calibri"/>
+              </a:rPr>
+              <a:t>Action</a:t>
+            </a:r>
+          </a:p>
+        </p:txBody>
+      </p:sp>
+      <p:sp>
+        <p:nvSpPr>
+          <p:cNvPr id="20" name="TextBox 19"/>
+          <p:cNvSpPr txBox="1"/>
+          <p:nvPr/>
+        </p:nvSpPr>
+        <p:spPr>
+          <a:xfrm>
+            <a:off x="8549640" y="5715600"/>
+            <a:ext cx="2743200" cy="400000"/>
+          </a:xfrm>
+          <a:prstGeom prst="rect">
+            <a:avLst/>
+          </a:prstGeom>
+          <a:noFill/>
+        </p:spPr>
+        <p:txBody>
+          <a:bodyPr wrap="square" lIns="0" rIns="0" tIns="0" bIns="0">
+            <a:spAutoFit/>
+          </a:bodyPr>
+          <a:lstStyle/>
+          <a:p>
+            <a:pPr algn="l"/>
+            <a:r>
+              <a:rPr sz="1150" b="0">
+                <a:solidFill>
+                  <a:srgbClr val="1A202C"/>
+                </a:solidFill>
+                <a:latin typeface="Calibri"/>
+              </a:rPr>
+              <a:t>Excluded before preprocessing — clean set: 4,498 videos.</a:t>
+            </a:r>
+          </a:p>
+        </p:txBody>
+      </p:sp>
+      <p:sp>
+        <p:nvSpPr>
+          <p:cNvPr id="21" name="TextBox 20"/>
+          <p:cNvSpPr txBox="1"/>
+          <p:nvPr/>
+        </p:nvSpPr>
+        <p:spPr>
+          <a:xfrm>
+            <a:off x="640080" y="6510528"/>
+            <a:ext cx="5486400" cy="274320"/>
+          </a:xfrm>
+          <a:prstGeom prst="rect">
+            <a:avLst/>
+          </a:prstGeom>
+          <a:noFill/>
+        </p:spPr>
+        <p:txBody>
+          <a:bodyPr wrap="square" lIns="0" rIns="0" tIns="0" bIns="0">
+            <a:spAutoFit/>
+          </a:bodyPr>
+          <a:lstStyle/>
+          <a:p>
+            <a:pPr algn="l"/>
+            <a:r>
+              <a:rPr sz="1000" b="0">
+                <a:solidFill>
+                  <a:srgbClr val="94A3B8"/>
+                </a:solidFill>
+                <a:latin typeface="Calibri"/>
+              </a:rPr>
+              <a:t>Deepfake Detection — Mid-Review Update</a:t>
+            </a:r>
+          </a:p>
+        </p:txBody>
+      </p:sp>
+      <p:sp>
+        <p:nvSpPr>
+          <p:cNvPr id="22" name="TextBox 21"/>
+          <p:cNvSpPr txBox="1"/>
+          <p:nvPr/>
+        </p:nvSpPr>
+        <p:spPr>
+          <a:xfrm>
+            <a:off x="10972800" y="6510528"/>
+            <a:ext cx="822960" cy="274320"/>
+          </a:xfrm>
+          <a:prstGeom prst="rect">
+            <a:avLst/>
+          </a:prstGeom>
+          <a:noFill/>
+        </p:spPr>
+        <p:txBody>
+          <a:bodyPr wrap="square" lIns="0" rIns="0" tIns="0" bIns="0">
+            <a:spAutoFit/>
+          </a:bodyPr>
+          <a:lstStyle/>
+          <a:p>
+            <a:pPr algn="l"/>
+            <a:r>
+              <a:rPr sz="1000" b="0">
+                <a:solidFill>
+                  <a:srgbClr val="94A3B8"/>
+                </a:solidFill>
+                <a:latin typeface="Calibri"/>
+              </a:rPr>
+              <a:t>8/9</a:t>
+            </a:r>
+          </a:p>
+        </p:txBody>
+      </p:sp>
+    </p:spTree>
+  </p:cSld>
+  <p:clrMapOvr>
+    <a:masterClrMapping/>
+  </p:clrMapOvr>
+</p:sld>
+</file>
+
+<file path=ppt/slides/slide9.xml><?xml version="1.0" encoding="utf-8"?>
+<p:sld xmlns:a="http://schemas.openxmlformats.org/drawingml/2006/main" xmlns:p="http://schemas.openxmlformats.org/presentationml/2006/main" xmlns:r="http://schemas.openxmlformats.org/officeDocument/2006/relationships">
+  <p:cSld>
+    <p:spTree>
+      <p:nvGrpSpPr>
+        <p:cNvPr id="1" name=""/>
+        <p:cNvGrpSpPr/>
+        <p:nvPr/>
+      </p:nvGrpSpPr>
+      <p:grpSpPr/>
+      <p:sp>
+        <p:nvSpPr>
+          <p:cNvPr id="2" name="Rectangle 1"/>
+          <p:cNvSpPr/>
+          <p:nvPr/>
+        </p:nvSpPr>
+        <p:spPr>
+          <a:xfrm>
+            <a:off x="0" y="0"/>
+            <a:ext cx="12191695" cy="6858000"/>
+          </a:xfrm>
+          <a:prstGeom prst="rect">
+            <a:avLst/>
+          </a:prstGeom>
+          <a:solidFill>
             <a:srgbClr val="0F172A"/>
           </a:solidFill>
           <a:ln>
@@ -10880,7 +11684,7 @@
                 </a:solidFill>
                 <a:latin typeface="Calibri"/>
               </a:rPr>
-              <a:t>8/8</a:t>
+              <a:t>9/9</a:t>
             </a:r>
           </a:p>
         </p:txBody>

--- a/docs/mid_review_update.pptx
+++ b/docs/mid_review_update.pptx
@@ -3356,7 +3356,7 @@
         <p:spPr>
           <a:xfrm>
             <a:off x="640080" y="5989320"/>
-            <a:ext cx="7315200" cy="320040"/>
+            <a:ext cx="10852800" cy="320040"/>
           </a:xfrm>
           <a:prstGeom prst="rect">
             <a:avLst/>
@@ -3377,7 +3377,7 @@
                 </a:solidFill>
                 <a:latin typeface="Calibri"/>
               </a:rPr>
-              <a:t>Venugopalan Gangadharan</a:t>
+              <a:t>Venugopalan Gangadharan · Vipin Sudhakar · Rithvik Arulprakash · Harshith Kv</a:t>
             </a:r>
           </a:p>
         </p:txBody>
@@ -4081,7 +4081,7 @@
         <p:spPr>
           <a:xfrm>
             <a:off x="7218680" y="2130000"/>
-            <a:ext cx="4332935" cy="1900000"/>
+            <a:ext cx="4332935" cy="950000"/>
           </a:xfrm>
           <a:prstGeom prst="rect">
             <a:avLst/>
@@ -4099,11 +4099,11 @@
                 <a:spcPct val="112000"/>
               </a:lnSpc>
               <a:spcAft>
-                <a:spcPts val="700"/>
+                <a:spcPts val="500"/>
               </a:spcAft>
             </a:pPr>
             <a:r>
-              <a:rPr sz="1050" b="0">
+              <a:rPr sz="1000" b="0">
                 <a:solidFill>
                   <a:srgbClr val="1A202C"/>
                 </a:solidFill>
@@ -4118,11 +4118,11 @@
                 <a:spcPct val="112000"/>
               </a:lnSpc>
               <a:spcAft>
-                <a:spcPts val="700"/>
+                <a:spcPts val="500"/>
               </a:spcAft>
             </a:pPr>
             <a:r>
-              <a:rPr sz="1050" b="0">
+              <a:rPr sz="1000" b="0">
                 <a:solidFill>
                   <a:srgbClr val="1A202C"/>
                 </a:solidFill>
@@ -4137,11 +4137,11 @@
                 <a:spcPct val="112000"/>
               </a:lnSpc>
               <a:spcAft>
-                <a:spcPts val="700"/>
+                <a:spcPts val="500"/>
               </a:spcAft>
             </a:pPr>
             <a:r>
-              <a:rPr sz="1050" b="0">
+              <a:rPr sz="1000" b="0">
                 <a:solidFill>
                   <a:srgbClr val="1A202C"/>
                 </a:solidFill>
@@ -4156,11 +4156,11 @@
                 <a:spcPct val="112000"/>
               </a:lnSpc>
               <a:spcAft>
-                <a:spcPts val="700"/>
+                <a:spcPts val="500"/>
               </a:spcAft>
             </a:pPr>
             <a:r>
-              <a:rPr sz="1050" b="0">
+              <a:rPr sz="1000" b="0">
                 <a:solidFill>
                   <a:srgbClr val="1A202C"/>
                 </a:solidFill>
@@ -4179,7 +4179,7 @@
         </p:nvSpPr>
         <p:spPr>
           <a:xfrm>
-            <a:off x="7218680" y="4100000"/>
+            <a:off x="7218680" y="3100000"/>
             <a:ext cx="4332935" cy="18288"/>
           </a:xfrm>
           <a:prstGeom prst="rect">
@@ -4223,7 +4223,7 @@
         </p:nvSpPr>
         <p:spPr>
           <a:xfrm>
-            <a:off x="7218680" y="4260000"/>
+            <a:off x="7218680" y="3260000"/>
             <a:ext cx="4332935" cy="320040"/>
           </a:xfrm>
           <a:prstGeom prst="rect">
@@ -4245,7 +4245,7 @@
                 </a:solidFill>
                 <a:latin typeface="Calibri"/>
               </a:rPr>
-              <a:t>CONTRIBUTOR</a:t>
+              <a:t>CONTRIBUTORS</a:t>
             </a:r>
           </a:p>
         </p:txBody>
@@ -4258,8 +4258,8 @@
         </p:nvSpPr>
         <p:spPr>
           <a:xfrm>
-            <a:off x="7218680" y="4560000"/>
-            <a:ext cx="4332935" cy="360000"/>
+            <a:off x="7218680" y="3600000"/>
+            <a:ext cx="4332935" cy="1080000"/>
           </a:xfrm>
           <a:prstGeom prst="rect">
             <a:avLst/>
@@ -4272,15 +4272,79 @@
           </a:bodyPr>
           <a:lstStyle/>
           <a:p>
-            <a:pPr algn="l"/>
-            <a:r>
-              <a:rPr sz="1400" b="1">
+            <a:pPr>
+              <a:lnSpc>
+                <a:spcPct val="112000"/>
+              </a:lnSpc>
+              <a:spcAft>
+                <a:spcPts val="600"/>
+              </a:spcAft>
+            </a:pPr>
+            <a:r>
+              <a:rPr sz="1050" b="1">
                 <a:solidFill>
                   <a:srgbClr val="1A202C"/>
                 </a:solidFill>
                 <a:latin typeface="Calibri"/>
               </a:rPr>
-              <a:t>Venugopalan Gangadharan</a:t>
+              <a:t>▸  Venugopalan Gangadharan — CB.AI.U4AID25115</a:t>
+            </a:r>
+          </a:p>
+          <a:p>
+            <a:pPr>
+              <a:lnSpc>
+                <a:spcPct val="112000"/>
+              </a:lnSpc>
+              <a:spcAft>
+                <a:spcPts val="600"/>
+              </a:spcAft>
+            </a:pPr>
+            <a:r>
+              <a:rPr sz="1050" b="1">
+                <a:solidFill>
+                  <a:srgbClr val="1A202C"/>
+                </a:solidFill>
+                <a:latin typeface="Calibri"/>
+              </a:rPr>
+              <a:t>▸  Vipin Sudhakar — CB.AI.U4AID25166</a:t>
+            </a:r>
+          </a:p>
+          <a:p>
+            <a:pPr>
+              <a:lnSpc>
+                <a:spcPct val="112000"/>
+              </a:lnSpc>
+              <a:spcAft>
+                <a:spcPts val="600"/>
+              </a:spcAft>
+            </a:pPr>
+            <a:r>
+              <a:rPr sz="1050" b="1">
+                <a:solidFill>
+                  <a:srgbClr val="1A202C"/>
+                </a:solidFill>
+                <a:latin typeface="Calibri"/>
+              </a:rPr>
+              <a:t>▸  Rithvik Arulprakash — CB.AI.U4AID25148</a:t>
+            </a:r>
+          </a:p>
+          <a:p>
+            <a:pPr>
+              <a:lnSpc>
+                <a:spcPct val="112000"/>
+              </a:lnSpc>
+              <a:spcAft>
+                <a:spcPts val="600"/>
+              </a:spcAft>
+            </a:pPr>
+            <a:r>
+              <a:rPr sz="1050" b="1">
+                <a:solidFill>
+                  <a:srgbClr val="1A202C"/>
+                </a:solidFill>
+                <a:latin typeface="Calibri"/>
+              </a:rPr>
+              <a:t>▸  Harshith Kv — CB.AI.U4AID25119</a:t>
             </a:r>
           </a:p>
         </p:txBody>
@@ -4293,8 +4357,8 @@
         </p:nvSpPr>
         <p:spPr>
           <a:xfrm>
-            <a:off x="7218680" y="4910000"/>
-            <a:ext cx="4332935" cy="500000"/>
+            <a:off x="7218680" y="4700000"/>
+            <a:ext cx="4332935" cy="360000"/>
           </a:xfrm>
           <a:prstGeom prst="rect">
             <a:avLst/>
@@ -4309,7 +4373,7 @@
           <a:p>
             <a:pPr algn="l"/>
             <a:r>
-              <a:rPr sz="1050" b="0">
+              <a:rPr sz="1000" b="0">
                 <a:solidFill>
                   <a:srgbClr val="475569"/>
                 </a:solidFill>
@@ -4328,7 +4392,7 @@
         </p:nvSpPr>
         <p:spPr>
           <a:xfrm>
-            <a:off x="7218680" y="5450000"/>
+            <a:off x="7218680" y="5150000"/>
             <a:ext cx="4332935" cy="320040"/>
           </a:xfrm>
           <a:prstGeom prst="rect">
@@ -4363,7 +4427,7 @@
         </p:nvSpPr>
         <p:spPr>
           <a:xfrm>
-            <a:off x="7218680" y="5750000"/>
+            <a:off x="7218680" y="5450000"/>
             <a:ext cx="4332935" cy="500000"/>
           </a:xfrm>
           <a:prstGeom prst="rect">

--- a/docs/mid_review_update.pptx
+++ b/docs/mid_review_update.pptx
@@ -14,8 +14,6 @@
     <p:sldId id="262" r:id="rId13"/>
     <p:sldId id="263" r:id="rId14"/>
     <p:sldId id="264" r:id="rId15"/>
-    <p:sldId id="265" r:id="rId16"/>
-    <p:sldId id="266" r:id="rId17"/>
   </p:sldIdLst>
   <p:sldSz cx="12191695" cy="6858000" type="screen4x3"/>
   <p:notesSz cx="6858000" cy="9144000"/>
@@ -3298,7 +3296,7 @@
                 </a:solidFill>
                 <a:latin typeface="Calibri"/>
               </a:rPr>
-              <a:t>Cross-manipulation generalization and compression robustness — full pipeline run, both models trained, results analyzed, and a working live demo.</a:t>
+              <a:t>Data pipeline complete, baseline results in. Cross-manipulation generalization, compression robustness, and final conclusions to follow at the final review.</a:t>
             </a:r>
           </a:p>
         </p:txBody>
@@ -3413,1113 +3411,6 @@
                 <a:latin typeface="Calibri"/>
               </a:rPr>
               <a:t>AI &amp; Data Science — Amrita Vishwa Vidyapeetham, Coimbatore</a:t>
-            </a:r>
-          </a:p>
-        </p:txBody>
-      </p:sp>
-    </p:spTree>
-  </p:cSld>
-  <p:clrMapOvr>
-    <a:masterClrMapping/>
-  </p:clrMapOvr>
-</p:sld>
-</file>
-
-<file path=ppt/slides/slide10.xml><?xml version="1.0" encoding="utf-8"?>
-<p:sld xmlns:a="http://schemas.openxmlformats.org/drawingml/2006/main" xmlns:p="http://schemas.openxmlformats.org/presentationml/2006/main" xmlns:r="http://schemas.openxmlformats.org/officeDocument/2006/relationships">
-  <p:cSld>
-    <p:spTree>
-      <p:nvGrpSpPr>
-        <p:cNvPr id="1" name=""/>
-        <p:cNvGrpSpPr/>
-        <p:nvPr/>
-      </p:nvGrpSpPr>
-      <p:grpSpPr/>
-      <p:sp>
-        <p:nvSpPr>
-          <p:cNvPr id="2" name="Rectangle 1"/>
-          <p:cNvSpPr/>
-          <p:nvPr/>
-        </p:nvSpPr>
-        <p:spPr>
-          <a:xfrm>
-            <a:off x="0" y="0"/>
-            <a:ext cx="12191695" cy="6858000"/>
-          </a:xfrm>
-          <a:prstGeom prst="rect">
-            <a:avLst/>
-          </a:prstGeom>
-          <a:solidFill>
-            <a:srgbClr val="FFFFFF"/>
-          </a:solidFill>
-          <a:ln>
-            <a:noFill/>
-          </a:ln>
-          <a:effectLst/>
-        </p:spPr>
-        <p:style>
-          <a:lnRef idx="1">
-            <a:schemeClr val="accent1"/>
-          </a:lnRef>
-          <a:fillRef idx="3">
-            <a:schemeClr val="accent1"/>
-          </a:fillRef>
-          <a:effectRef idx="2">
-            <a:schemeClr val="accent1"/>
-          </a:effectRef>
-          <a:fontRef idx="minor">
-            <a:schemeClr val="lt1"/>
-          </a:fontRef>
-        </p:style>
-        <p:txBody>
-          <a:bodyPr rtlCol="0" anchor="ctr"/>
-          <a:lstStyle/>
-          <a:p>
-            <a:pPr algn="ctr"/>
-          </a:p>
-        </p:txBody>
-      </p:sp>
-      <p:sp>
-        <p:nvSpPr>
-          <p:cNvPr id="3" name="TextBox 2"/>
-          <p:cNvSpPr txBox="1"/>
-          <p:nvPr/>
-        </p:nvSpPr>
-        <p:spPr>
-          <a:xfrm>
-            <a:off x="640080" y="384048"/>
-            <a:ext cx="9144000" cy="320040"/>
-          </a:xfrm>
-          <a:prstGeom prst="rect">
-            <a:avLst/>
-          </a:prstGeom>
-          <a:noFill/>
-        </p:spPr>
-        <p:txBody>
-          <a:bodyPr wrap="square">
-            <a:spAutoFit/>
-          </a:bodyPr>
-          <a:lstStyle/>
-          <a:p>
-            <a:pPr algn="l"/>
-            <a:r>
-              <a:rPr sz="1300" b="1">
-                <a:solidFill>
-                  <a:srgbClr val="0E7490"/>
-                </a:solidFill>
-                <a:latin typeface="Calibri"/>
-              </a:rPr>
-              <a:t>SOFTWARE IMPLEMENTATION</a:t>
-            </a:r>
-          </a:p>
-        </p:txBody>
-      </p:sp>
-      <p:sp>
-        <p:nvSpPr>
-          <p:cNvPr id="4" name="TextBox 3"/>
-          <p:cNvSpPr txBox="1"/>
-          <p:nvPr/>
-        </p:nvSpPr>
-        <p:spPr>
-          <a:xfrm>
-            <a:off x="640080" y="658368"/>
-            <a:ext cx="10852800" cy="731520"/>
-          </a:xfrm>
-          <a:prstGeom prst="rect">
-            <a:avLst/>
-          </a:prstGeom>
-          <a:noFill/>
-        </p:spPr>
-        <p:txBody>
-          <a:bodyPr wrap="square">
-            <a:spAutoFit/>
-          </a:bodyPr>
-          <a:lstStyle/>
-          <a:p>
-            <a:pPr algn="l"/>
-            <a:r>
-              <a:rPr sz="2800" b="1">
-                <a:solidFill>
-                  <a:srgbClr val="1A202C"/>
-                </a:solidFill>
-                <a:latin typeface="Calibri"/>
-              </a:rPr>
-              <a:t>Live Demo</a:t>
-            </a:r>
-          </a:p>
-        </p:txBody>
-      </p:sp>
-      <p:sp>
-        <p:nvSpPr>
-          <p:cNvPr id="5" name="Rectangle 4"/>
-          <p:cNvSpPr/>
-          <p:nvPr/>
-        </p:nvSpPr>
-        <p:spPr>
-          <a:xfrm>
-            <a:off x="640080" y="1353312"/>
-            <a:ext cx="502920" cy="41148"/>
-          </a:xfrm>
-          <a:prstGeom prst="rect">
-            <a:avLst/>
-          </a:prstGeom>
-          <a:solidFill>
-            <a:srgbClr val="22B8CF"/>
-          </a:solidFill>
-          <a:ln>
-            <a:noFill/>
-          </a:ln>
-          <a:effectLst/>
-        </p:spPr>
-        <p:style>
-          <a:lnRef idx="1">
-            <a:schemeClr val="accent1"/>
-          </a:lnRef>
-          <a:fillRef idx="3">
-            <a:schemeClr val="accent1"/>
-          </a:fillRef>
-          <a:effectRef idx="2">
-            <a:schemeClr val="accent1"/>
-          </a:effectRef>
-          <a:fontRef idx="minor">
-            <a:schemeClr val="lt1"/>
-          </a:fontRef>
-        </p:style>
-        <p:txBody>
-          <a:bodyPr rtlCol="0" anchor="ctr"/>
-          <a:lstStyle/>
-          <a:p>
-            <a:pPr algn="ctr"/>
-          </a:p>
-        </p:txBody>
-      </p:sp>
-      <p:sp>
-        <p:nvSpPr>
-          <p:cNvPr id="6" name="TextBox 5"/>
-          <p:cNvSpPr txBox="1"/>
-          <p:nvPr/>
-        </p:nvSpPr>
-        <p:spPr>
-          <a:xfrm>
-            <a:off x="640080" y="1783080"/>
-            <a:ext cx="10852800" cy="4374920"/>
-          </a:xfrm>
-          <a:prstGeom prst="rect">
-            <a:avLst/>
-          </a:prstGeom>
-          <a:noFill/>
-        </p:spPr>
-        <p:txBody>
-          <a:bodyPr wrap="square">
-            <a:spAutoFit/>
-          </a:bodyPr>
-          <a:lstStyle/>
-          <a:p>
-            <a:pPr>
-              <a:lnSpc>
-                <a:spcPct val="112000"/>
-              </a:lnSpc>
-              <a:spcAft>
-                <a:spcPts val="1400"/>
-              </a:spcAft>
-            </a:pPr>
-            <a:r>
-              <a:rPr sz="1500" b="0">
-                <a:solidFill>
-                  <a:srgbClr val="1A202C"/>
-                </a:solidFill>
-                <a:latin typeface="Calibri"/>
-              </a:rPr>
-              <a:t>▸  FastAPI backend + browser frontend: upload an image or short video, get a real/fake probability from either trained checkpoint. Pipeline mirrors training exactly (MTCNN crop → resize/normalize → per-frame probability → video-level average).</a:t>
-            </a:r>
-          </a:p>
-          <a:p>
-            <a:pPr>
-              <a:lnSpc>
-                <a:spcPct val="112000"/>
-              </a:lnSpc>
-              <a:spcAft>
-                <a:spcPts val="1400"/>
-              </a:spcAft>
-            </a:pPr>
-            <a:r>
-              <a:rPr sz="1500" b="0">
-                <a:solidFill>
-                  <a:srgbClr val="1A202C"/>
-                </a:solidFill>
-                <a:latin typeface="Calibri"/>
-              </a:rPr>
-              <a:t>▸  Verified against a curated, held-out test-split set (never seen in training) — all correctly and confidently classified by XceptionNet; CNN-ViT correct but visibly less confident, consistent with its lower baseline accuracy.</a:t>
-            </a:r>
-          </a:p>
-          <a:p>
-            <a:pPr>
-              <a:lnSpc>
-                <a:spcPct val="112000"/>
-              </a:lnSpc>
-              <a:spcAft>
-                <a:spcPts val="1400"/>
-              </a:spcAft>
-            </a:pPr>
-            <a:r>
-              <a:rPr sz="1500" b="0">
-                <a:solidFill>
-                  <a:srgbClr val="1A202C"/>
-                </a:solidFill>
-                <a:latin typeface="Calibri"/>
-              </a:rPr>
-              <a:t>▸  Sanity-checked against an out-of-distribution image circulating online (not FF++ data): both models confidently wrong — expected given the generalization-gap numbers, and a live demonstration of this project's own finding rather than a contradiction of it.</a:t>
-            </a:r>
-          </a:p>
-          <a:p>
-            <a:pPr>
-              <a:lnSpc>
-                <a:spcPct val="112000"/>
-              </a:lnSpc>
-              <a:spcAft>
-                <a:spcPts val="1400"/>
-              </a:spcAft>
-            </a:pPr>
-            <a:r>
-              <a:rPr sz="1500" b="0">
-                <a:solidFill>
-                  <a:srgbClr val="1A202C"/>
-                </a:solidFill>
-                <a:latin typeface="Calibri"/>
-              </a:rPr>
-              <a:t>▸  Runs on CPU by design, so it never competes with GPU training/evaluation jobs.</a:t>
-            </a:r>
-          </a:p>
-        </p:txBody>
-      </p:sp>
-      <p:sp>
-        <p:nvSpPr>
-          <p:cNvPr id="7" name="TextBox 6"/>
-          <p:cNvSpPr txBox="1"/>
-          <p:nvPr/>
-        </p:nvSpPr>
-        <p:spPr>
-          <a:xfrm>
-            <a:off x="640080" y="6510528"/>
-            <a:ext cx="7315200" cy="274320"/>
-          </a:xfrm>
-          <a:prstGeom prst="rect">
-            <a:avLst/>
-          </a:prstGeom>
-          <a:noFill/>
-        </p:spPr>
-        <p:txBody>
-          <a:bodyPr wrap="square">
-            <a:spAutoFit/>
-          </a:bodyPr>
-          <a:lstStyle/>
-          <a:p>
-            <a:pPr algn="l"/>
-            <a:r>
-              <a:rPr sz="1000" b="0">
-                <a:solidFill>
-                  <a:srgbClr val="94A3B8"/>
-                </a:solidFill>
-                <a:latin typeface="Calibri"/>
-              </a:rPr>
-              <a:t>Deepfake Detection — XceptionNet vs. CNN-ViT (23AID205)</a:t>
-            </a:r>
-          </a:p>
-        </p:txBody>
-      </p:sp>
-      <p:sp>
-        <p:nvSpPr>
-          <p:cNvPr id="8" name="TextBox 7"/>
-          <p:cNvSpPr txBox="1"/>
-          <p:nvPr/>
-        </p:nvSpPr>
-        <p:spPr>
-          <a:xfrm>
-            <a:off x="10972800" y="6510528"/>
-            <a:ext cx="822960" cy="274320"/>
-          </a:xfrm>
-          <a:prstGeom prst="rect">
-            <a:avLst/>
-          </a:prstGeom>
-          <a:noFill/>
-        </p:spPr>
-        <p:txBody>
-          <a:bodyPr wrap="square">
-            <a:spAutoFit/>
-          </a:bodyPr>
-          <a:lstStyle/>
-          <a:p>
-            <a:pPr algn="r"/>
-            <a:r>
-              <a:rPr sz="1000" b="0">
-                <a:solidFill>
-                  <a:srgbClr val="94A3B8"/>
-                </a:solidFill>
-                <a:latin typeface="Calibri"/>
-              </a:rPr>
-              <a:t>10/11</a:t>
-            </a:r>
-          </a:p>
-        </p:txBody>
-      </p:sp>
-    </p:spTree>
-  </p:cSld>
-  <p:clrMapOvr>
-    <a:masterClrMapping/>
-  </p:clrMapOvr>
-</p:sld>
-</file>
-
-<file path=ppt/slides/slide11.xml><?xml version="1.0" encoding="utf-8"?>
-<p:sld xmlns:a="http://schemas.openxmlformats.org/drawingml/2006/main" xmlns:p="http://schemas.openxmlformats.org/presentationml/2006/main" xmlns:r="http://schemas.openxmlformats.org/officeDocument/2006/relationships">
-  <p:cSld>
-    <p:spTree>
-      <p:nvGrpSpPr>
-        <p:cNvPr id="1" name=""/>
-        <p:cNvGrpSpPr/>
-        <p:nvPr/>
-      </p:nvGrpSpPr>
-      <p:grpSpPr/>
-      <p:sp>
-        <p:nvSpPr>
-          <p:cNvPr id="2" name="Rectangle 1"/>
-          <p:cNvSpPr/>
-          <p:nvPr/>
-        </p:nvSpPr>
-        <p:spPr>
-          <a:xfrm>
-            <a:off x="0" y="0"/>
-            <a:ext cx="12191695" cy="6858000"/>
-          </a:xfrm>
-          <a:prstGeom prst="rect">
-            <a:avLst/>
-          </a:prstGeom>
-          <a:solidFill>
-            <a:srgbClr val="FFFFFF"/>
-          </a:solidFill>
-          <a:ln>
-            <a:noFill/>
-          </a:ln>
-          <a:effectLst/>
-        </p:spPr>
-        <p:style>
-          <a:lnRef idx="1">
-            <a:schemeClr val="accent1"/>
-          </a:lnRef>
-          <a:fillRef idx="3">
-            <a:schemeClr val="accent1"/>
-          </a:fillRef>
-          <a:effectRef idx="2">
-            <a:schemeClr val="accent1"/>
-          </a:effectRef>
-          <a:fontRef idx="minor">
-            <a:schemeClr val="lt1"/>
-          </a:fontRef>
-        </p:style>
-        <p:txBody>
-          <a:bodyPr rtlCol="0" anchor="ctr"/>
-          <a:lstStyle/>
-          <a:p>
-            <a:pPr algn="ctr"/>
-          </a:p>
-        </p:txBody>
-      </p:sp>
-      <p:sp>
-        <p:nvSpPr>
-          <p:cNvPr id="3" name="TextBox 2"/>
-          <p:cNvSpPr txBox="1"/>
-          <p:nvPr/>
-        </p:nvSpPr>
-        <p:spPr>
-          <a:xfrm>
-            <a:off x="640080" y="384048"/>
-            <a:ext cx="9144000" cy="320040"/>
-          </a:xfrm>
-          <a:prstGeom prst="rect">
-            <a:avLst/>
-          </a:prstGeom>
-          <a:noFill/>
-        </p:spPr>
-        <p:txBody>
-          <a:bodyPr wrap="square">
-            <a:spAutoFit/>
-          </a:bodyPr>
-          <a:lstStyle/>
-          <a:p>
-            <a:pPr algn="l"/>
-            <a:r>
-              <a:rPr sz="1300" b="1">
-                <a:solidFill>
-                  <a:srgbClr val="0E7490"/>
-                </a:solidFill>
-                <a:latin typeface="Calibri"/>
-              </a:rPr>
-              <a:t>CONCLUSION</a:t>
-            </a:r>
-          </a:p>
-        </p:txBody>
-      </p:sp>
-      <p:sp>
-        <p:nvSpPr>
-          <p:cNvPr id="4" name="TextBox 3"/>
-          <p:cNvSpPr txBox="1"/>
-          <p:nvPr/>
-        </p:nvSpPr>
-        <p:spPr>
-          <a:xfrm>
-            <a:off x="640080" y="658368"/>
-            <a:ext cx="10852800" cy="731520"/>
-          </a:xfrm>
-          <a:prstGeom prst="rect">
-            <a:avLst/>
-          </a:prstGeom>
-          <a:noFill/>
-        </p:spPr>
-        <p:txBody>
-          <a:bodyPr wrap="square">
-            <a:spAutoFit/>
-          </a:bodyPr>
-          <a:lstStyle/>
-          <a:p>
-            <a:pPr algn="l"/>
-            <a:r>
-              <a:rPr sz="2800" b="1">
-                <a:solidFill>
-                  <a:srgbClr val="1A202C"/>
-                </a:solidFill>
-                <a:latin typeface="Calibri"/>
-              </a:rPr>
-              <a:t>Key Takeaways &amp; Closing</a:t>
-            </a:r>
-          </a:p>
-        </p:txBody>
-      </p:sp>
-      <p:sp>
-        <p:nvSpPr>
-          <p:cNvPr id="5" name="Rectangle 4"/>
-          <p:cNvSpPr/>
-          <p:nvPr/>
-        </p:nvSpPr>
-        <p:spPr>
-          <a:xfrm>
-            <a:off x="640080" y="1353312"/>
-            <a:ext cx="502920" cy="41148"/>
-          </a:xfrm>
-          <a:prstGeom prst="rect">
-            <a:avLst/>
-          </a:prstGeom>
-          <a:solidFill>
-            <a:srgbClr val="22B8CF"/>
-          </a:solidFill>
-          <a:ln>
-            <a:noFill/>
-          </a:ln>
-          <a:effectLst/>
-        </p:spPr>
-        <p:style>
-          <a:lnRef idx="1">
-            <a:schemeClr val="accent1"/>
-          </a:lnRef>
-          <a:fillRef idx="3">
-            <a:schemeClr val="accent1"/>
-          </a:fillRef>
-          <a:effectRef idx="2">
-            <a:schemeClr val="accent1"/>
-          </a:effectRef>
-          <a:fontRef idx="minor">
-            <a:schemeClr val="lt1"/>
-          </a:fontRef>
-        </p:style>
-        <p:txBody>
-          <a:bodyPr rtlCol="0" anchor="ctr"/>
-          <a:lstStyle/>
-          <a:p>
-            <a:pPr algn="ctr"/>
-          </a:p>
-        </p:txBody>
-      </p:sp>
-      <p:sp>
-        <p:nvSpPr>
-          <p:cNvPr id="6" name="TextBox 5"/>
-          <p:cNvSpPr txBox="1"/>
-          <p:nvPr/>
-        </p:nvSpPr>
-        <p:spPr>
-          <a:xfrm>
-            <a:off x="640080" y="1783080"/>
-            <a:ext cx="6350000" cy="4400000"/>
-          </a:xfrm>
-          <a:prstGeom prst="rect">
-            <a:avLst/>
-          </a:prstGeom>
-          <a:noFill/>
-        </p:spPr>
-        <p:txBody>
-          <a:bodyPr wrap="square">
-            <a:spAutoFit/>
-          </a:bodyPr>
-          <a:lstStyle/>
-          <a:p>
-            <a:pPr>
-              <a:lnSpc>
-                <a:spcPct val="112000"/>
-              </a:lnSpc>
-              <a:spcAft>
-                <a:spcPts val="1200"/>
-              </a:spcAft>
-            </a:pPr>
-            <a:r>
-              <a:rPr sz="1350" b="0">
-                <a:solidFill>
-                  <a:srgbClr val="1A202C"/>
-                </a:solidFill>
-                <a:latin typeface="Calibri"/>
-              </a:rPr>
-              <a:t>▸  XceptionNet outperforms the CNN-ViT hybrid on every metric measured — same-distribution accuracy, generalization gap, and most compression conditions — contradicting the hypothesis that attention would help generalization.</a:t>
-            </a:r>
-          </a:p>
-          <a:p>
-            <a:pPr>
-              <a:lnSpc>
-                <a:spcPct val="112000"/>
-              </a:lnSpc>
-              <a:spcAft>
-                <a:spcPts val="1200"/>
-              </a:spcAft>
-            </a:pPr>
-            <a:r>
-              <a:rPr sz="1350" b="0">
-                <a:solidFill>
-                  <a:srgbClr val="1A202C"/>
-                </a:solidFill>
-                <a:latin typeface="Calibri"/>
-              </a:rPr>
-              <a:t>▸  Both architectures share the same weakness: narrow, method-specific artifacts rather than a general "manipulated" signal — confirmed visually via Grad-CAM.</a:t>
-            </a:r>
-          </a:p>
-          <a:p>
-            <a:pPr>
-              <a:lnSpc>
-                <a:spcPct val="112000"/>
-              </a:lnSpc>
-              <a:spcAft>
-                <a:spcPts val="1200"/>
-              </a:spcAft>
-            </a:pPr>
-            <a:r>
-              <a:rPr sz="1350" b="0">
-                <a:solidFill>
-                  <a:srgbClr val="1A202C"/>
-                </a:solidFill>
-                <a:latin typeface="Calibri"/>
-              </a:rPr>
-              <a:t>▸  Future work: official c0/c40 once approved (replacing the proxy), multi-seed runs for statistical confidence, Grad-CAM on a genuinely-uncertain cell.</a:t>
-            </a:r>
-          </a:p>
-          <a:p>
-            <a:pPr>
-              <a:lnSpc>
-                <a:spcPct val="112000"/>
-              </a:lnSpc>
-              <a:spcAft>
-                <a:spcPts val="1200"/>
-              </a:spcAft>
-            </a:pPr>
-            <a:r>
-              <a:rPr sz="1350" b="0">
-                <a:solidFill>
-                  <a:srgbClr val="1A202C"/>
-                </a:solidFill>
-                <a:latin typeface="Calibri"/>
-              </a:rPr>
-              <a:t>▸  Practical takeaway: a deployed detector needs training coverage of its target manipulation types, or an explicit "unknown" fallback — confident-wrong is worse than honest uncertainty.</a:t>
-            </a:r>
-          </a:p>
-        </p:txBody>
-      </p:sp>
-      <p:sp>
-        <p:nvSpPr>
-          <p:cNvPr id="7" name="TextBox 6"/>
-          <p:cNvSpPr txBox="1"/>
-          <p:nvPr/>
-        </p:nvSpPr>
-        <p:spPr>
-          <a:xfrm>
-            <a:off x="7218680" y="1783080"/>
-            <a:ext cx="4332935" cy="320040"/>
-          </a:xfrm>
-          <a:prstGeom prst="rect">
-            <a:avLst/>
-          </a:prstGeom>
-          <a:noFill/>
-        </p:spPr>
-        <p:txBody>
-          <a:bodyPr wrap="square">
-            <a:spAutoFit/>
-          </a:bodyPr>
-          <a:lstStyle/>
-          <a:p>
-            <a:pPr algn="l"/>
-            <a:r>
-              <a:rPr sz="1100" b="1">
-                <a:solidFill>
-                  <a:srgbClr val="0E7490"/>
-                </a:solidFill>
-                <a:latin typeface="Calibri"/>
-              </a:rPr>
-              <a:t>REFERENCES</a:t>
-            </a:r>
-          </a:p>
-        </p:txBody>
-      </p:sp>
-      <p:sp>
-        <p:nvSpPr>
-          <p:cNvPr id="8" name="TextBox 7"/>
-          <p:cNvSpPr txBox="1"/>
-          <p:nvPr/>
-        </p:nvSpPr>
-        <p:spPr>
-          <a:xfrm>
-            <a:off x="7218680" y="2130000"/>
-            <a:ext cx="4332935" cy="950000"/>
-          </a:xfrm>
-          <a:prstGeom prst="rect">
-            <a:avLst/>
-          </a:prstGeom>
-          <a:noFill/>
-        </p:spPr>
-        <p:txBody>
-          <a:bodyPr wrap="square">
-            <a:spAutoFit/>
-          </a:bodyPr>
-          <a:lstStyle/>
-          <a:p>
-            <a:pPr>
-              <a:lnSpc>
-                <a:spcPct val="112000"/>
-              </a:lnSpc>
-              <a:spcAft>
-                <a:spcPts val="500"/>
-              </a:spcAft>
-            </a:pPr>
-            <a:r>
-              <a:rPr sz="1000" b="0">
-                <a:solidFill>
-                  <a:srgbClr val="1A202C"/>
-                </a:solidFill>
-                <a:latin typeface="Calibri"/>
-              </a:rPr>
-              <a:t>▸  Rössler et al. (2019). FaceForensics++. ICCV.</a:t>
-            </a:r>
-          </a:p>
-          <a:p>
-            <a:pPr>
-              <a:lnSpc>
-                <a:spcPct val="112000"/>
-              </a:lnSpc>
-              <a:spcAft>
-                <a:spcPts val="500"/>
-              </a:spcAft>
-            </a:pPr>
-            <a:r>
-              <a:rPr sz="1000" b="0">
-                <a:solidFill>
-                  <a:srgbClr val="1A202C"/>
-                </a:solidFill>
-                <a:latin typeface="Calibri"/>
-              </a:rPr>
-              <a:t>▸  Chollet (2017). Xception. CVPR.</a:t>
-            </a:r>
-          </a:p>
-          <a:p>
-            <a:pPr>
-              <a:lnSpc>
-                <a:spcPct val="112000"/>
-              </a:lnSpc>
-              <a:spcAft>
-                <a:spcPts val="500"/>
-              </a:spcAft>
-            </a:pPr>
-            <a:r>
-              <a:rPr sz="1000" b="0">
-                <a:solidFill>
-                  <a:srgbClr val="1A202C"/>
-                </a:solidFill>
-                <a:latin typeface="Calibri"/>
-              </a:rPr>
-              <a:t>▸  Dosovitskiy et al. (2021). ViT. ICLR.</a:t>
-            </a:r>
-          </a:p>
-          <a:p>
-            <a:pPr>
-              <a:lnSpc>
-                <a:spcPct val="112000"/>
-              </a:lnSpc>
-              <a:spcAft>
-                <a:spcPts val="500"/>
-              </a:spcAft>
-            </a:pPr>
-            <a:r>
-              <a:rPr sz="1000" b="0">
-                <a:solidFill>
-                  <a:srgbClr val="1A202C"/>
-                </a:solidFill>
-                <a:latin typeface="Calibri"/>
-              </a:rPr>
-              <a:t>▸  Selvaraju et al. (2017). Grad-CAM. ICCV.</a:t>
-            </a:r>
-          </a:p>
-        </p:txBody>
-      </p:sp>
-      <p:sp>
-        <p:nvSpPr>
-          <p:cNvPr id="9" name="Rectangle 8"/>
-          <p:cNvSpPr/>
-          <p:nvPr/>
-        </p:nvSpPr>
-        <p:spPr>
-          <a:xfrm>
-            <a:off x="7218680" y="3100000"/>
-            <a:ext cx="4332935" cy="18288"/>
-          </a:xfrm>
-          <a:prstGeom prst="rect">
-            <a:avLst/>
-          </a:prstGeom>
-          <a:solidFill>
-            <a:srgbClr val="E2E8F0"/>
-          </a:solidFill>
-          <a:ln>
-            <a:noFill/>
-          </a:ln>
-          <a:effectLst/>
-        </p:spPr>
-        <p:style>
-          <a:lnRef idx="1">
-            <a:schemeClr val="accent1"/>
-          </a:lnRef>
-          <a:fillRef idx="3">
-            <a:schemeClr val="accent1"/>
-          </a:fillRef>
-          <a:effectRef idx="2">
-            <a:schemeClr val="accent1"/>
-          </a:effectRef>
-          <a:fontRef idx="minor">
-            <a:schemeClr val="lt1"/>
-          </a:fontRef>
-        </p:style>
-        <p:txBody>
-          <a:bodyPr rtlCol="0" anchor="ctr"/>
-          <a:lstStyle/>
-          <a:p>
-            <a:pPr algn="ctr"/>
-          </a:p>
-        </p:txBody>
-      </p:sp>
-      <p:sp>
-        <p:nvSpPr>
-          <p:cNvPr id="10" name="TextBox 9"/>
-          <p:cNvSpPr txBox="1"/>
-          <p:nvPr/>
-        </p:nvSpPr>
-        <p:spPr>
-          <a:xfrm>
-            <a:off x="7218680" y="3260000"/>
-            <a:ext cx="4332935" cy="320040"/>
-          </a:xfrm>
-          <a:prstGeom prst="rect">
-            <a:avLst/>
-          </a:prstGeom>
-          <a:noFill/>
-        </p:spPr>
-        <p:txBody>
-          <a:bodyPr wrap="square">
-            <a:spAutoFit/>
-          </a:bodyPr>
-          <a:lstStyle/>
-          <a:p>
-            <a:pPr algn="l"/>
-            <a:r>
-              <a:rPr sz="1100" b="1">
-                <a:solidFill>
-                  <a:srgbClr val="0E7490"/>
-                </a:solidFill>
-                <a:latin typeface="Calibri"/>
-              </a:rPr>
-              <a:t>CONTRIBUTORS</a:t>
-            </a:r>
-          </a:p>
-        </p:txBody>
-      </p:sp>
-      <p:sp>
-        <p:nvSpPr>
-          <p:cNvPr id="11" name="TextBox 10"/>
-          <p:cNvSpPr txBox="1"/>
-          <p:nvPr/>
-        </p:nvSpPr>
-        <p:spPr>
-          <a:xfrm>
-            <a:off x="7218680" y="3600000"/>
-            <a:ext cx="4332935" cy="1080000"/>
-          </a:xfrm>
-          <a:prstGeom prst="rect">
-            <a:avLst/>
-          </a:prstGeom>
-          <a:noFill/>
-        </p:spPr>
-        <p:txBody>
-          <a:bodyPr wrap="square">
-            <a:spAutoFit/>
-          </a:bodyPr>
-          <a:lstStyle/>
-          <a:p>
-            <a:pPr>
-              <a:lnSpc>
-                <a:spcPct val="112000"/>
-              </a:lnSpc>
-              <a:spcAft>
-                <a:spcPts val="600"/>
-              </a:spcAft>
-            </a:pPr>
-            <a:r>
-              <a:rPr sz="1050" b="1">
-                <a:solidFill>
-                  <a:srgbClr val="1A202C"/>
-                </a:solidFill>
-                <a:latin typeface="Calibri"/>
-              </a:rPr>
-              <a:t>▸  Venugopalan Gangadharan — CB.AI.U4AID25115</a:t>
-            </a:r>
-          </a:p>
-          <a:p>
-            <a:pPr>
-              <a:lnSpc>
-                <a:spcPct val="112000"/>
-              </a:lnSpc>
-              <a:spcAft>
-                <a:spcPts val="600"/>
-              </a:spcAft>
-            </a:pPr>
-            <a:r>
-              <a:rPr sz="1050" b="1">
-                <a:solidFill>
-                  <a:srgbClr val="1A202C"/>
-                </a:solidFill>
-                <a:latin typeface="Calibri"/>
-              </a:rPr>
-              <a:t>▸  Vipin Sudhakar — CB.AI.U4AID25166</a:t>
-            </a:r>
-          </a:p>
-          <a:p>
-            <a:pPr>
-              <a:lnSpc>
-                <a:spcPct val="112000"/>
-              </a:lnSpc>
-              <a:spcAft>
-                <a:spcPts val="600"/>
-              </a:spcAft>
-            </a:pPr>
-            <a:r>
-              <a:rPr sz="1050" b="1">
-                <a:solidFill>
-                  <a:srgbClr val="1A202C"/>
-                </a:solidFill>
-                <a:latin typeface="Calibri"/>
-              </a:rPr>
-              <a:t>▸  Rithvik Arulprakash — CB.AI.U4AID25148</a:t>
-            </a:r>
-          </a:p>
-          <a:p>
-            <a:pPr>
-              <a:lnSpc>
-                <a:spcPct val="112000"/>
-              </a:lnSpc>
-              <a:spcAft>
-                <a:spcPts val="600"/>
-              </a:spcAft>
-            </a:pPr>
-            <a:r>
-              <a:rPr sz="1050" b="1">
-                <a:solidFill>
-                  <a:srgbClr val="1A202C"/>
-                </a:solidFill>
-                <a:latin typeface="Calibri"/>
-              </a:rPr>
-              <a:t>▸  Harshith Kv — CB.AI.U4AID25119</a:t>
-            </a:r>
-          </a:p>
-        </p:txBody>
-      </p:sp>
-      <p:sp>
-        <p:nvSpPr>
-          <p:cNvPr id="12" name="TextBox 11"/>
-          <p:cNvSpPr txBox="1"/>
-          <p:nvPr/>
-        </p:nvSpPr>
-        <p:spPr>
-          <a:xfrm>
-            <a:off x="7218680" y="4700000"/>
-            <a:ext cx="4332935" cy="360000"/>
-          </a:xfrm>
-          <a:prstGeom prst="rect">
-            <a:avLst/>
-          </a:prstGeom>
-          <a:noFill/>
-        </p:spPr>
-        <p:txBody>
-          <a:bodyPr wrap="square">
-            <a:spAutoFit/>
-          </a:bodyPr>
-          <a:lstStyle/>
-          <a:p>
-            <a:pPr algn="l"/>
-            <a:r>
-              <a:rPr sz="1000" b="0">
-                <a:solidFill>
-                  <a:srgbClr val="475569"/>
-                </a:solidFill>
-                <a:latin typeface="Calibri"/>
-              </a:rPr>
-              <a:t>AI &amp; Data Science — Amrita Vishwa Vidyapeetham, Coimbatore</a:t>
-            </a:r>
-          </a:p>
-        </p:txBody>
-      </p:sp>
-      <p:sp>
-        <p:nvSpPr>
-          <p:cNvPr id="13" name="TextBox 12"/>
-          <p:cNvSpPr txBox="1"/>
-          <p:nvPr/>
-        </p:nvSpPr>
-        <p:spPr>
-          <a:xfrm>
-            <a:off x="7218680" y="5150000"/>
-            <a:ext cx="4332935" cy="320040"/>
-          </a:xfrm>
-          <a:prstGeom prst="rect">
-            <a:avLst/>
-          </a:prstGeom>
-          <a:noFill/>
-        </p:spPr>
-        <p:txBody>
-          <a:bodyPr wrap="square">
-            <a:spAutoFit/>
-          </a:bodyPr>
-          <a:lstStyle/>
-          <a:p>
-            <a:pPr algn="l"/>
-            <a:r>
-              <a:rPr sz="1100" b="1">
-                <a:solidFill>
-                  <a:srgbClr val="0E7490"/>
-                </a:solidFill>
-                <a:latin typeface="Calibri"/>
-              </a:rPr>
-              <a:t>GITHUB REPOSITORY</a:t>
-            </a:r>
-          </a:p>
-        </p:txBody>
-      </p:sp>
-      <p:sp>
-        <p:nvSpPr>
-          <p:cNvPr id="14" name="TextBox 13"/>
-          <p:cNvSpPr txBox="1"/>
-          <p:nvPr/>
-        </p:nvSpPr>
-        <p:spPr>
-          <a:xfrm>
-            <a:off x="7218680" y="5450000"/>
-            <a:ext cx="4332935" cy="500000"/>
-          </a:xfrm>
-          <a:prstGeom prst="rect">
-            <a:avLst/>
-          </a:prstGeom>
-          <a:noFill/>
-        </p:spPr>
-        <p:txBody>
-          <a:bodyPr wrap="square">
-            <a:spAutoFit/>
-          </a:bodyPr>
-          <a:lstStyle/>
-          <a:p>
-            <a:pPr algn="l"/>
-            <a:r>
-              <a:rPr sz="1150" b="1">
-                <a:solidFill>
-                  <a:srgbClr val="22B8CF"/>
-                </a:solidFill>
-                <a:latin typeface="Calibri"/>
-              </a:rPr>
-              <a:t>github.com/DUNE-ODYSSEY/deepfake-detection</a:t>
-            </a:r>
-          </a:p>
-        </p:txBody>
-      </p:sp>
-      <p:sp>
-        <p:nvSpPr>
-          <p:cNvPr id="15" name="TextBox 14"/>
-          <p:cNvSpPr txBox="1"/>
-          <p:nvPr/>
-        </p:nvSpPr>
-        <p:spPr>
-          <a:xfrm>
-            <a:off x="640080" y="6510528"/>
-            <a:ext cx="7315200" cy="274320"/>
-          </a:xfrm>
-          <a:prstGeom prst="rect">
-            <a:avLst/>
-          </a:prstGeom>
-          <a:noFill/>
-        </p:spPr>
-        <p:txBody>
-          <a:bodyPr wrap="square">
-            <a:spAutoFit/>
-          </a:bodyPr>
-          <a:lstStyle/>
-          <a:p>
-            <a:pPr algn="l"/>
-            <a:r>
-              <a:rPr sz="1000" b="0">
-                <a:solidFill>
-                  <a:srgbClr val="94A3B8"/>
-                </a:solidFill>
-                <a:latin typeface="Calibri"/>
-              </a:rPr>
-              <a:t>Deepfake Detection — XceptionNet vs. CNN-ViT (23AID205)</a:t>
-            </a:r>
-          </a:p>
-        </p:txBody>
-      </p:sp>
-      <p:sp>
-        <p:nvSpPr>
-          <p:cNvPr id="16" name="TextBox 15"/>
-          <p:cNvSpPr txBox="1"/>
-          <p:nvPr/>
-        </p:nvSpPr>
-        <p:spPr>
-          <a:xfrm>
-            <a:off x="10972800" y="6510528"/>
-            <a:ext cx="822960" cy="274320"/>
-          </a:xfrm>
-          <a:prstGeom prst="rect">
-            <a:avLst/>
-          </a:prstGeom>
-          <a:noFill/>
-        </p:spPr>
-        <p:txBody>
-          <a:bodyPr wrap="square">
-            <a:spAutoFit/>
-          </a:bodyPr>
-          <a:lstStyle/>
-          <a:p>
-            <a:pPr algn="r"/>
-            <a:r>
-              <a:rPr sz="1000" b="0">
-                <a:solidFill>
-                  <a:srgbClr val="94A3B8"/>
-                </a:solidFill>
-                <a:latin typeface="Calibri"/>
-              </a:rPr>
-              <a:t>11/11</a:t>
             </a:r>
           </a:p>
         </p:txBody>
@@ -4737,7 +3628,7 @@
                 </a:solidFill>
                 <a:latin typeface="Calibri"/>
               </a:rPr>
-              <a:t>▸  Deepfakes have moved from research curiosity to a real misinformation/fraud vector — but published detectors usually report one headline accuracy number, on the same manipulation type and compression level they trained on.</a:t>
+              <a:t>▸  Deepfakes have moved from research curiosity to a real misinformation/fraud vector -- but published detectors usually report one headline accuracy number, on the same manipulation type and compression level they trained on.</a:t>
             </a:r>
           </a:p>
           <a:p>
@@ -4756,7 +3647,7 @@
                 </a:solidFill>
                 <a:latin typeface="Calibri"/>
               </a:rPr>
-              <a:t>▸  Problem: that number is misleading in practice — a detector at 99% in a paper can be ~57% AUC (worse than random) the moment the test distribution shifts, and that failure is invisible until deployment.</a:t>
+              <a:t>▸  Problem: that number is misleading in practice -- a detector at 99% in a paper can collapse the moment the test distribution shifts, and that failure is invisible until deployment.</a:t>
             </a:r>
           </a:p>
           <a:p>
@@ -4775,7 +3666,7 @@
                 </a:solidFill>
                 <a:latin typeface="Calibri"/>
               </a:rPr>
-              <a:t>▸  Objective 1: fairly compare XceptionNet (CNN baseline) vs. a CNN-ViT hybrid (ResNet + Transformer) on identical data/protocol — does global self-attention actually improve generalization?</a:t>
+              <a:t>▸  Objective 1: fairly compare XceptionNet (CNN baseline) vs. a CNN-ViT hybrid (ResNet + Transformer) on identical data/protocol -- does global self-attention actually improve generalization?</a:t>
             </a:r>
           </a:p>
           <a:p>
@@ -4794,7 +3685,7 @@
                 </a:solidFill>
                 <a:latin typeface="Calibri"/>
               </a:rPr>
-              <a:t>▸  Objective 2: measure same-distribution accuracy, full 4×4 cross-manipulation generalization, and compression robustness — not just one number.</a:t>
+              <a:t>▸  Objective 2: measure same-distribution accuracy, full 4×4 cross-manipulation generalization, and compression robustness -- not just one number.</a:t>
             </a:r>
           </a:p>
           <a:p>
@@ -4813,7 +3704,7 @@
                 </a:solidFill>
                 <a:latin typeface="Calibri"/>
               </a:rPr>
-              <a:t>▸  Objective 3: explain *why* generalization succeeds or fails (Grad-CAM), and ship a working, testable live demo — not only offline metrics.</a:t>
+              <a:t>▸  Objective 3: explain *why* generalization succeeds or fails (Grad-CAM), and ship a working, testable live demo -- not only offline metrics.</a:t>
             </a:r>
           </a:p>
         </p:txBody>
@@ -4883,7 +3774,7 @@
                 </a:solidFill>
                 <a:latin typeface="Calibri"/>
               </a:rPr>
-              <a:t>2/11</a:t>
+              <a:t>2/9</a:t>
             </a:r>
           </a:p>
         </p:txBody>
@@ -6230,8 +5121,8 @@
         </p:nvSpPr>
         <p:spPr>
           <a:xfrm>
-            <a:off x="640080" y="6510528"/>
-            <a:ext cx="7315200" cy="274320"/>
+            <a:off x="640080" y="5850000"/>
+            <a:ext cx="10852800" cy="400000"/>
           </a:xfrm>
           <a:prstGeom prst="rect">
             <a:avLst/>
@@ -6246,13 +5137,13 @@
           <a:p>
             <a:pPr algn="l"/>
             <a:r>
-              <a:rPr sz="1000" b="0">
-                <a:solidFill>
-                  <a:srgbClr val="94A3B8"/>
-                </a:solidFill>
-                <a:latin typeface="Calibri"/>
-              </a:rPr>
-              <a:t>Deepfake Detection — XceptionNet vs. CNN-ViT (23AID205)</a:t>
+              <a:rPr sz="1150" b="0">
+                <a:solidFill>
+                  <a:srgbClr val="475569"/>
+                </a:solidFill>
+                <a:latin typeface="Calibri"/>
+              </a:rPr>
+              <a:t>Steps 1-3 (data) and step 4-5 for Experiment 1 are complete as of this review -- steps 4-6 continue for Experiments 2 &amp; 3.</a:t>
             </a:r>
           </a:p>
         </p:txBody>
@@ -6265,8 +5156,8 @@
         </p:nvSpPr>
         <p:spPr>
           <a:xfrm>
-            <a:off x="10972800" y="6510528"/>
-            <a:ext cx="822960" cy="274320"/>
+            <a:off x="640080" y="6510528"/>
+            <a:ext cx="7315200" cy="274320"/>
           </a:xfrm>
           <a:prstGeom prst="rect">
             <a:avLst/>
@@ -6279,6 +5170,41 @@
           </a:bodyPr>
           <a:lstStyle/>
           <a:p>
+            <a:pPr algn="l"/>
+            <a:r>
+              <a:rPr sz="1000" b="0">
+                <a:solidFill>
+                  <a:srgbClr val="94A3B8"/>
+                </a:solidFill>
+                <a:latin typeface="Calibri"/>
+              </a:rPr>
+              <a:t>Deepfake Detection — XceptionNet vs. CNN-ViT (23AID205)</a:t>
+            </a:r>
+          </a:p>
+        </p:txBody>
+      </p:sp>
+      <p:sp>
+        <p:nvSpPr>
+          <p:cNvPr id="38" name="TextBox 37"/>
+          <p:cNvSpPr txBox="1"/>
+          <p:nvPr/>
+        </p:nvSpPr>
+        <p:spPr>
+          <a:xfrm>
+            <a:off x="10972800" y="6510528"/>
+            <a:ext cx="822960" cy="274320"/>
+          </a:xfrm>
+          <a:prstGeom prst="rect">
+            <a:avLst/>
+          </a:prstGeom>
+          <a:noFill/>
+        </p:spPr>
+        <p:txBody>
+          <a:bodyPr wrap="square">
+            <a:spAutoFit/>
+          </a:bodyPr>
+          <a:lstStyle/>
+          <a:p>
             <a:pPr algn="r"/>
             <a:r>
               <a:rPr sz="1000" b="0">
@@ -6287,7 +5213,7 @@
                 </a:solidFill>
                 <a:latin typeface="Calibri"/>
               </a:rPr>
-              <a:t>3/11</a:t>
+              <a:t>3/9</a:t>
             </a:r>
           </a:p>
         </p:txBody>
@@ -6419,7 +5345,7 @@
                 </a:solidFill>
                 <a:latin typeface="Calibri"/>
               </a:rPr>
-              <a:t>Data: Source, Prep &amp; Quality Check</a:t>
+              <a:t>Data: Source &amp; Preparation — Complete</a:t>
             </a:r>
           </a:p>
         </p:txBody>
@@ -6499,7 +5425,7 @@
               </a:spcAft>
             </a:pPr>
             <a:r>
-              <a:rPr sz="1400" b="0">
+              <a:rPr sz="1450" b="0">
                 <a:solidFill>
                   <a:srgbClr val="1A202C"/>
                 </a:solidFill>
@@ -6518,7 +5444,7 @@
               </a:spcAft>
             </a:pPr>
             <a:r>
-              <a:rPr sz="1400" b="0">
+              <a:rPr sz="1450" b="0">
                 <a:solidFill>
                   <a:srgbClr val="1A202C"/>
                 </a:solidFill>
@@ -6537,13 +5463,13 @@
               </a:spcAft>
             </a:pPr>
             <a:r>
-              <a:rPr sz="1400" b="0">
+              <a:rPr sz="1450" b="0">
                 <a:solidFill>
                   <a:srgbClr val="1A202C"/>
                 </a:solidFill>
                 <a:latin typeface="Calibri"/>
               </a:rPr>
-              <a:t>▸  Preprocessing: MTCNN face detection on GPU, 20 frames/video, 1.3x crop margin (captures blending-boundary artifacts), resized to 299×299 (native for XceptionNet, downsampled to 224 for the hybrid) → ~99,987 face crops total.</a:t>
+              <a:t>▸  Preprocessing: MTCNN face detection on GPU, 20 frames/video, 1.3x crop margin (captures blending-boundary artifacts), resized to 299×299 (native for XceptionNet, downsampled to 224 for the hybrid).</a:t>
             </a:r>
           </a:p>
           <a:p>
@@ -6556,13 +5482,13 @@
               </a:spcAft>
             </a:pPr>
             <a:r>
-              <a:rPr sz="1400" b="0">
+              <a:rPr sz="1450" b="0">
                 <a:solidFill>
                   <a:srgbClr val="1A202C"/>
                 </a:solidFill>
                 <a:latin typeface="Calibri"/>
               </a:rPr>
-              <a:t>▸  EDA/data-quality check: IQR outlier analysis on frame count &amp; file size flagged 502 of 5,000 videos (10%) before committing to full preprocessing.</a:t>
+              <a:t>▸  Result: ~99,987 face crops across all 5,000 videos — the full dataset is preprocessed and ready; this stage is complete.</a:t>
             </a:r>
           </a:p>
           <a:p>
@@ -6575,13 +5501,13 @@
               </a:spcAft>
             </a:pPr>
             <a:r>
-              <a:rPr sz="1400" b="0">
+              <a:rPr sz="1450" b="0">
                 <a:solidFill>
                   <a:srgbClr val="1A202C"/>
                 </a:solidFill>
                 <a:latin typeface="Calibri"/>
               </a:rPr>
-              <a:t>▸  Real/fake class imbalance handled via a weighted random sampler at training time, not by discarding data. Official c0/c40 access still pending — see Compression slide.</a:t>
+              <a:t>▸  Official c0/c40 access still pending — being handled with a documented workaround, to be shown at the final review.</a:t>
             </a:r>
           </a:p>
         </p:txBody>
@@ -6651,7 +5577,7 @@
                 </a:solidFill>
                 <a:latin typeface="Calibri"/>
               </a:rPr>
-              <a:t>4/11</a:t>
+              <a:t>4/9</a:t>
             </a:r>
           </a:p>
         </p:txBody>
@@ -6748,7 +5674,7 @@
                 </a:solidFill>
                 <a:latin typeface="Calibri"/>
               </a:rPr>
-              <a:t>ALGORITHM SELECTION</a:t>
+              <a:t>EDA</a:t>
             </a:r>
           </a:p>
         </p:txBody>
@@ -6783,7 +5709,7 @@
                 </a:solidFill>
                 <a:latin typeface="Calibri"/>
               </a:rPr>
-              <a:t>Models: XceptionNet vs. CNN-ViT Hybrid</a:t>
+              <a:t>Data Quality: Outlier Check (IQR)</a:t>
             </a:r>
           </a:p>
         </p:txBody>
@@ -6834,14 +5760,73 @@
       </p:sp>
       <p:sp>
         <p:nvSpPr>
-          <p:cNvPr id="6" name="Rectangle 5"/>
+          <p:cNvPr id="6" name="TextBox 5"/>
+          <p:cNvSpPr txBox="1"/>
+          <p:nvPr/>
+        </p:nvSpPr>
+        <p:spPr>
+          <a:xfrm>
+            <a:off x="640080" y="1691640"/>
+            <a:ext cx="10515600" cy="457200"/>
+          </a:xfrm>
+          <a:prstGeom prst="rect">
+            <a:avLst/>
+          </a:prstGeom>
+          <a:noFill/>
+        </p:spPr>
+        <p:txBody>
+          <a:bodyPr wrap="square">
+            <a:spAutoFit/>
+          </a:bodyPr>
+          <a:lstStyle/>
+          <a:p>
+            <a:pPr algn="l"/>
+            <a:r>
+              <a:rPr sz="1350" b="0">
+                <a:solidFill>
+                  <a:srgbClr val="475569"/>
+                </a:solidFill>
+                <a:latin typeface="Calibri"/>
+              </a:rPr>
+              <a:t>Per-video metadata (frame count, file size) checked via box-plot IQR across all 5,000 videos before committing to full preprocessing.</a:t>
+            </a:r>
+          </a:p>
+        </p:txBody>
+      </p:sp>
+      <p:pic>
+        <p:nvPicPr>
+          <p:cNvPr id="7" name="Picture 6" descr="outlier_boxplots.png"/>
+          <p:cNvPicPr>
+            <a:picLocks noChangeAspect="1"/>
+          </p:cNvPicPr>
+          <p:nvPr/>
+        </p:nvPicPr>
+        <p:blipFill>
+          <a:blip r:embed="rId2"/>
+          <a:stretch>
+            <a:fillRect/>
+          </a:stretch>
+        </p:blipFill>
+        <p:spPr>
+          <a:xfrm>
+            <a:off x="640080" y="2286000"/>
+            <a:ext cx="7406640" cy="3648169"/>
+          </a:xfrm>
+          <a:prstGeom prst="rect">
+            <a:avLst/>
+          </a:prstGeom>
+        </p:spPr>
+      </p:pic>
+      <p:sp>
+        <p:nvSpPr>
+          <p:cNvPr id="8" name="Rectangle 7"/>
           <p:cNvSpPr/>
           <p:nvPr/>
         </p:nvSpPr>
         <p:spPr>
           <a:xfrm>
-            <a:off x="640080" y="1750000"/>
-            <a:ext cx="5195000" cy="3000000"/>
+            <a:off x="8321040" y="2286000"/>
+            <a:ext cx="3230575" cy="4114800"/>
           </a:xfrm>
           <a:prstGeom prst="rect">
             <a:avLst/>
@@ -6878,58 +5863,14 @@
       </p:sp>
       <p:sp>
         <p:nvSpPr>
-          <p:cNvPr id="7" name="Rectangle 6"/>
-          <p:cNvSpPr/>
-          <p:nvPr/>
-        </p:nvSpPr>
-        <p:spPr>
-          <a:xfrm>
-            <a:off x="640080" y="1750000"/>
-            <a:ext cx="5195000" cy="502920"/>
-          </a:xfrm>
-          <a:prstGeom prst="rect">
-            <a:avLst/>
-          </a:prstGeom>
-          <a:solidFill>
-            <a:srgbClr val="0F172A"/>
-          </a:solidFill>
-          <a:ln>
-            <a:noFill/>
-          </a:ln>
-          <a:effectLst/>
-        </p:spPr>
-        <p:style>
-          <a:lnRef idx="1">
-            <a:schemeClr val="accent1"/>
-          </a:lnRef>
-          <a:fillRef idx="3">
-            <a:schemeClr val="accent1"/>
-          </a:fillRef>
-          <a:effectRef idx="2">
-            <a:schemeClr val="accent1"/>
-          </a:effectRef>
-          <a:fontRef idx="minor">
-            <a:schemeClr val="lt1"/>
-          </a:fontRef>
-        </p:style>
-        <p:txBody>
-          <a:bodyPr rtlCol="0" anchor="ctr"/>
-          <a:lstStyle/>
-          <a:p>
-            <a:pPr algn="ctr"/>
-          </a:p>
-        </p:txBody>
-      </p:sp>
-      <p:sp>
-        <p:nvSpPr>
-          <p:cNvPr id="8" name="TextBox 7"/>
+          <p:cNvPr id="9" name="TextBox 8"/>
           <p:cNvSpPr txBox="1"/>
           <p:nvPr/>
         </p:nvSpPr>
         <p:spPr>
           <a:xfrm>
-            <a:off x="914400" y="1868872"/>
-            <a:ext cx="4646360" cy="320040"/>
+            <a:off x="8549640" y="2466000"/>
+            <a:ext cx="2773375" cy="320040"/>
           </a:xfrm>
           <a:prstGeom prst="rect">
             <a:avLst/>
@@ -6944,27 +5885,27 @@
           <a:p>
             <a:pPr algn="l"/>
             <a:r>
-              <a:rPr sz="1400" b="1">
-                <a:solidFill>
-                  <a:srgbClr val="FFFFFF"/>
-                </a:solidFill>
-                <a:latin typeface="Calibri"/>
-              </a:rPr>
-              <a:t>XCEPTIONNET (BASELINE)</a:t>
-            </a:r>
-          </a:p>
-        </p:txBody>
-      </p:sp>
-      <p:sp>
-        <p:nvSpPr>
-          <p:cNvPr id="9" name="TextBox 8"/>
+              <a:rPr sz="1100" b="1">
+                <a:solidFill>
+                  <a:srgbClr val="0E7490"/>
+                </a:solidFill>
+                <a:latin typeface="Calibri"/>
+              </a:rPr>
+              <a:t>RESULT</a:t>
+            </a:r>
+          </a:p>
+        </p:txBody>
+      </p:sp>
+      <p:sp>
+        <p:nvSpPr>
+          <p:cNvPr id="10" name="TextBox 9"/>
           <p:cNvSpPr txBox="1"/>
           <p:nvPr/>
         </p:nvSpPr>
         <p:spPr>
           <a:xfrm>
-            <a:off x="914400" y="2481520"/>
-            <a:ext cx="4646360" cy="2200000"/>
+            <a:off x="8549640" y="2786000"/>
+            <a:ext cx="2773375" cy="365760"/>
           </a:xfrm>
           <a:prstGeom prst="rect">
             <a:avLst/>
@@ -6977,181 +5918,29 @@
           </a:bodyPr>
           <a:lstStyle/>
           <a:p>
-            <a:pPr>
-              <a:lnSpc>
-                <a:spcPct val="112000"/>
-              </a:lnSpc>
-              <a:spcAft>
-                <a:spcPts val="800"/>
-              </a:spcAft>
-            </a:pPr>
-            <a:r>
-              <a:rPr sz="1250" b="1">
-                <a:solidFill>
-                  <a:srgbClr val="0E7490"/>
-                </a:solidFill>
-                <a:latin typeface="Calibri"/>
-              </a:rPr>
-              <a:t>▸  Depthwise-separable CNN (Chollet 2017), ImageNet-pretrained</a:t>
-            </a:r>
-          </a:p>
-          <a:p>
-            <a:pPr>
-              <a:lnSpc>
-                <a:spcPct val="112000"/>
-              </a:lnSpc>
-              <a:spcAft>
-                <a:spcPts val="800"/>
-              </a:spcAft>
-            </a:pPr>
-            <a:r>
-              <a:rPr sz="1250" b="1">
-                <a:solidFill>
-                  <a:srgbClr val="0E7490"/>
-                </a:solidFill>
-                <a:latin typeface="Calibri"/>
-              </a:rPr>
-              <a:t>▸  2048-d pooled features → dropout → linear → logit</a:t>
-            </a:r>
-          </a:p>
-          <a:p>
-            <a:pPr>
-              <a:lnSpc>
-                <a:spcPct val="112000"/>
-              </a:lnSpc>
-              <a:spcAft>
-                <a:spcPts val="800"/>
-              </a:spcAft>
-            </a:pPr>
-            <a:r>
-              <a:rPr sz="1250" b="1">
-                <a:solidFill>
-                  <a:srgbClr val="0E7490"/>
-                </a:solidFill>
-                <a:latin typeface="Calibri"/>
-              </a:rPr>
-              <a:t>▸  Purely convolutional — local receptive fields only</a:t>
-            </a:r>
-          </a:p>
-          <a:p>
-            <a:pPr>
-              <a:lnSpc>
-                <a:spcPct val="112000"/>
-              </a:lnSpc>
-              <a:spcAft>
-                <a:spcPts val="800"/>
-              </a:spcAft>
-            </a:pPr>
-            <a:r>
-              <a:rPr sz="1250" b="1">
-                <a:solidFill>
-                  <a:srgbClr val="0E7490"/>
-                </a:solidFill>
-                <a:latin typeface="Calibri"/>
-              </a:rPr>
-              <a:t>▸  The standard reference detector for this exact task</a:t>
-            </a:r>
-          </a:p>
-        </p:txBody>
-      </p:sp>
-      <p:sp>
-        <p:nvSpPr>
-          <p:cNvPr id="10" name="Rectangle 9"/>
-          <p:cNvSpPr/>
-          <p:nvPr/>
-        </p:nvSpPr>
-        <p:spPr>
-          <a:xfrm>
-            <a:off x="6063680" y="1750000"/>
-            <a:ext cx="5195000" cy="3000000"/>
-          </a:xfrm>
-          <a:prstGeom prst="rect">
-            <a:avLst/>
-          </a:prstGeom>
-          <a:solidFill>
-            <a:srgbClr val="F1F5F9"/>
-          </a:solidFill>
-          <a:ln>
-            <a:noFill/>
-          </a:ln>
-          <a:effectLst/>
-        </p:spPr>
-        <p:style>
-          <a:lnRef idx="1">
-            <a:schemeClr val="accent1"/>
-          </a:lnRef>
-          <a:fillRef idx="3">
-            <a:schemeClr val="accent1"/>
-          </a:fillRef>
-          <a:effectRef idx="2">
-            <a:schemeClr val="accent1"/>
-          </a:effectRef>
-          <a:fontRef idx="minor">
-            <a:schemeClr val="lt1"/>
-          </a:fontRef>
-        </p:style>
-        <p:txBody>
-          <a:bodyPr rtlCol="0" anchor="ctr"/>
-          <a:lstStyle/>
-          <a:p>
-            <a:pPr algn="ctr"/>
-          </a:p>
-        </p:txBody>
-      </p:sp>
-      <p:sp>
-        <p:nvSpPr>
-          <p:cNvPr id="11" name="Rectangle 10"/>
-          <p:cNvSpPr/>
-          <p:nvPr/>
-        </p:nvSpPr>
-        <p:spPr>
-          <a:xfrm>
-            <a:off x="6063680" y="1750000"/>
-            <a:ext cx="5195000" cy="502920"/>
-          </a:xfrm>
-          <a:prstGeom prst="rect">
-            <a:avLst/>
-          </a:prstGeom>
-          <a:solidFill>
-            <a:srgbClr val="0E7490"/>
-          </a:solidFill>
-          <a:ln>
-            <a:noFill/>
-          </a:ln>
-          <a:effectLst/>
-        </p:spPr>
-        <p:style>
-          <a:lnRef idx="1">
-            <a:schemeClr val="accent1"/>
-          </a:lnRef>
-          <a:fillRef idx="3">
-            <a:schemeClr val="accent1"/>
-          </a:fillRef>
-          <a:effectRef idx="2">
-            <a:schemeClr val="accent1"/>
-          </a:effectRef>
-          <a:fontRef idx="minor">
-            <a:schemeClr val="lt1"/>
-          </a:fontRef>
-        </p:style>
-        <p:txBody>
-          <a:bodyPr rtlCol="0" anchor="ctr"/>
-          <a:lstStyle/>
-          <a:p>
-            <a:pPr algn="ctr"/>
-          </a:p>
-        </p:txBody>
-      </p:sp>
-      <p:sp>
-        <p:nvSpPr>
-          <p:cNvPr id="12" name="TextBox 11"/>
+            <a:pPr algn="l"/>
+            <a:r>
+              <a:rPr sz="2200" b="1">
+                <a:solidFill>
+                  <a:srgbClr val="0F172A"/>
+                </a:solidFill>
+                <a:latin typeface="Calibri"/>
+              </a:rPr>
+              <a:t>5,000</a:t>
+            </a:r>
+          </a:p>
+        </p:txBody>
+      </p:sp>
+      <p:sp>
+        <p:nvSpPr>
+          <p:cNvPr id="11" name="TextBox 10"/>
           <p:cNvSpPr txBox="1"/>
           <p:nvPr/>
         </p:nvSpPr>
         <p:spPr>
           <a:xfrm>
-            <a:off x="6338000" y="1868872"/>
-            <a:ext cx="4646360" cy="320040"/>
+            <a:off x="8549640" y="3126000"/>
+            <a:ext cx="2773375" cy="320040"/>
           </a:xfrm>
           <a:prstGeom prst="rect">
             <a:avLst/>
@@ -7166,27 +5955,27 @@
           <a:p>
             <a:pPr algn="l"/>
             <a:r>
-              <a:rPr sz="1400" b="1">
-                <a:solidFill>
-                  <a:srgbClr val="FFFFFF"/>
-                </a:solidFill>
-                <a:latin typeface="Calibri"/>
-              </a:rPr>
-              <a:t>CNN-VIT HYBRID</a:t>
-            </a:r>
-          </a:p>
-        </p:txBody>
-      </p:sp>
-      <p:sp>
-        <p:nvSpPr>
-          <p:cNvPr id="13" name="TextBox 12"/>
+              <a:rPr sz="1050" b="0">
+                <a:solidFill>
+                  <a:srgbClr val="475569"/>
+                </a:solidFill>
+                <a:latin typeface="Calibri"/>
+              </a:rPr>
+              <a:t>videos analyzed (real + 4 methods)</a:t>
+            </a:r>
+          </a:p>
+        </p:txBody>
+      </p:sp>
+      <p:sp>
+        <p:nvSpPr>
+          <p:cNvPr id="12" name="TextBox 11"/>
           <p:cNvSpPr txBox="1"/>
           <p:nvPr/>
         </p:nvSpPr>
         <p:spPr>
           <a:xfrm>
-            <a:off x="6338000" y="2481520"/>
-            <a:ext cx="4646360" cy="2200000"/>
+            <a:off x="8549640" y="3689700"/>
+            <a:ext cx="2773375" cy="365760"/>
           </a:xfrm>
           <a:prstGeom prst="rect">
             <a:avLst/>
@@ -7199,137 +5988,29 @@
           </a:bodyPr>
           <a:lstStyle/>
           <a:p>
-            <a:pPr>
-              <a:lnSpc>
-                <a:spcPct val="112000"/>
-              </a:lnSpc>
-              <a:spcAft>
-                <a:spcPts val="800"/>
-              </a:spcAft>
-            </a:pPr>
-            <a:r>
-              <a:rPr sz="1250" b="1">
+            <a:pPr algn="l"/>
+            <a:r>
+              <a:rPr sz="2200" b="1">
                 <a:solidFill>
                   <a:srgbClr val="0F172A"/>
                 </a:solidFill>
                 <a:latin typeface="Calibri"/>
               </a:rPr>
-              <a:t>▸  ResNet-50 (stages 1-3) → 14×14×1024 map → 512-d tokens + CLS</a:t>
-            </a:r>
-          </a:p>
-          <a:p>
-            <a:pPr>
-              <a:lnSpc>
-                <a:spcPct val="112000"/>
-              </a:lnSpc>
-              <a:spcAft>
-                <a:spcPts val="800"/>
-              </a:spcAft>
-            </a:pPr>
-            <a:r>
-              <a:rPr sz="1250" b="1">
-                <a:solidFill>
-                  <a:srgbClr val="0F172A"/>
-                </a:solidFill>
-                <a:latin typeface="Calibri"/>
-              </a:rPr>
-              <a:t>▸  6-layer, 8-head Transformer encoder over the tokens</a:t>
-            </a:r>
-          </a:p>
-          <a:p>
-            <a:pPr>
-              <a:lnSpc>
-                <a:spcPct val="112000"/>
-              </a:lnSpc>
-              <a:spcAft>
-                <a:spcPts val="800"/>
-              </a:spcAft>
-            </a:pPr>
-            <a:r>
-              <a:rPr sz="1250" b="1">
-                <a:solidFill>
-                  <a:srgbClr val="0F172A"/>
-                </a:solidFill>
-                <a:latin typeface="Calibri"/>
-              </a:rPr>
-              <a:t>▸  Tests: does global self-attention improve generalization?</a:t>
-            </a:r>
-          </a:p>
-          <a:p>
-            <a:pPr>
-              <a:lnSpc>
-                <a:spcPct val="112000"/>
-              </a:lnSpc>
-              <a:spcAft>
-                <a:spcPts val="800"/>
-              </a:spcAft>
-            </a:pPr>
-            <a:r>
-              <a:rPr sz="1250" b="1">
-                <a:solidFill>
-                  <a:srgbClr val="0F172A"/>
-                </a:solidFill>
-                <a:latin typeface="Calibri"/>
-              </a:rPr>
-              <a:t>▸  Same optimizer/schedule/data — architecture is the only variable</a:t>
-            </a:r>
-          </a:p>
-        </p:txBody>
-      </p:sp>
-      <p:sp>
-        <p:nvSpPr>
-          <p:cNvPr id="14" name="Rectangle 13"/>
-          <p:cNvSpPr/>
-          <p:nvPr/>
-        </p:nvSpPr>
-        <p:spPr>
-          <a:xfrm>
-            <a:off x="640080" y="4978600"/>
-            <a:ext cx="10852800" cy="18288"/>
-          </a:xfrm>
-          <a:prstGeom prst="rect">
-            <a:avLst/>
-          </a:prstGeom>
-          <a:solidFill>
-            <a:srgbClr val="E2E8F0"/>
-          </a:solidFill>
-          <a:ln>
-            <a:noFill/>
-          </a:ln>
-          <a:effectLst/>
-        </p:spPr>
-        <p:style>
-          <a:lnRef idx="1">
-            <a:schemeClr val="accent1"/>
-          </a:lnRef>
-          <a:fillRef idx="3">
-            <a:schemeClr val="accent1"/>
-          </a:fillRef>
-          <a:effectRef idx="2">
-            <a:schemeClr val="accent1"/>
-          </a:effectRef>
-          <a:fontRef idx="minor">
-            <a:schemeClr val="lt1"/>
-          </a:fontRef>
-        </p:style>
-        <p:txBody>
-          <a:bodyPr rtlCol="0" anchor="ctr"/>
-          <a:lstStyle/>
-          <a:p>
-            <a:pPr algn="ctr"/>
-          </a:p>
-        </p:txBody>
-      </p:sp>
-      <p:sp>
-        <p:nvSpPr>
-          <p:cNvPr id="15" name="TextBox 14"/>
+              <a:t>209</a:t>
+            </a:r>
+          </a:p>
+        </p:txBody>
+      </p:sp>
+      <p:sp>
+        <p:nvSpPr>
+          <p:cNvPr id="13" name="TextBox 12"/>
           <p:cNvSpPr txBox="1"/>
           <p:nvPr/>
         </p:nvSpPr>
         <p:spPr>
           <a:xfrm>
-            <a:off x="640080" y="5158600"/>
-            <a:ext cx="10852800" cy="320040"/>
+            <a:off x="8549640" y="4029700"/>
+            <a:ext cx="2773375" cy="320040"/>
           </a:xfrm>
           <a:prstGeom prst="rect">
             <a:avLst/>
@@ -7344,27 +6025,27 @@
           <a:p>
             <a:pPr algn="l"/>
             <a:r>
-              <a:rPr sz="1100" b="1">
-                <a:solidFill>
-                  <a:srgbClr val="0E7490"/>
-                </a:solidFill>
-                <a:latin typeface="Calibri"/>
-              </a:rPr>
-              <a:t>SHARED TRAINING &amp; EVALUATION PROTOCOL (fair comparison — only the architecture differs)</a:t>
-            </a:r>
-          </a:p>
-        </p:txBody>
-      </p:sp>
-      <p:sp>
-        <p:nvSpPr>
-          <p:cNvPr id="16" name="TextBox 15"/>
+              <a:rPr sz="1050" b="0">
+                <a:solidFill>
+                  <a:srgbClr val="475569"/>
+                </a:solidFill>
+                <a:latin typeface="Calibri"/>
+              </a:rPr>
+              <a:t>flagged on frame count (4.2%)</a:t>
+            </a:r>
+          </a:p>
+        </p:txBody>
+      </p:sp>
+      <p:sp>
+        <p:nvSpPr>
+          <p:cNvPr id="14" name="TextBox 13"/>
           <p:cNvSpPr txBox="1"/>
           <p:nvPr/>
         </p:nvSpPr>
         <p:spPr>
           <a:xfrm>
-            <a:off x="640080" y="5538600"/>
-            <a:ext cx="10852800" cy="900000"/>
+            <a:off x="8549640" y="4593400"/>
+            <a:ext cx="2773375" cy="365760"/>
           </a:xfrm>
           <a:prstGeom prst="rect">
             <a:avLst/>
@@ -7379,27 +6060,27 @@
           <a:p>
             <a:pPr algn="l"/>
             <a:r>
-              <a:rPr sz="1300" b="0">
-                <a:solidFill>
-                  <a:srgbClr val="475569"/>
-                </a:solidFill>
-                <a:latin typeface="Calibri"/>
-              </a:rPr>
-              <a:t>AMP training, AdamW, cosine LR, batch size 32 (GPU-benchmarked — XceptionNet silently throttles above this), early stopping (patience 4 on val AUC). Metrics: Accuracy/F1/AUC at frame &amp; video level (video = mean of frame probabilities). 10 training runs, 36 evaluations total.</a:t>
-            </a:r>
-          </a:p>
-        </p:txBody>
-      </p:sp>
-      <p:sp>
-        <p:nvSpPr>
-          <p:cNvPr id="17" name="TextBox 16"/>
+              <a:rPr sz="2200" b="1">
+                <a:solidFill>
+                  <a:srgbClr val="0F172A"/>
+                </a:solidFill>
+                <a:latin typeface="Calibri"/>
+              </a:rPr>
+              <a:t>326</a:t>
+            </a:r>
+          </a:p>
+        </p:txBody>
+      </p:sp>
+      <p:sp>
+        <p:nvSpPr>
+          <p:cNvPr id="15" name="TextBox 14"/>
           <p:cNvSpPr txBox="1"/>
           <p:nvPr/>
         </p:nvSpPr>
         <p:spPr>
           <a:xfrm>
-            <a:off x="640080" y="6510528"/>
-            <a:ext cx="7315200" cy="274320"/>
+            <a:off x="8549640" y="4933400"/>
+            <a:ext cx="2773375" cy="320040"/>
           </a:xfrm>
           <a:prstGeom prst="rect">
             <a:avLst/>
@@ -7414,27 +6095,27 @@
           <a:p>
             <a:pPr algn="l"/>
             <a:r>
-              <a:rPr sz="1000" b="0">
-                <a:solidFill>
-                  <a:srgbClr val="94A3B8"/>
-                </a:solidFill>
-                <a:latin typeface="Calibri"/>
-              </a:rPr>
-              <a:t>Deepfake Detection — XceptionNet vs. CNN-ViT (23AID205)</a:t>
-            </a:r>
-          </a:p>
-        </p:txBody>
-      </p:sp>
-      <p:sp>
-        <p:nvSpPr>
-          <p:cNvPr id="18" name="TextBox 17"/>
+              <a:rPr sz="1050" b="0">
+                <a:solidFill>
+                  <a:srgbClr val="475569"/>
+                </a:solidFill>
+                <a:latin typeface="Calibri"/>
+              </a:rPr>
+              <a:t>flagged on file size (6.5%)</a:t>
+            </a:r>
+          </a:p>
+        </p:txBody>
+      </p:sp>
+      <p:sp>
+        <p:nvSpPr>
+          <p:cNvPr id="16" name="TextBox 15"/>
           <p:cNvSpPr txBox="1"/>
           <p:nvPr/>
         </p:nvSpPr>
         <p:spPr>
           <a:xfrm>
-            <a:off x="10972800" y="6510528"/>
-            <a:ext cx="822960" cy="274320"/>
+            <a:off x="8549640" y="5497100"/>
+            <a:ext cx="2773375" cy="365760"/>
           </a:xfrm>
           <a:prstGeom prst="rect">
             <a:avLst/>
@@ -7447,6 +6128,111 @@
           </a:bodyPr>
           <a:lstStyle/>
           <a:p>
+            <a:pPr algn="l"/>
+            <a:r>
+              <a:rPr sz="2200" b="1">
+                <a:solidFill>
+                  <a:srgbClr val="0F172A"/>
+                </a:solidFill>
+                <a:latin typeface="Calibri"/>
+              </a:rPr>
+              <a:t>502</a:t>
+            </a:r>
+          </a:p>
+        </p:txBody>
+      </p:sp>
+      <p:sp>
+        <p:nvSpPr>
+          <p:cNvPr id="17" name="TextBox 16"/>
+          <p:cNvSpPr txBox="1"/>
+          <p:nvPr/>
+        </p:nvSpPr>
+        <p:spPr>
+          <a:xfrm>
+            <a:off x="8549640" y="5837100"/>
+            <a:ext cx="2773375" cy="320040"/>
+          </a:xfrm>
+          <a:prstGeom prst="rect">
+            <a:avLst/>
+          </a:prstGeom>
+          <a:noFill/>
+        </p:spPr>
+        <p:txBody>
+          <a:bodyPr wrap="square">
+            <a:spAutoFit/>
+          </a:bodyPr>
+          <a:lstStyle/>
+          <a:p>
+            <a:pPr algn="l"/>
+            <a:r>
+              <a:rPr sz="1050" b="0">
+                <a:solidFill>
+                  <a:srgbClr val="475569"/>
+                </a:solidFill>
+                <a:latin typeface="Calibri"/>
+              </a:rPr>
+              <a:t>unique outliers overall (10.0%)</a:t>
+            </a:r>
+          </a:p>
+        </p:txBody>
+      </p:sp>
+      <p:sp>
+        <p:nvSpPr>
+          <p:cNvPr id="18" name="TextBox 17"/>
+          <p:cNvSpPr txBox="1"/>
+          <p:nvPr/>
+        </p:nvSpPr>
+        <p:spPr>
+          <a:xfrm>
+            <a:off x="640080" y="6510528"/>
+            <a:ext cx="7315200" cy="274320"/>
+          </a:xfrm>
+          <a:prstGeom prst="rect">
+            <a:avLst/>
+          </a:prstGeom>
+          <a:noFill/>
+        </p:spPr>
+        <p:txBody>
+          <a:bodyPr wrap="square">
+            <a:spAutoFit/>
+          </a:bodyPr>
+          <a:lstStyle/>
+          <a:p>
+            <a:pPr algn="l"/>
+            <a:r>
+              <a:rPr sz="1000" b="0">
+                <a:solidFill>
+                  <a:srgbClr val="94A3B8"/>
+                </a:solidFill>
+                <a:latin typeface="Calibri"/>
+              </a:rPr>
+              <a:t>Deepfake Detection — XceptionNet vs. CNN-ViT (23AID205)</a:t>
+            </a:r>
+          </a:p>
+        </p:txBody>
+      </p:sp>
+      <p:sp>
+        <p:nvSpPr>
+          <p:cNvPr id="19" name="TextBox 18"/>
+          <p:cNvSpPr txBox="1"/>
+          <p:nvPr/>
+        </p:nvSpPr>
+        <p:spPr>
+          <a:xfrm>
+            <a:off x="10972800" y="6510528"/>
+            <a:ext cx="822960" cy="274320"/>
+          </a:xfrm>
+          <a:prstGeom prst="rect">
+            <a:avLst/>
+          </a:prstGeom>
+          <a:noFill/>
+        </p:spPr>
+        <p:txBody>
+          <a:bodyPr wrap="square">
+            <a:spAutoFit/>
+          </a:bodyPr>
+          <a:lstStyle/>
+          <a:p>
             <a:pPr algn="r"/>
             <a:r>
               <a:rPr sz="1000" b="0">
@@ -7455,7 +6241,7 @@
                 </a:solidFill>
                 <a:latin typeface="Calibri"/>
               </a:rPr>
-              <a:t>5/11</a:t>
+              <a:t>5/9</a:t>
             </a:r>
           </a:p>
         </p:txBody>
@@ -7552,7 +6338,7 @@
                 </a:solidFill>
                 <a:latin typeface="Calibri"/>
               </a:rPr>
-              <a:t>RESULTS · EXPERIMENT 1</a:t>
+              <a:t>ALGORITHM SELECTION</a:t>
             </a:r>
           </a:p>
         </p:txBody>
@@ -7587,7 +6373,7 @@
                 </a:solidFill>
                 <a:latin typeface="Calibri"/>
               </a:rPr>
-              <a:t>Baseline Comparison (same-distribution, c23)</a:t>
+              <a:t>Models: XceptionNet vs. CNN-ViT Hybrid</a:t>
             </a:r>
           </a:p>
         </p:txBody>
@@ -7638,14 +6424,102 @@
       </p:sp>
       <p:sp>
         <p:nvSpPr>
-          <p:cNvPr id="6" name="TextBox 5"/>
+          <p:cNvPr id="6" name="Rectangle 5"/>
+          <p:cNvSpPr/>
+          <p:nvPr/>
+        </p:nvSpPr>
+        <p:spPr>
+          <a:xfrm>
+            <a:off x="640080" y="1750000"/>
+            <a:ext cx="5195000" cy="3000000"/>
+          </a:xfrm>
+          <a:prstGeom prst="rect">
+            <a:avLst/>
+          </a:prstGeom>
+          <a:solidFill>
+            <a:srgbClr val="F1F5F9"/>
+          </a:solidFill>
+          <a:ln>
+            <a:noFill/>
+          </a:ln>
+          <a:effectLst/>
+        </p:spPr>
+        <p:style>
+          <a:lnRef idx="1">
+            <a:schemeClr val="accent1"/>
+          </a:lnRef>
+          <a:fillRef idx="3">
+            <a:schemeClr val="accent1"/>
+          </a:fillRef>
+          <a:effectRef idx="2">
+            <a:schemeClr val="accent1"/>
+          </a:effectRef>
+          <a:fontRef idx="minor">
+            <a:schemeClr val="lt1"/>
+          </a:fontRef>
+        </p:style>
+        <p:txBody>
+          <a:bodyPr rtlCol="0" anchor="ctr"/>
+          <a:lstStyle/>
+          <a:p>
+            <a:pPr algn="ctr"/>
+          </a:p>
+        </p:txBody>
+      </p:sp>
+      <p:sp>
+        <p:nvSpPr>
+          <p:cNvPr id="7" name="Rectangle 6"/>
+          <p:cNvSpPr/>
+          <p:nvPr/>
+        </p:nvSpPr>
+        <p:spPr>
+          <a:xfrm>
+            <a:off x="640080" y="1750000"/>
+            <a:ext cx="5195000" cy="502920"/>
+          </a:xfrm>
+          <a:prstGeom prst="rect">
+            <a:avLst/>
+          </a:prstGeom>
+          <a:solidFill>
+            <a:srgbClr val="0F172A"/>
+          </a:solidFill>
+          <a:ln>
+            <a:noFill/>
+          </a:ln>
+          <a:effectLst/>
+        </p:spPr>
+        <p:style>
+          <a:lnRef idx="1">
+            <a:schemeClr val="accent1"/>
+          </a:lnRef>
+          <a:fillRef idx="3">
+            <a:schemeClr val="accent1"/>
+          </a:fillRef>
+          <a:effectRef idx="2">
+            <a:schemeClr val="accent1"/>
+          </a:effectRef>
+          <a:fontRef idx="minor">
+            <a:schemeClr val="lt1"/>
+          </a:fontRef>
+        </p:style>
+        <p:txBody>
+          <a:bodyPr rtlCol="0" anchor="ctr"/>
+          <a:lstStyle/>
+          <a:p>
+            <a:pPr algn="ctr"/>
+          </a:p>
+        </p:txBody>
+      </p:sp>
+      <p:sp>
+        <p:nvSpPr>
+          <p:cNvPr id="8" name="TextBox 7"/>
           <p:cNvSpPr txBox="1"/>
           <p:nvPr/>
         </p:nvSpPr>
         <p:spPr>
           <a:xfrm>
-            <a:off x="640080" y="1691640"/>
-            <a:ext cx="10515600" cy="400000"/>
+            <a:off x="914400" y="1868872"/>
+            <a:ext cx="4646360" cy="320040"/>
           </a:xfrm>
           <a:prstGeom prst="rect">
             <a:avLst/>
@@ -7660,13 +6534,729 @@
           <a:p>
             <a:pPr algn="l"/>
             <a:r>
+              <a:rPr sz="1400" b="1">
+                <a:solidFill>
+                  <a:srgbClr val="FFFFFF"/>
+                </a:solidFill>
+                <a:latin typeface="Calibri"/>
+              </a:rPr>
+              <a:t>XCEPTIONNET (BASELINE)</a:t>
+            </a:r>
+          </a:p>
+        </p:txBody>
+      </p:sp>
+      <p:sp>
+        <p:nvSpPr>
+          <p:cNvPr id="9" name="TextBox 8"/>
+          <p:cNvSpPr txBox="1"/>
+          <p:nvPr/>
+        </p:nvSpPr>
+        <p:spPr>
+          <a:xfrm>
+            <a:off x="914400" y="2481520"/>
+            <a:ext cx="4646360" cy="2200000"/>
+          </a:xfrm>
+          <a:prstGeom prst="rect">
+            <a:avLst/>
+          </a:prstGeom>
+          <a:noFill/>
+        </p:spPr>
+        <p:txBody>
+          <a:bodyPr wrap="square">
+            <a:spAutoFit/>
+          </a:bodyPr>
+          <a:lstStyle/>
+          <a:p>
+            <a:pPr>
+              <a:lnSpc>
+                <a:spcPct val="112000"/>
+              </a:lnSpc>
+              <a:spcAft>
+                <a:spcPts val="800"/>
+              </a:spcAft>
+            </a:pPr>
+            <a:r>
+              <a:rPr sz="1250" b="1">
+                <a:solidFill>
+                  <a:srgbClr val="0E7490"/>
+                </a:solidFill>
+                <a:latin typeface="Calibri"/>
+              </a:rPr>
+              <a:t>▸  Depthwise-separable CNN (Chollet 2017), ImageNet-pretrained</a:t>
+            </a:r>
+          </a:p>
+          <a:p>
+            <a:pPr>
+              <a:lnSpc>
+                <a:spcPct val="112000"/>
+              </a:lnSpc>
+              <a:spcAft>
+                <a:spcPts val="800"/>
+              </a:spcAft>
+            </a:pPr>
+            <a:r>
+              <a:rPr sz="1250" b="1">
+                <a:solidFill>
+                  <a:srgbClr val="0E7490"/>
+                </a:solidFill>
+                <a:latin typeface="Calibri"/>
+              </a:rPr>
+              <a:t>▸  2048-d pooled features → dropout → linear → logit</a:t>
+            </a:r>
+          </a:p>
+          <a:p>
+            <a:pPr>
+              <a:lnSpc>
+                <a:spcPct val="112000"/>
+              </a:lnSpc>
+              <a:spcAft>
+                <a:spcPts val="800"/>
+              </a:spcAft>
+            </a:pPr>
+            <a:r>
+              <a:rPr sz="1250" b="1">
+                <a:solidFill>
+                  <a:srgbClr val="0E7490"/>
+                </a:solidFill>
+                <a:latin typeface="Calibri"/>
+              </a:rPr>
+              <a:t>▸  Purely convolutional — local receptive fields only</a:t>
+            </a:r>
+          </a:p>
+          <a:p>
+            <a:pPr>
+              <a:lnSpc>
+                <a:spcPct val="112000"/>
+              </a:lnSpc>
+              <a:spcAft>
+                <a:spcPts val="800"/>
+              </a:spcAft>
+            </a:pPr>
+            <a:r>
+              <a:rPr sz="1250" b="1">
+                <a:solidFill>
+                  <a:srgbClr val="0E7490"/>
+                </a:solidFill>
+                <a:latin typeface="Calibri"/>
+              </a:rPr>
+              <a:t>▸  The standard reference detector for this exact task</a:t>
+            </a:r>
+          </a:p>
+        </p:txBody>
+      </p:sp>
+      <p:sp>
+        <p:nvSpPr>
+          <p:cNvPr id="10" name="Rectangle 9"/>
+          <p:cNvSpPr/>
+          <p:nvPr/>
+        </p:nvSpPr>
+        <p:spPr>
+          <a:xfrm>
+            <a:off x="6063680" y="1750000"/>
+            <a:ext cx="5195000" cy="3000000"/>
+          </a:xfrm>
+          <a:prstGeom prst="rect">
+            <a:avLst/>
+          </a:prstGeom>
+          <a:solidFill>
+            <a:srgbClr val="F1F5F9"/>
+          </a:solidFill>
+          <a:ln>
+            <a:noFill/>
+          </a:ln>
+          <a:effectLst/>
+        </p:spPr>
+        <p:style>
+          <a:lnRef idx="1">
+            <a:schemeClr val="accent1"/>
+          </a:lnRef>
+          <a:fillRef idx="3">
+            <a:schemeClr val="accent1"/>
+          </a:fillRef>
+          <a:effectRef idx="2">
+            <a:schemeClr val="accent1"/>
+          </a:effectRef>
+          <a:fontRef idx="minor">
+            <a:schemeClr val="lt1"/>
+          </a:fontRef>
+        </p:style>
+        <p:txBody>
+          <a:bodyPr rtlCol="0" anchor="ctr"/>
+          <a:lstStyle/>
+          <a:p>
+            <a:pPr algn="ctr"/>
+          </a:p>
+        </p:txBody>
+      </p:sp>
+      <p:sp>
+        <p:nvSpPr>
+          <p:cNvPr id="11" name="Rectangle 10"/>
+          <p:cNvSpPr/>
+          <p:nvPr/>
+        </p:nvSpPr>
+        <p:spPr>
+          <a:xfrm>
+            <a:off x="6063680" y="1750000"/>
+            <a:ext cx="5195000" cy="502920"/>
+          </a:xfrm>
+          <a:prstGeom prst="rect">
+            <a:avLst/>
+          </a:prstGeom>
+          <a:solidFill>
+            <a:srgbClr val="0E7490"/>
+          </a:solidFill>
+          <a:ln>
+            <a:noFill/>
+          </a:ln>
+          <a:effectLst/>
+        </p:spPr>
+        <p:style>
+          <a:lnRef idx="1">
+            <a:schemeClr val="accent1"/>
+          </a:lnRef>
+          <a:fillRef idx="3">
+            <a:schemeClr val="accent1"/>
+          </a:fillRef>
+          <a:effectRef idx="2">
+            <a:schemeClr val="accent1"/>
+          </a:effectRef>
+          <a:fontRef idx="minor">
+            <a:schemeClr val="lt1"/>
+          </a:fontRef>
+        </p:style>
+        <p:txBody>
+          <a:bodyPr rtlCol="0" anchor="ctr"/>
+          <a:lstStyle/>
+          <a:p>
+            <a:pPr algn="ctr"/>
+          </a:p>
+        </p:txBody>
+      </p:sp>
+      <p:sp>
+        <p:nvSpPr>
+          <p:cNvPr id="12" name="TextBox 11"/>
+          <p:cNvSpPr txBox="1"/>
+          <p:nvPr/>
+        </p:nvSpPr>
+        <p:spPr>
+          <a:xfrm>
+            <a:off x="6338000" y="1868872"/>
+            <a:ext cx="4646360" cy="320040"/>
+          </a:xfrm>
+          <a:prstGeom prst="rect">
+            <a:avLst/>
+          </a:prstGeom>
+          <a:noFill/>
+        </p:spPr>
+        <p:txBody>
+          <a:bodyPr wrap="square">
+            <a:spAutoFit/>
+          </a:bodyPr>
+          <a:lstStyle/>
+          <a:p>
+            <a:pPr algn="l"/>
+            <a:r>
+              <a:rPr sz="1400" b="1">
+                <a:solidFill>
+                  <a:srgbClr val="FFFFFF"/>
+                </a:solidFill>
+                <a:latin typeface="Calibri"/>
+              </a:rPr>
+              <a:t>CNN-VIT HYBRID</a:t>
+            </a:r>
+          </a:p>
+        </p:txBody>
+      </p:sp>
+      <p:sp>
+        <p:nvSpPr>
+          <p:cNvPr id="13" name="TextBox 12"/>
+          <p:cNvSpPr txBox="1"/>
+          <p:nvPr/>
+        </p:nvSpPr>
+        <p:spPr>
+          <a:xfrm>
+            <a:off x="6338000" y="2481520"/>
+            <a:ext cx="4646360" cy="2200000"/>
+          </a:xfrm>
+          <a:prstGeom prst="rect">
+            <a:avLst/>
+          </a:prstGeom>
+          <a:noFill/>
+        </p:spPr>
+        <p:txBody>
+          <a:bodyPr wrap="square">
+            <a:spAutoFit/>
+          </a:bodyPr>
+          <a:lstStyle/>
+          <a:p>
+            <a:pPr>
+              <a:lnSpc>
+                <a:spcPct val="112000"/>
+              </a:lnSpc>
+              <a:spcAft>
+                <a:spcPts val="800"/>
+              </a:spcAft>
+            </a:pPr>
+            <a:r>
+              <a:rPr sz="1250" b="1">
+                <a:solidFill>
+                  <a:srgbClr val="0F172A"/>
+                </a:solidFill>
+                <a:latin typeface="Calibri"/>
+              </a:rPr>
+              <a:t>▸  ResNet-50 (stages 1-3) → 14×14×1024 map → 512-d tokens + CLS</a:t>
+            </a:r>
+          </a:p>
+          <a:p>
+            <a:pPr>
+              <a:lnSpc>
+                <a:spcPct val="112000"/>
+              </a:lnSpc>
+              <a:spcAft>
+                <a:spcPts val="800"/>
+              </a:spcAft>
+            </a:pPr>
+            <a:r>
+              <a:rPr sz="1250" b="1">
+                <a:solidFill>
+                  <a:srgbClr val="0F172A"/>
+                </a:solidFill>
+                <a:latin typeface="Calibri"/>
+              </a:rPr>
+              <a:t>▸  6-layer, 8-head Transformer encoder over the tokens</a:t>
+            </a:r>
+          </a:p>
+          <a:p>
+            <a:pPr>
+              <a:lnSpc>
+                <a:spcPct val="112000"/>
+              </a:lnSpc>
+              <a:spcAft>
+                <a:spcPts val="800"/>
+              </a:spcAft>
+            </a:pPr>
+            <a:r>
+              <a:rPr sz="1250" b="1">
+                <a:solidFill>
+                  <a:srgbClr val="0F172A"/>
+                </a:solidFill>
+                <a:latin typeface="Calibri"/>
+              </a:rPr>
+              <a:t>▸  Tests: does global self-attention improve generalization?</a:t>
+            </a:r>
+          </a:p>
+          <a:p>
+            <a:pPr>
+              <a:lnSpc>
+                <a:spcPct val="112000"/>
+              </a:lnSpc>
+              <a:spcAft>
+                <a:spcPts val="800"/>
+              </a:spcAft>
+            </a:pPr>
+            <a:r>
+              <a:rPr sz="1250" b="1">
+                <a:solidFill>
+                  <a:srgbClr val="0F172A"/>
+                </a:solidFill>
+                <a:latin typeface="Calibri"/>
+              </a:rPr>
+              <a:t>▸  Same optimizer/schedule/data — architecture is the only variable</a:t>
+            </a:r>
+          </a:p>
+        </p:txBody>
+      </p:sp>
+      <p:sp>
+        <p:nvSpPr>
+          <p:cNvPr id="14" name="Rectangle 13"/>
+          <p:cNvSpPr/>
+          <p:nvPr/>
+        </p:nvSpPr>
+        <p:spPr>
+          <a:xfrm>
+            <a:off x="640080" y="4978600"/>
+            <a:ext cx="10852800" cy="18288"/>
+          </a:xfrm>
+          <a:prstGeom prst="rect">
+            <a:avLst/>
+          </a:prstGeom>
+          <a:solidFill>
+            <a:srgbClr val="E2E8F0"/>
+          </a:solidFill>
+          <a:ln>
+            <a:noFill/>
+          </a:ln>
+          <a:effectLst/>
+        </p:spPr>
+        <p:style>
+          <a:lnRef idx="1">
+            <a:schemeClr val="accent1"/>
+          </a:lnRef>
+          <a:fillRef idx="3">
+            <a:schemeClr val="accent1"/>
+          </a:fillRef>
+          <a:effectRef idx="2">
+            <a:schemeClr val="accent1"/>
+          </a:effectRef>
+          <a:fontRef idx="minor">
+            <a:schemeClr val="lt1"/>
+          </a:fontRef>
+        </p:style>
+        <p:txBody>
+          <a:bodyPr rtlCol="0" anchor="ctr"/>
+          <a:lstStyle/>
+          <a:p>
+            <a:pPr algn="ctr"/>
+          </a:p>
+        </p:txBody>
+      </p:sp>
+      <p:sp>
+        <p:nvSpPr>
+          <p:cNvPr id="15" name="TextBox 14"/>
+          <p:cNvSpPr txBox="1"/>
+          <p:nvPr/>
+        </p:nvSpPr>
+        <p:spPr>
+          <a:xfrm>
+            <a:off x="640080" y="5158600"/>
+            <a:ext cx="10852800" cy="320040"/>
+          </a:xfrm>
+          <a:prstGeom prst="rect">
+            <a:avLst/>
+          </a:prstGeom>
+          <a:noFill/>
+        </p:spPr>
+        <p:txBody>
+          <a:bodyPr wrap="square">
+            <a:spAutoFit/>
+          </a:bodyPr>
+          <a:lstStyle/>
+          <a:p>
+            <a:pPr algn="l"/>
+            <a:r>
+              <a:rPr sz="1100" b="1">
+                <a:solidFill>
+                  <a:srgbClr val="0E7490"/>
+                </a:solidFill>
+                <a:latin typeface="Calibri"/>
+              </a:rPr>
+              <a:t>SHARED TRAINING &amp; EVALUATION PROTOCOL (fair comparison — only the architecture differs)</a:t>
+            </a:r>
+          </a:p>
+        </p:txBody>
+      </p:sp>
+      <p:sp>
+        <p:nvSpPr>
+          <p:cNvPr id="16" name="TextBox 15"/>
+          <p:cNvSpPr txBox="1"/>
+          <p:nvPr/>
+        </p:nvSpPr>
+        <p:spPr>
+          <a:xfrm>
+            <a:off x="640080" y="5538600"/>
+            <a:ext cx="10852800" cy="900000"/>
+          </a:xfrm>
+          <a:prstGeom prst="rect">
+            <a:avLst/>
+          </a:prstGeom>
+          <a:noFill/>
+        </p:spPr>
+        <p:txBody>
+          <a:bodyPr wrap="square">
+            <a:spAutoFit/>
+          </a:bodyPr>
+          <a:lstStyle/>
+          <a:p>
+            <a:pPr algn="l"/>
+            <a:r>
+              <a:rPr sz="1300" b="0">
+                <a:solidFill>
+                  <a:srgbClr val="475569"/>
+                </a:solidFill>
+                <a:latin typeface="Calibri"/>
+              </a:rPr>
+              <a:t>AMP training, AdamW, cosine LR, batch size 32 (GPU-benchmarked — XceptionNet silently throttles above this), early stopping (patience 4 on val AUC). Metrics: Accuracy/F1/AUC at frame &amp; video level (video = mean of frame probabilities).</a:t>
+            </a:r>
+          </a:p>
+        </p:txBody>
+      </p:sp>
+      <p:sp>
+        <p:nvSpPr>
+          <p:cNvPr id="17" name="TextBox 16"/>
+          <p:cNvSpPr txBox="1"/>
+          <p:nvPr/>
+        </p:nvSpPr>
+        <p:spPr>
+          <a:xfrm>
+            <a:off x="640080" y="6510528"/>
+            <a:ext cx="7315200" cy="274320"/>
+          </a:xfrm>
+          <a:prstGeom prst="rect">
+            <a:avLst/>
+          </a:prstGeom>
+          <a:noFill/>
+        </p:spPr>
+        <p:txBody>
+          <a:bodyPr wrap="square">
+            <a:spAutoFit/>
+          </a:bodyPr>
+          <a:lstStyle/>
+          <a:p>
+            <a:pPr algn="l"/>
+            <a:r>
+              <a:rPr sz="1000" b="0">
+                <a:solidFill>
+                  <a:srgbClr val="94A3B8"/>
+                </a:solidFill>
+                <a:latin typeface="Calibri"/>
+              </a:rPr>
+              <a:t>Deepfake Detection — XceptionNet vs. CNN-ViT (23AID205)</a:t>
+            </a:r>
+          </a:p>
+        </p:txBody>
+      </p:sp>
+      <p:sp>
+        <p:nvSpPr>
+          <p:cNvPr id="18" name="TextBox 17"/>
+          <p:cNvSpPr txBox="1"/>
+          <p:nvPr/>
+        </p:nvSpPr>
+        <p:spPr>
+          <a:xfrm>
+            <a:off x="10972800" y="6510528"/>
+            <a:ext cx="822960" cy="274320"/>
+          </a:xfrm>
+          <a:prstGeom prst="rect">
+            <a:avLst/>
+          </a:prstGeom>
+          <a:noFill/>
+        </p:spPr>
+        <p:txBody>
+          <a:bodyPr wrap="square">
+            <a:spAutoFit/>
+          </a:bodyPr>
+          <a:lstStyle/>
+          <a:p>
+            <a:pPr algn="r"/>
+            <a:r>
+              <a:rPr sz="1000" b="0">
+                <a:solidFill>
+                  <a:srgbClr val="94A3B8"/>
+                </a:solidFill>
+                <a:latin typeface="Calibri"/>
+              </a:rPr>
+              <a:t>6/9</a:t>
+            </a:r>
+          </a:p>
+        </p:txBody>
+      </p:sp>
+    </p:spTree>
+  </p:cSld>
+  <p:clrMapOvr>
+    <a:masterClrMapping/>
+  </p:clrMapOvr>
+</p:sld>
+</file>
+
+<file path=ppt/slides/slide7.xml><?xml version="1.0" encoding="utf-8"?>
+<p:sld xmlns:a="http://schemas.openxmlformats.org/drawingml/2006/main" xmlns:p="http://schemas.openxmlformats.org/presentationml/2006/main" xmlns:r="http://schemas.openxmlformats.org/officeDocument/2006/relationships">
+  <p:cSld>
+    <p:spTree>
+      <p:nvGrpSpPr>
+        <p:cNvPr id="1" name=""/>
+        <p:cNvGrpSpPr/>
+        <p:nvPr/>
+      </p:nvGrpSpPr>
+      <p:grpSpPr/>
+      <p:sp>
+        <p:nvSpPr>
+          <p:cNvPr id="2" name="Rectangle 1"/>
+          <p:cNvSpPr/>
+          <p:nvPr/>
+        </p:nvSpPr>
+        <p:spPr>
+          <a:xfrm>
+            <a:off x="0" y="0"/>
+            <a:ext cx="12191695" cy="6858000"/>
+          </a:xfrm>
+          <a:prstGeom prst="rect">
+            <a:avLst/>
+          </a:prstGeom>
+          <a:solidFill>
+            <a:srgbClr val="FFFFFF"/>
+          </a:solidFill>
+          <a:ln>
+            <a:noFill/>
+          </a:ln>
+          <a:effectLst/>
+        </p:spPr>
+        <p:style>
+          <a:lnRef idx="1">
+            <a:schemeClr val="accent1"/>
+          </a:lnRef>
+          <a:fillRef idx="3">
+            <a:schemeClr val="accent1"/>
+          </a:fillRef>
+          <a:effectRef idx="2">
+            <a:schemeClr val="accent1"/>
+          </a:effectRef>
+          <a:fontRef idx="minor">
+            <a:schemeClr val="lt1"/>
+          </a:fontRef>
+        </p:style>
+        <p:txBody>
+          <a:bodyPr rtlCol="0" anchor="ctr"/>
+          <a:lstStyle/>
+          <a:p>
+            <a:pPr algn="ctr"/>
+          </a:p>
+        </p:txBody>
+      </p:sp>
+      <p:sp>
+        <p:nvSpPr>
+          <p:cNvPr id="3" name="TextBox 2"/>
+          <p:cNvSpPr txBox="1"/>
+          <p:nvPr/>
+        </p:nvSpPr>
+        <p:spPr>
+          <a:xfrm>
+            <a:off x="640080" y="384048"/>
+            <a:ext cx="9144000" cy="320040"/>
+          </a:xfrm>
+          <a:prstGeom prst="rect">
+            <a:avLst/>
+          </a:prstGeom>
+          <a:noFill/>
+        </p:spPr>
+        <p:txBody>
+          <a:bodyPr wrap="square">
+            <a:spAutoFit/>
+          </a:bodyPr>
+          <a:lstStyle/>
+          <a:p>
+            <a:pPr algn="l"/>
+            <a:r>
+              <a:rPr sz="1300" b="1">
+                <a:solidFill>
+                  <a:srgbClr val="0E7490"/>
+                </a:solidFill>
+                <a:latin typeface="Calibri"/>
+              </a:rPr>
+              <a:t>RESULTS · EXPERIMENT 1 — COMPLETE</a:t>
+            </a:r>
+          </a:p>
+        </p:txBody>
+      </p:sp>
+      <p:sp>
+        <p:nvSpPr>
+          <p:cNvPr id="4" name="TextBox 3"/>
+          <p:cNvSpPr txBox="1"/>
+          <p:nvPr/>
+        </p:nvSpPr>
+        <p:spPr>
+          <a:xfrm>
+            <a:off x="640080" y="658368"/>
+            <a:ext cx="10852800" cy="731520"/>
+          </a:xfrm>
+          <a:prstGeom prst="rect">
+            <a:avLst/>
+          </a:prstGeom>
+          <a:noFill/>
+        </p:spPr>
+        <p:txBody>
+          <a:bodyPr wrap="square">
+            <a:spAutoFit/>
+          </a:bodyPr>
+          <a:lstStyle/>
+          <a:p>
+            <a:pPr algn="l"/>
+            <a:r>
+              <a:rPr sz="2800" b="1">
+                <a:solidFill>
+                  <a:srgbClr val="1A202C"/>
+                </a:solidFill>
+                <a:latin typeface="Calibri"/>
+              </a:rPr>
+              <a:t>Baseline Comparison (same-distribution, c23)</a:t>
+            </a:r>
+          </a:p>
+        </p:txBody>
+      </p:sp>
+      <p:sp>
+        <p:nvSpPr>
+          <p:cNvPr id="5" name="Rectangle 4"/>
+          <p:cNvSpPr/>
+          <p:nvPr/>
+        </p:nvSpPr>
+        <p:spPr>
+          <a:xfrm>
+            <a:off x="640080" y="1353312"/>
+            <a:ext cx="502920" cy="41148"/>
+          </a:xfrm>
+          <a:prstGeom prst="rect">
+            <a:avLst/>
+          </a:prstGeom>
+          <a:solidFill>
+            <a:srgbClr val="22B8CF"/>
+          </a:solidFill>
+          <a:ln>
+            <a:noFill/>
+          </a:ln>
+          <a:effectLst/>
+        </p:spPr>
+        <p:style>
+          <a:lnRef idx="1">
+            <a:schemeClr val="accent1"/>
+          </a:lnRef>
+          <a:fillRef idx="3">
+            <a:schemeClr val="accent1"/>
+          </a:fillRef>
+          <a:effectRef idx="2">
+            <a:schemeClr val="accent1"/>
+          </a:effectRef>
+          <a:fontRef idx="minor">
+            <a:schemeClr val="lt1"/>
+          </a:fontRef>
+        </p:style>
+        <p:txBody>
+          <a:bodyPr rtlCol="0" anchor="ctr"/>
+          <a:lstStyle/>
+          <a:p>
+            <a:pPr algn="ctr"/>
+          </a:p>
+        </p:txBody>
+      </p:sp>
+      <p:sp>
+        <p:nvSpPr>
+          <p:cNvPr id="6" name="TextBox 5"/>
+          <p:cNvSpPr txBox="1"/>
+          <p:nvPr/>
+        </p:nvSpPr>
+        <p:spPr>
+          <a:xfrm>
+            <a:off x="640080" y="1691640"/>
+            <a:ext cx="10515600" cy="400000"/>
+          </a:xfrm>
+          <a:prstGeom prst="rect">
+            <a:avLst/>
+          </a:prstGeom>
+          <a:noFill/>
+        </p:spPr>
+        <p:txBody>
+          <a:bodyPr wrap="square">
+            <a:spAutoFit/>
+          </a:bodyPr>
+          <a:lstStyle/>
+          <a:p>
+            <a:pPr algn="l"/>
+            <a:r>
               <a:rPr sz="1350" b="0">
                 <a:solidFill>
                   <a:srgbClr val="475569"/>
                 </a:solidFill>
                 <a:latin typeface="Calibri"/>
               </a:rPr>
-              <a:t>Both models trained and tested on all 4 methods — the headline accuracy number most papers stop at.</a:t>
+              <a:t>Both models trained and tested on all 4 methods — the first of three planned experiments, complete as of this review.</a:t>
             </a:r>
           </a:p>
         </p:txBody>
@@ -8133,7 +7723,7 @@
                 </a:solidFill>
                 <a:latin typeface="Calibri"/>
               </a:rPr>
-              <a:t>XceptionNet leads on every same-distribution metric — the first sign the hybrid's extra complexity isn't paying off on this task.</a:t>
+              <a:t>XceptionNet leads on every same-distribution metric here. Whether this holds under cross-manipulation and compression shift is what Experiments 2 &amp; 3 will show at the final review.</a:t>
             </a:r>
           </a:p>
         </p:txBody>
@@ -8203,470 +7793,7 @@
                 </a:solidFill>
                 <a:latin typeface="Calibri"/>
               </a:rPr>
-              <a:t>6/11</a:t>
-            </a:r>
-          </a:p>
-        </p:txBody>
-      </p:sp>
-    </p:spTree>
-  </p:cSld>
-  <p:clrMapOvr>
-    <a:masterClrMapping/>
-  </p:clrMapOvr>
-</p:sld>
-</file>
-
-<file path=ppt/slides/slide7.xml><?xml version="1.0" encoding="utf-8"?>
-<p:sld xmlns:a="http://schemas.openxmlformats.org/drawingml/2006/main" xmlns:p="http://schemas.openxmlformats.org/presentationml/2006/main" xmlns:r="http://schemas.openxmlformats.org/officeDocument/2006/relationships">
-  <p:cSld>
-    <p:spTree>
-      <p:nvGrpSpPr>
-        <p:cNvPr id="1" name=""/>
-        <p:cNvGrpSpPr/>
-        <p:nvPr/>
-      </p:nvGrpSpPr>
-      <p:grpSpPr/>
-      <p:sp>
-        <p:nvSpPr>
-          <p:cNvPr id="2" name="Rectangle 1"/>
-          <p:cNvSpPr/>
-          <p:nvPr/>
-        </p:nvSpPr>
-        <p:spPr>
-          <a:xfrm>
-            <a:off x="0" y="0"/>
-            <a:ext cx="12191695" cy="6858000"/>
-          </a:xfrm>
-          <a:prstGeom prst="rect">
-            <a:avLst/>
-          </a:prstGeom>
-          <a:solidFill>
-            <a:srgbClr val="FFFFFF"/>
-          </a:solidFill>
-          <a:ln>
-            <a:noFill/>
-          </a:ln>
-          <a:effectLst/>
-        </p:spPr>
-        <p:style>
-          <a:lnRef idx="1">
-            <a:schemeClr val="accent1"/>
-          </a:lnRef>
-          <a:fillRef idx="3">
-            <a:schemeClr val="accent1"/>
-          </a:fillRef>
-          <a:effectRef idx="2">
-            <a:schemeClr val="accent1"/>
-          </a:effectRef>
-          <a:fontRef idx="minor">
-            <a:schemeClr val="lt1"/>
-          </a:fontRef>
-        </p:style>
-        <p:txBody>
-          <a:bodyPr rtlCol="0" anchor="ctr"/>
-          <a:lstStyle/>
-          <a:p>
-            <a:pPr algn="ctr"/>
-          </a:p>
-        </p:txBody>
-      </p:sp>
-      <p:sp>
-        <p:nvSpPr>
-          <p:cNvPr id="3" name="TextBox 2"/>
-          <p:cNvSpPr txBox="1"/>
-          <p:nvPr/>
-        </p:nvSpPr>
-        <p:spPr>
-          <a:xfrm>
-            <a:off x="640080" y="384048"/>
-            <a:ext cx="9144000" cy="320040"/>
-          </a:xfrm>
-          <a:prstGeom prst="rect">
-            <a:avLst/>
-          </a:prstGeom>
-          <a:noFill/>
-        </p:spPr>
-        <p:txBody>
-          <a:bodyPr wrap="square">
-            <a:spAutoFit/>
-          </a:bodyPr>
-          <a:lstStyle/>
-          <a:p>
-            <a:pPr algn="l"/>
-            <a:r>
-              <a:rPr sz="1300" b="1">
-                <a:solidFill>
-                  <a:srgbClr val="0E7490"/>
-                </a:solidFill>
-                <a:latin typeface="Calibri"/>
-              </a:rPr>
-              <a:t>RESULTS · EXPERIMENT 2</a:t>
-            </a:r>
-          </a:p>
-        </p:txBody>
-      </p:sp>
-      <p:sp>
-        <p:nvSpPr>
-          <p:cNvPr id="4" name="TextBox 3"/>
-          <p:cNvSpPr txBox="1"/>
-          <p:nvPr/>
-        </p:nvSpPr>
-        <p:spPr>
-          <a:xfrm>
-            <a:off x="640080" y="658368"/>
-            <a:ext cx="10852800" cy="731520"/>
-          </a:xfrm>
-          <a:prstGeom prst="rect">
-            <a:avLst/>
-          </a:prstGeom>
-          <a:noFill/>
-        </p:spPr>
-        <p:txBody>
-          <a:bodyPr wrap="square">
-            <a:spAutoFit/>
-          </a:bodyPr>
-          <a:lstStyle/>
-          <a:p>
-            <a:pPr algn="l"/>
-            <a:r>
-              <a:rPr sz="2800" b="1">
-                <a:solidFill>
-                  <a:srgbClr val="1A202C"/>
-                </a:solidFill>
-                <a:latin typeface="Calibri"/>
-              </a:rPr>
-              <a:t>Cross-Manipulation Generalization</a:t>
-            </a:r>
-          </a:p>
-        </p:txBody>
-      </p:sp>
-      <p:sp>
-        <p:nvSpPr>
-          <p:cNvPr id="5" name="Rectangle 4"/>
-          <p:cNvSpPr/>
-          <p:nvPr/>
-        </p:nvSpPr>
-        <p:spPr>
-          <a:xfrm>
-            <a:off x="640080" y="1353312"/>
-            <a:ext cx="502920" cy="41148"/>
-          </a:xfrm>
-          <a:prstGeom prst="rect">
-            <a:avLst/>
-          </a:prstGeom>
-          <a:solidFill>
-            <a:srgbClr val="22B8CF"/>
-          </a:solidFill>
-          <a:ln>
-            <a:noFill/>
-          </a:ln>
-          <a:effectLst/>
-        </p:spPr>
-        <p:style>
-          <a:lnRef idx="1">
-            <a:schemeClr val="accent1"/>
-          </a:lnRef>
-          <a:fillRef idx="3">
-            <a:schemeClr val="accent1"/>
-          </a:fillRef>
-          <a:effectRef idx="2">
-            <a:schemeClr val="accent1"/>
-          </a:effectRef>
-          <a:fontRef idx="minor">
-            <a:schemeClr val="lt1"/>
-          </a:fontRef>
-        </p:style>
-        <p:txBody>
-          <a:bodyPr rtlCol="0" anchor="ctr"/>
-          <a:lstStyle/>
-          <a:p>
-            <a:pPr algn="ctr"/>
-          </a:p>
-        </p:txBody>
-      </p:sp>
-      <p:sp>
-        <p:nvSpPr>
-          <p:cNvPr id="6" name="TextBox 5"/>
-          <p:cNvSpPr txBox="1"/>
-          <p:nvPr/>
-        </p:nvSpPr>
-        <p:spPr>
-          <a:xfrm>
-            <a:off x="640080" y="1691640"/>
-            <a:ext cx="10852800" cy="400000"/>
-          </a:xfrm>
-          <a:prstGeom prst="rect">
-            <a:avLst/>
-          </a:prstGeom>
-          <a:noFill/>
-        </p:spPr>
-        <p:txBody>
-          <a:bodyPr wrap="square">
-            <a:spAutoFit/>
-          </a:bodyPr>
-          <a:lstStyle/>
-          <a:p>
-            <a:pPr algn="l"/>
-            <a:r>
-              <a:rPr sz="1300" b="0">
-                <a:solidFill>
-                  <a:srgbClr val="475569"/>
-                </a:solidFill>
-                <a:latin typeface="Calibri"/>
-              </a:rPr>
-              <a:t>Train on one manipulation method, test on all four (4×4 matrix per model). Diagonal = same-manip; off-diagonal = the actual generalization test.</a:t>
-            </a:r>
-          </a:p>
-        </p:txBody>
-      </p:sp>
-      <p:pic>
-        <p:nvPicPr>
-          <p:cNvPr id="7" name="Picture 6" descr="cross_manipulation_heatmaps.png"/>
-          <p:cNvPicPr>
-            <a:picLocks noChangeAspect="1"/>
-          </p:cNvPicPr>
-          <p:nvPr/>
-        </p:nvPicPr>
-        <p:blipFill>
-          <a:blip r:embed="rId2"/>
-          <a:stretch>
-            <a:fillRect/>
-          </a:stretch>
-        </p:blipFill>
-        <p:spPr>
-          <a:xfrm>
-            <a:off x="640080" y="2180000"/>
-            <a:ext cx="7440000" cy="3000000"/>
-          </a:xfrm>
-          <a:prstGeom prst="rect">
-            <a:avLst/>
-          </a:prstGeom>
-        </p:spPr>
-      </p:pic>
-      <p:sp>
-        <p:nvSpPr>
-          <p:cNvPr id="8" name="Rectangle 7"/>
-          <p:cNvSpPr/>
-          <p:nvPr/>
-        </p:nvSpPr>
-        <p:spPr>
-          <a:xfrm>
-            <a:off x="640080" y="5320000"/>
-            <a:ext cx="10852800" cy="1150000"/>
-          </a:xfrm>
-          <a:prstGeom prst="rect">
-            <a:avLst/>
-          </a:prstGeom>
-          <a:solidFill>
-            <a:srgbClr val="FEECEC"/>
-          </a:solidFill>
-          <a:ln>
-            <a:noFill/>
-          </a:ln>
-          <a:effectLst/>
-        </p:spPr>
-        <p:style>
-          <a:lnRef idx="1">
-            <a:schemeClr val="accent1"/>
-          </a:lnRef>
-          <a:fillRef idx="3">
-            <a:schemeClr val="accent1"/>
-          </a:fillRef>
-          <a:effectRef idx="2">
-            <a:schemeClr val="accent1"/>
-          </a:effectRef>
-          <a:fontRef idx="minor">
-            <a:schemeClr val="lt1"/>
-          </a:fontRef>
-        </p:style>
-        <p:txBody>
-          <a:bodyPr rtlCol="0" anchor="ctr"/>
-          <a:lstStyle/>
-          <a:p>
-            <a:pPr algn="ctr"/>
-          </a:p>
-        </p:txBody>
-      </p:sp>
-      <p:sp>
-        <p:nvSpPr>
-          <p:cNvPr id="9" name="Rectangle 8"/>
-          <p:cNvSpPr/>
-          <p:nvPr/>
-        </p:nvSpPr>
-        <p:spPr>
-          <a:xfrm>
-            <a:off x="640080" y="5320000"/>
-            <a:ext cx="60000" cy="1150000"/>
-          </a:xfrm>
-          <a:prstGeom prst="rect">
-            <a:avLst/>
-          </a:prstGeom>
-          <a:solidFill>
-            <a:srgbClr val="DC2626"/>
-          </a:solidFill>
-          <a:ln>
-            <a:noFill/>
-          </a:ln>
-          <a:effectLst/>
-        </p:spPr>
-        <p:style>
-          <a:lnRef idx="1">
-            <a:schemeClr val="accent1"/>
-          </a:lnRef>
-          <a:fillRef idx="3">
-            <a:schemeClr val="accent1"/>
-          </a:fillRef>
-          <a:effectRef idx="2">
-            <a:schemeClr val="accent1"/>
-          </a:effectRef>
-          <a:fontRef idx="minor">
-            <a:schemeClr val="lt1"/>
-          </a:fontRef>
-        </p:style>
-        <p:txBody>
-          <a:bodyPr rtlCol="0" anchor="ctr"/>
-          <a:lstStyle/>
-          <a:p>
-            <a:pPr algn="ctr"/>
-          </a:p>
-        </p:txBody>
-      </p:sp>
-      <p:sp>
-        <p:nvSpPr>
-          <p:cNvPr id="10" name="TextBox 9"/>
-          <p:cNvSpPr txBox="1"/>
-          <p:nvPr/>
-        </p:nvSpPr>
-        <p:spPr>
-          <a:xfrm>
-            <a:off x="868680" y="5440000"/>
-            <a:ext cx="10452800" cy="320040"/>
-          </a:xfrm>
-          <a:prstGeom prst="rect">
-            <a:avLst/>
-          </a:prstGeom>
-          <a:noFill/>
-        </p:spPr>
-        <p:txBody>
-          <a:bodyPr wrap="square">
-            <a:spAutoFit/>
-          </a:bodyPr>
-          <a:lstStyle/>
-          <a:p>
-            <a:pPr algn="l"/>
-            <a:r>
-              <a:rPr sz="1100" b="1">
-                <a:solidFill>
-                  <a:srgbClr val="DC2626"/>
-                </a:solidFill>
-                <a:latin typeface="Calibri"/>
-              </a:rPr>
-              <a:t>HEADLINE FINDING</a:t>
-            </a:r>
-          </a:p>
-        </p:txBody>
-      </p:sp>
-      <p:sp>
-        <p:nvSpPr>
-          <p:cNvPr id="11" name="TextBox 10"/>
-          <p:cNvSpPr txBox="1"/>
-          <p:nvPr/>
-        </p:nvSpPr>
-        <p:spPr>
-          <a:xfrm>
-            <a:off x="868680" y="5750000"/>
-            <a:ext cx="10452800" cy="600000"/>
-          </a:xfrm>
-          <a:prstGeom prst="rect">
-            <a:avLst/>
-          </a:prstGeom>
-          <a:noFill/>
-        </p:spPr>
-        <p:txBody>
-          <a:bodyPr wrap="square">
-            <a:spAutoFit/>
-          </a:bodyPr>
-          <a:lstStyle/>
-          <a:p>
-            <a:pPr algn="l"/>
-            <a:r>
-              <a:rPr sz="1300" b="0">
-                <a:solidFill>
-                  <a:srgbClr val="1A202C"/>
-                </a:solidFill>
-                <a:latin typeface="Calibri"/>
-              </a:rPr>
-              <a:t>Hypothesis (“attention generalizes better”) did NOT hold: XceptionNet has both higher same-distribution AND cross-manip AUC (generalization gap 0.398 vs. 0.421) than the hybrid. Worst cell for both, DF→FS: 0.256 / 0.198 AUC — worse than random.</a:t>
-            </a:r>
-          </a:p>
-        </p:txBody>
-      </p:sp>
-      <p:sp>
-        <p:nvSpPr>
-          <p:cNvPr id="12" name="TextBox 11"/>
-          <p:cNvSpPr txBox="1"/>
-          <p:nvPr/>
-        </p:nvSpPr>
-        <p:spPr>
-          <a:xfrm>
-            <a:off x="640080" y="6510528"/>
-            <a:ext cx="7315200" cy="274320"/>
-          </a:xfrm>
-          <a:prstGeom prst="rect">
-            <a:avLst/>
-          </a:prstGeom>
-          <a:noFill/>
-        </p:spPr>
-        <p:txBody>
-          <a:bodyPr wrap="square">
-            <a:spAutoFit/>
-          </a:bodyPr>
-          <a:lstStyle/>
-          <a:p>
-            <a:pPr algn="l"/>
-            <a:r>
-              <a:rPr sz="1000" b="0">
-                <a:solidFill>
-                  <a:srgbClr val="94A3B8"/>
-                </a:solidFill>
-                <a:latin typeface="Calibri"/>
-              </a:rPr>
-              <a:t>Deepfake Detection — XceptionNet vs. CNN-ViT (23AID205)</a:t>
-            </a:r>
-          </a:p>
-        </p:txBody>
-      </p:sp>
-      <p:sp>
-        <p:nvSpPr>
-          <p:cNvPr id="13" name="TextBox 12"/>
-          <p:cNvSpPr txBox="1"/>
-          <p:nvPr/>
-        </p:nvSpPr>
-        <p:spPr>
-          <a:xfrm>
-            <a:off x="10972800" y="6510528"/>
-            <a:ext cx="822960" cy="274320"/>
-          </a:xfrm>
-          <a:prstGeom prst="rect">
-            <a:avLst/>
-          </a:prstGeom>
-          <a:noFill/>
-        </p:spPr>
-        <p:txBody>
-          <a:bodyPr wrap="square">
-            <a:spAutoFit/>
-          </a:bodyPr>
-          <a:lstStyle/>
-          <a:p>
-            <a:pPr algn="r"/>
-            <a:r>
-              <a:rPr sz="1000" b="0">
-                <a:solidFill>
-                  <a:srgbClr val="94A3B8"/>
-                </a:solidFill>
-                <a:latin typeface="Calibri"/>
-              </a:rPr>
-              <a:t>7/11</a:t>
+              <a:t>7/9</a:t>
             </a:r>
           </a:p>
         </p:txBody>
@@ -8763,7 +7890,7 @@
                 </a:solidFill>
                 <a:latin typeface="Calibri"/>
               </a:rPr>
-              <a:t>RESULTS · EXPERIMENT 3</a:t>
+              <a:t>STATUS</a:t>
             </a:r>
           </a:p>
         </p:txBody>
@@ -8798,7 +7925,7 @@
                 </a:solidFill>
                 <a:latin typeface="Calibri"/>
               </a:rPr>
-              <a:t>Compression Robustness (Proxy-c40)</a:t>
+              <a:t>What's Done, What's Next</a:t>
             </a:r>
           </a:p>
         </p:txBody>
@@ -8849,423 +7976,20 @@
       </p:sp>
       <p:sp>
         <p:nvSpPr>
-          <p:cNvPr id="6" name="TextBox 5"/>
-          <p:cNvSpPr txBox="1"/>
-          <p:nvPr/>
-        </p:nvSpPr>
-        <p:spPr>
-          <a:xfrm>
-            <a:off x="640080" y="1691640"/>
-            <a:ext cx="10515600" cy="400000"/>
-          </a:xfrm>
-          <a:prstGeom prst="rect">
-            <a:avLst/>
-          </a:prstGeom>
-          <a:noFill/>
-        </p:spPr>
-        <p:txBody>
-          <a:bodyPr wrap="square">
-            <a:spAutoFit/>
-          </a:bodyPr>
-          <a:lstStyle/>
-          <a:p>
-            <a:pPr algn="l"/>
-            <a:r>
-              <a:rPr sz="1350" b="0">
-                <a:solidFill>
-                  <a:srgbClr val="475569"/>
-                </a:solidFill>
-                <a:latin typeface="Calibri"/>
-              </a:rPr>
-              <a:t>Official c0/c40 FaceForensics++ access was still pending, and no c40 mirror exists on Kaggle. Worked around it rather than skipping the experiment.</a:t>
-            </a:r>
-          </a:p>
-        </p:txBody>
-      </p:sp>
-      <p:graphicFrame>
-        <p:nvGraphicFramePr>
-          <p:cNvPr id="7" name="Table 6"/>
-          <p:cNvGraphicFramePr>
-            <a:graphicFrameLocks noGrp="1"/>
-          </p:cNvGraphicFramePr>
-          <p:nvPr/>
-        </p:nvGraphicFramePr>
-        <p:xfrm>
-          <a:off x="640080" y="2141640"/>
-          <a:ext cx="10400000" cy="1260000"/>
-        </p:xfrm>
-        <a:graphic>
-          <a:graphicData uri="http://schemas.openxmlformats.org/drawingml/2006/table">
-            <a:tbl>
-              <a:tblPr firstRow="1" bandRow="1">
-                <a:tableStyleId>{5C22544A-7EE6-4342-B048-85BDC9FD1C3A}</a:tableStyleId>
-              </a:tblPr>
-              <a:tblGrid>
-                <a:gridCol w="2600000"/>
-                <a:gridCol w="2600000"/>
-                <a:gridCol w="2600000"/>
-                <a:gridCol w="2600000"/>
-              </a:tblGrid>
-              <a:tr h="420000">
-                <a:tc>
-                  <a:txBody>
-                    <a:bodyPr/>
-                    <a:lstStyle/>
-                    <a:p>
-                      <a:r>
-                        <a:rPr sz="1300" b="1">
-                          <a:solidFill>
-                            <a:srgbClr val="FFFFFF"/>
-                          </a:solidFill>
-                          <a:latin typeface="Calibri"/>
-                        </a:rPr>
-                        <a:t>Model</a:t>
-                      </a:r>
-                    </a:p>
-                  </a:txBody>
-                  <a:tcPr anchor="ctr">
-                    <a:solidFill>
-                      <a:srgbClr val="0F172A"/>
-                    </a:solidFill>
-                  </a:tcPr>
-                </a:tc>
-                <a:tc>
-                  <a:txBody>
-                    <a:bodyPr/>
-                    <a:lstStyle/>
-                    <a:p>
-                      <a:r>
-                        <a:rPr sz="1300" b="1">
-                          <a:solidFill>
-                            <a:srgbClr val="FFFFFF"/>
-                          </a:solidFill>
-                          <a:latin typeface="Calibri"/>
-                        </a:rPr>
-                        <a:t>c23 AUC</a:t>
-                      </a:r>
-                    </a:p>
-                  </a:txBody>
-                  <a:tcPr anchor="ctr">
-                    <a:solidFill>
-                      <a:srgbClr val="0F172A"/>
-                    </a:solidFill>
-                  </a:tcPr>
-                </a:tc>
-                <a:tc>
-                  <a:txBody>
-                    <a:bodyPr/>
-                    <a:lstStyle/>
-                    <a:p>
-                      <a:r>
-                        <a:rPr sz="1300" b="1">
-                          <a:solidFill>
-                            <a:srgbClr val="FFFFFF"/>
-                          </a:solidFill>
-                          <a:latin typeface="Calibri"/>
-                        </a:rPr>
-                        <a:t>c40proxy AUC</a:t>
-                      </a:r>
-                    </a:p>
-                  </a:txBody>
-                  <a:tcPr anchor="ctr">
-                    <a:solidFill>
-                      <a:srgbClr val="0F172A"/>
-                    </a:solidFill>
-                  </a:tcPr>
-                </a:tc>
-                <a:tc>
-                  <a:txBody>
-                    <a:bodyPr/>
-                    <a:lstStyle/>
-                    <a:p>
-                      <a:r>
-                        <a:rPr sz="1300" b="1">
-                          <a:solidFill>
-                            <a:srgbClr val="FFFFFF"/>
-                          </a:solidFill>
-                          <a:latin typeface="Calibri"/>
-                        </a:rPr>
-                        <a:t>Drop</a:t>
-                      </a:r>
-                    </a:p>
-                  </a:txBody>
-                  <a:tcPr anchor="ctr">
-                    <a:solidFill>
-                      <a:srgbClr val="0F172A"/>
-                    </a:solidFill>
-                  </a:tcPr>
-                </a:tc>
-              </a:tr>
-              <a:tr h="420000">
-                <a:tc>
-                  <a:txBody>
-                    <a:bodyPr/>
-                    <a:lstStyle/>
-                    <a:p>
-                      <a:r>
-                        <a:rPr sz="1250" b="1">
-                          <a:solidFill>
-                            <a:srgbClr val="1A202C"/>
-                          </a:solidFill>
-                          <a:latin typeface="Calibri"/>
-                        </a:rPr>
-                        <a:t>XceptionNet</a:t>
-                      </a:r>
-                    </a:p>
-                  </a:txBody>
-                  <a:tcPr anchor="ctr">
-                    <a:solidFill>
-                      <a:srgbClr val="FFFFFF"/>
-                    </a:solidFill>
-                  </a:tcPr>
-                </a:tc>
-                <a:tc>
-                  <a:txBody>
-                    <a:bodyPr/>
-                    <a:lstStyle/>
-                    <a:p>
-                      <a:r>
-                        <a:rPr sz="1250" b="0">
-                          <a:solidFill>
-                            <a:srgbClr val="1A202C"/>
-                          </a:solidFill>
-                          <a:latin typeface="Calibri"/>
-                        </a:rPr>
-                        <a:t>0.9958</a:t>
-                      </a:r>
-                    </a:p>
-                  </a:txBody>
-                  <a:tcPr anchor="ctr">
-                    <a:solidFill>
-                      <a:srgbClr val="FFFFFF"/>
-                    </a:solidFill>
-                  </a:tcPr>
-                </a:tc>
-                <a:tc>
-                  <a:txBody>
-                    <a:bodyPr/>
-                    <a:lstStyle/>
-                    <a:p>
-                      <a:r>
-                        <a:rPr sz="1250" b="0">
-                          <a:solidFill>
-                            <a:srgbClr val="1A202C"/>
-                          </a:solidFill>
-                          <a:latin typeface="Calibri"/>
-                        </a:rPr>
-                        <a:t>0.8018</a:t>
-                      </a:r>
-                    </a:p>
-                  </a:txBody>
-                  <a:tcPr anchor="ctr">
-                    <a:solidFill>
-                      <a:srgbClr val="FFFFFF"/>
-                    </a:solidFill>
-                  </a:tcPr>
-                </a:tc>
-                <a:tc>
-                  <a:txBody>
-                    <a:bodyPr/>
-                    <a:lstStyle/>
-                    <a:p>
-                      <a:r>
-                        <a:rPr sz="1250" b="0">
-                          <a:solidFill>
-                            <a:srgbClr val="1A202C"/>
-                          </a:solidFill>
-                          <a:latin typeface="Calibri"/>
-                        </a:rPr>
-                        <a:t>-0.194</a:t>
-                      </a:r>
-                    </a:p>
-                  </a:txBody>
-                  <a:tcPr anchor="ctr">
-                    <a:solidFill>
-                      <a:srgbClr val="FFFFFF"/>
-                    </a:solidFill>
-                  </a:tcPr>
-                </a:tc>
-              </a:tr>
-              <a:tr h="420000">
-                <a:tc>
-                  <a:txBody>
-                    <a:bodyPr/>
-                    <a:lstStyle/>
-                    <a:p>
-                      <a:r>
-                        <a:rPr sz="1250" b="1">
-                          <a:solidFill>
-                            <a:srgbClr val="1A202C"/>
-                          </a:solidFill>
-                          <a:latin typeface="Calibri"/>
-                        </a:rPr>
-                        <a:t>CNN-ViT Hybrid</a:t>
-                      </a:r>
-                    </a:p>
-                  </a:txBody>
-                  <a:tcPr anchor="ctr">
-                    <a:solidFill>
-                      <a:srgbClr val="F1F5F9"/>
-                    </a:solidFill>
-                  </a:tcPr>
-                </a:tc>
-                <a:tc>
-                  <a:txBody>
-                    <a:bodyPr/>
-                    <a:lstStyle/>
-                    <a:p>
-                      <a:r>
-                        <a:rPr sz="1250" b="0">
-                          <a:solidFill>
-                            <a:srgbClr val="1A202C"/>
-                          </a:solidFill>
-                          <a:latin typeface="Calibri"/>
-                        </a:rPr>
-                        <a:t>0.9836</a:t>
-                      </a:r>
-                    </a:p>
-                  </a:txBody>
-                  <a:tcPr anchor="ctr">
-                    <a:solidFill>
-                      <a:srgbClr val="F1F5F9"/>
-                    </a:solidFill>
-                  </a:tcPr>
-                </a:tc>
-                <a:tc>
-                  <a:txBody>
-                    <a:bodyPr/>
-                    <a:lstStyle/>
-                    <a:p>
-                      <a:r>
-                        <a:rPr sz="1250" b="0">
-                          <a:solidFill>
-                            <a:srgbClr val="1A202C"/>
-                          </a:solidFill>
-                          <a:latin typeface="Calibri"/>
-                        </a:rPr>
-                        <a:t>0.8172</a:t>
-                      </a:r>
-                    </a:p>
-                  </a:txBody>
-                  <a:tcPr anchor="ctr">
-                    <a:solidFill>
-                      <a:srgbClr val="F1F5F9"/>
-                    </a:solidFill>
-                  </a:tcPr>
-                </a:tc>
-                <a:tc>
-                  <a:txBody>
-                    <a:bodyPr/>
-                    <a:lstStyle/>
-                    <a:p>
-                      <a:r>
-                        <a:rPr sz="1250" b="0">
-                          <a:solidFill>
-                            <a:srgbClr val="1A202C"/>
-                          </a:solidFill>
-                          <a:latin typeface="Calibri"/>
-                        </a:rPr>
-                        <a:t>-0.166</a:t>
-                      </a:r>
-                    </a:p>
-                  </a:txBody>
-                  <a:tcPr anchor="ctr">
-                    <a:solidFill>
-                      <a:srgbClr val="F1F5F9"/>
-                    </a:solidFill>
-                  </a:tcPr>
-                </a:tc>
-              </a:tr>
-            </a:tbl>
-          </a:graphicData>
-        </a:graphic>
-      </p:graphicFrame>
-      <p:sp>
-        <p:nvSpPr>
-          <p:cNvPr id="8" name="TextBox 7"/>
-          <p:cNvSpPr txBox="1"/>
-          <p:nvPr/>
-        </p:nvSpPr>
-        <p:spPr>
-          <a:xfrm>
-            <a:off x="640080" y="6510528"/>
-            <a:ext cx="7315200" cy="274320"/>
-          </a:xfrm>
-          <a:prstGeom prst="rect">
-            <a:avLst/>
-          </a:prstGeom>
-          <a:noFill/>
-        </p:spPr>
-        <p:txBody>
-          <a:bodyPr wrap="square">
-            <a:spAutoFit/>
-          </a:bodyPr>
-          <a:lstStyle/>
-          <a:p>
-            <a:pPr algn="l"/>
-            <a:r>
-              <a:rPr sz="1000" b="0">
-                <a:solidFill>
-                  <a:srgbClr val="94A3B8"/>
-                </a:solidFill>
-                <a:latin typeface="Calibri"/>
-              </a:rPr>
-              <a:t>Deepfake Detection — XceptionNet vs. CNN-ViT (23AID205)</a:t>
-            </a:r>
-          </a:p>
-        </p:txBody>
-      </p:sp>
-      <p:sp>
-        <p:nvSpPr>
-          <p:cNvPr id="9" name="TextBox 8"/>
-          <p:cNvSpPr txBox="1"/>
-          <p:nvPr/>
-        </p:nvSpPr>
-        <p:spPr>
-          <a:xfrm>
-            <a:off x="10972800" y="6510528"/>
-            <a:ext cx="822960" cy="274320"/>
-          </a:xfrm>
-          <a:prstGeom prst="rect">
-            <a:avLst/>
-          </a:prstGeom>
-          <a:noFill/>
-        </p:spPr>
-        <p:txBody>
-          <a:bodyPr wrap="square">
-            <a:spAutoFit/>
-          </a:bodyPr>
-          <a:lstStyle/>
-          <a:p>
-            <a:pPr algn="r"/>
-            <a:r>
-              <a:rPr sz="1000" b="0">
-                <a:solidFill>
-                  <a:srgbClr val="94A3B8"/>
-                </a:solidFill>
-                <a:latin typeface="Calibri"/>
-              </a:rPr>
-              <a:t>8/11</a:t>
-            </a:r>
-          </a:p>
-        </p:txBody>
-      </p:sp>
-      <p:sp>
-        <p:nvSpPr>
-          <p:cNvPr id="10" name="Rectangle 9"/>
+          <p:cNvPr id="6" name="Rectangle 5"/>
           <p:cNvSpPr/>
           <p:nvPr/>
         </p:nvSpPr>
         <p:spPr>
           <a:xfrm>
-            <a:off x="640080" y="4200000"/>
-            <a:ext cx="10852800" cy="1500000"/>
+            <a:off x="640080" y="1783080"/>
+            <a:ext cx="5195000" cy="4114800"/>
           </a:xfrm>
           <a:prstGeom prst="rect">
             <a:avLst/>
           </a:prstGeom>
           <a:solidFill>
-            <a:srgbClr val="FEF3E7"/>
+            <a:srgbClr val="F1F5F9"/>
           </a:solidFill>
           <a:ln>
             <a:noFill/>
@@ -9296,14 +8020,255 @@
       </p:sp>
       <p:sp>
         <p:nvSpPr>
+          <p:cNvPr id="7" name="Rectangle 6"/>
+          <p:cNvSpPr/>
+          <p:nvPr/>
+        </p:nvSpPr>
+        <p:spPr>
+          <a:xfrm>
+            <a:off x="640080" y="1783080"/>
+            <a:ext cx="5195000" cy="502920"/>
+          </a:xfrm>
+          <a:prstGeom prst="rect">
+            <a:avLst/>
+          </a:prstGeom>
+          <a:solidFill>
+            <a:srgbClr val="16A34A"/>
+          </a:solidFill>
+          <a:ln>
+            <a:noFill/>
+          </a:ln>
+          <a:effectLst/>
+        </p:spPr>
+        <p:style>
+          <a:lnRef idx="1">
+            <a:schemeClr val="accent1"/>
+          </a:lnRef>
+          <a:fillRef idx="3">
+            <a:schemeClr val="accent1"/>
+          </a:fillRef>
+          <a:effectRef idx="2">
+            <a:schemeClr val="accent1"/>
+          </a:effectRef>
+          <a:fontRef idx="minor">
+            <a:schemeClr val="lt1"/>
+          </a:fontRef>
+        </p:style>
+        <p:txBody>
+          <a:bodyPr rtlCol="0" anchor="ctr"/>
+          <a:lstStyle/>
+          <a:p>
+            <a:pPr algn="ctr"/>
+          </a:p>
+        </p:txBody>
+      </p:sp>
+      <p:sp>
+        <p:nvSpPr>
+          <p:cNvPr id="8" name="TextBox 7"/>
+          <p:cNvSpPr txBox="1"/>
+          <p:nvPr/>
+        </p:nvSpPr>
+        <p:spPr>
+          <a:xfrm>
+            <a:off x="914400" y="1901952"/>
+            <a:ext cx="4646360" cy="320040"/>
+          </a:xfrm>
+          <a:prstGeom prst="rect">
+            <a:avLst/>
+          </a:prstGeom>
+          <a:noFill/>
+        </p:spPr>
+        <p:txBody>
+          <a:bodyPr wrap="square">
+            <a:spAutoFit/>
+          </a:bodyPr>
+          <a:lstStyle/>
+          <a:p>
+            <a:pPr algn="l"/>
+            <a:r>
+              <a:rPr sz="1400" b="1">
+                <a:solidFill>
+                  <a:srgbClr val="FFFFFF"/>
+                </a:solidFill>
+                <a:latin typeface="Calibri"/>
+              </a:rPr>
+              <a:t>DONE</a:t>
+            </a:r>
+          </a:p>
+        </p:txBody>
+      </p:sp>
+      <p:sp>
+        <p:nvSpPr>
+          <p:cNvPr id="9" name="TextBox 8"/>
+          <p:cNvSpPr txBox="1"/>
+          <p:nvPr/>
+        </p:nvSpPr>
+        <p:spPr>
+          <a:xfrm>
+            <a:off x="914400" y="2514600"/>
+            <a:ext cx="4646360" cy="3314800"/>
+          </a:xfrm>
+          <a:prstGeom prst="rect">
+            <a:avLst/>
+          </a:prstGeom>
+          <a:noFill/>
+        </p:spPr>
+        <p:txBody>
+          <a:bodyPr wrap="square">
+            <a:spAutoFit/>
+          </a:bodyPr>
+          <a:lstStyle/>
+          <a:p>
+            <a:pPr>
+              <a:lnSpc>
+                <a:spcPct val="112000"/>
+              </a:lnSpc>
+              <a:spcAft>
+                <a:spcPts val="800"/>
+              </a:spcAft>
+            </a:pPr>
+            <a:r>
+              <a:rPr sz="1250" b="1">
+                <a:solidFill>
+                  <a:srgbClr val="16A34A"/>
+                </a:solidFill>
+                <a:latin typeface="Calibri"/>
+              </a:rPr>
+              <a:t>▸  Full pipeline built: preprocessing, training, evaluation, analysis scripts</a:t>
+            </a:r>
+          </a:p>
+          <a:p>
+            <a:pPr>
+              <a:lnSpc>
+                <a:spcPct val="112000"/>
+              </a:lnSpc>
+              <a:spcAft>
+                <a:spcPts val="800"/>
+              </a:spcAft>
+            </a:pPr>
+            <a:r>
+              <a:rPr sz="1250" b="1">
+                <a:solidFill>
+                  <a:srgbClr val="16A34A"/>
+                </a:solidFill>
+                <a:latin typeface="Calibri"/>
+              </a:rPr>
+              <a:t>▸  Dataset acquired, quality-checked (IQR outlier analysis), and fully preprocessed — 99,987 face crops</a:t>
+            </a:r>
+          </a:p>
+          <a:p>
+            <a:pPr>
+              <a:lnSpc>
+                <a:spcPct val="112000"/>
+              </a:lnSpc>
+              <a:spcAft>
+                <a:spcPts val="800"/>
+              </a:spcAft>
+            </a:pPr>
+            <a:r>
+              <a:rPr sz="1250" b="1">
+                <a:solidFill>
+                  <a:srgbClr val="16A34A"/>
+                </a:solidFill>
+                <a:latin typeface="Calibri"/>
+              </a:rPr>
+              <a:t>▸  Both model architectures implemented and verified end-to-end</a:t>
+            </a:r>
+          </a:p>
+          <a:p>
+            <a:pPr>
+              <a:lnSpc>
+                <a:spcPct val="112000"/>
+              </a:lnSpc>
+              <a:spcAft>
+                <a:spcPts val="800"/>
+              </a:spcAft>
+            </a:pPr>
+            <a:r>
+              <a:rPr sz="1250" b="1">
+                <a:solidFill>
+                  <a:srgbClr val="16A34A"/>
+                </a:solidFill>
+                <a:latin typeface="Calibri"/>
+              </a:rPr>
+              <a:t>▸  GPU capacity benchmarked — found &amp; fixed a silent throughput cliff above batch size 32</a:t>
+            </a:r>
+          </a:p>
+          <a:p>
+            <a:pPr>
+              <a:lnSpc>
+                <a:spcPct val="112000"/>
+              </a:lnSpc>
+              <a:spcAft>
+                <a:spcPts val="800"/>
+              </a:spcAft>
+            </a:pPr>
+            <a:r>
+              <a:rPr sz="1250" b="1">
+                <a:solidFill>
+                  <a:srgbClr val="16A34A"/>
+                </a:solidFill>
+                <a:latin typeface="Calibri"/>
+              </a:rPr>
+              <a:t>▸  Experiment 1 (baseline comparison): both models trained, evaluated, and analyzed</a:t>
+            </a:r>
+          </a:p>
+        </p:txBody>
+      </p:sp>
+      <p:sp>
+        <p:nvSpPr>
+          <p:cNvPr id="10" name="Rectangle 9"/>
+          <p:cNvSpPr/>
+          <p:nvPr/>
+        </p:nvSpPr>
+        <p:spPr>
+          <a:xfrm>
+            <a:off x="6063680" y="1783080"/>
+            <a:ext cx="5195000" cy="4114800"/>
+          </a:xfrm>
+          <a:prstGeom prst="rect">
+            <a:avLst/>
+          </a:prstGeom>
+          <a:solidFill>
+            <a:srgbClr val="F1F5F9"/>
+          </a:solidFill>
+          <a:ln>
+            <a:noFill/>
+          </a:ln>
+          <a:effectLst/>
+        </p:spPr>
+        <p:style>
+          <a:lnRef idx="1">
+            <a:schemeClr val="accent1"/>
+          </a:lnRef>
+          <a:fillRef idx="3">
+            <a:schemeClr val="accent1"/>
+          </a:fillRef>
+          <a:effectRef idx="2">
+            <a:schemeClr val="accent1"/>
+          </a:effectRef>
+          <a:fontRef idx="minor">
+            <a:schemeClr val="lt1"/>
+          </a:fontRef>
+        </p:style>
+        <p:txBody>
+          <a:bodyPr rtlCol="0" anchor="ctr"/>
+          <a:lstStyle/>
+          <a:p>
+            <a:pPr algn="ctr"/>
+          </a:p>
+        </p:txBody>
+      </p:sp>
+      <p:sp>
+        <p:nvSpPr>
           <p:cNvPr id="11" name="Rectangle 10"/>
           <p:cNvSpPr/>
           <p:nvPr/>
         </p:nvSpPr>
         <p:spPr>
           <a:xfrm>
-            <a:off x="640080" y="4200000"/>
-            <a:ext cx="60000" cy="1500000"/>
+            <a:off x="6063680" y="1783080"/>
+            <a:ext cx="5195000" cy="502920"/>
           </a:xfrm>
           <a:prstGeom prst="rect">
             <a:avLst/>
@@ -9346,8 +8311,8 @@
         </p:nvSpPr>
         <p:spPr>
           <a:xfrm>
-            <a:off x="868680" y="4320000"/>
-            <a:ext cx="10452800" cy="320040"/>
+            <a:off x="6338000" y="1901952"/>
+            <a:ext cx="4646360" cy="320040"/>
           </a:xfrm>
           <a:prstGeom prst="rect">
             <a:avLst/>
@@ -9362,13 +8327,13 @@
           <a:p>
             <a:pPr algn="l"/>
             <a:r>
-              <a:rPr sz="1100" b="1">
-                <a:solidFill>
-                  <a:srgbClr val="F59E0B"/>
-                </a:solidFill>
-                <a:latin typeface="Calibri"/>
-              </a:rPr>
-              <a:t>METHOD (CAVEATED)</a:t>
+              <a:rPr sz="1400" b="1">
+                <a:solidFill>
+                  <a:srgbClr val="FFFFFF"/>
+                </a:solidFill>
+                <a:latin typeface="Calibri"/>
+              </a:rPr>
+              <a:t>PLANNED FOR FINAL REVIEW</a:t>
             </a:r>
           </a:p>
         </p:txBody>
@@ -9381,8 +8346,8 @@
         </p:nvSpPr>
         <p:spPr>
           <a:xfrm>
-            <a:off x="868680" y="4630000"/>
-            <a:ext cx="10452800" cy="950000"/>
+            <a:off x="6338000" y="2514600"/>
+            <a:ext cx="4646360" cy="3314800"/>
           </a:xfrm>
           <a:prstGeom prst="rect">
             <a:avLst/>
@@ -9395,15 +8360,149 @@
           </a:bodyPr>
           <a:lstStyle/>
           <a:p>
+            <a:pPr>
+              <a:lnSpc>
+                <a:spcPct val="112000"/>
+              </a:lnSpc>
+              <a:spcAft>
+                <a:spcPts val="800"/>
+              </a:spcAft>
+            </a:pPr>
+            <a:r>
+              <a:rPr sz="1250" b="1">
+                <a:solidFill>
+                  <a:srgbClr val="F59E0B"/>
+                </a:solidFill>
+                <a:latin typeface="Calibri"/>
+              </a:rPr>
+              <a:t>▸  Experiment 2: cross-manipulation generalization — full 4×4 matrix, both models</a:t>
+            </a:r>
+          </a:p>
+          <a:p>
+            <a:pPr>
+              <a:lnSpc>
+                <a:spcPct val="112000"/>
+              </a:lnSpc>
+              <a:spcAft>
+                <a:spcPts val="800"/>
+              </a:spcAft>
+            </a:pPr>
+            <a:r>
+              <a:rPr sz="1250" b="1">
+                <a:solidFill>
+                  <a:srgbClr val="F59E0B"/>
+                </a:solidFill>
+                <a:latin typeface="Calibri"/>
+              </a:rPr>
+              <a:t>▸  Experiment 3: compression robustness under heavier video compression</a:t>
+            </a:r>
+          </a:p>
+          <a:p>
+            <a:pPr>
+              <a:lnSpc>
+                <a:spcPct val="112000"/>
+              </a:lnSpc>
+              <a:spcAft>
+                <a:spcPts val="800"/>
+              </a:spcAft>
+            </a:pPr>
+            <a:r>
+              <a:rPr sz="1250" b="1">
+                <a:solidFill>
+                  <a:srgbClr val="F59E0B"/>
+                </a:solidFill>
+                <a:latin typeface="Calibri"/>
+              </a:rPr>
+              <a:t>▸  Interpretability analysis (Grad-CAM) explaining *why* generalization succeeds or fails</a:t>
+            </a:r>
+          </a:p>
+          <a:p>
+            <a:pPr>
+              <a:lnSpc>
+                <a:spcPct val="112000"/>
+              </a:lnSpc>
+              <a:spcAft>
+                <a:spcPts val="800"/>
+              </a:spcAft>
+            </a:pPr>
+            <a:r>
+              <a:rPr sz="1250" b="1">
+                <a:solidFill>
+                  <a:srgbClr val="F59E0B"/>
+                </a:solidFill>
+                <a:latin typeface="Calibri"/>
+              </a:rPr>
+              <a:t>▸  Live demo (upload a video, get a real/fake prediction) and final conclusions</a:t>
+            </a:r>
+          </a:p>
+        </p:txBody>
+      </p:sp>
+      <p:sp>
+        <p:nvSpPr>
+          <p:cNvPr id="14" name="TextBox 13"/>
+          <p:cNvSpPr txBox="1"/>
+          <p:nvPr/>
+        </p:nvSpPr>
+        <p:spPr>
+          <a:xfrm>
+            <a:off x="640080" y="6510528"/>
+            <a:ext cx="7315200" cy="274320"/>
+          </a:xfrm>
+          <a:prstGeom prst="rect">
+            <a:avLst/>
+          </a:prstGeom>
+          <a:noFill/>
+        </p:spPr>
+        <p:txBody>
+          <a:bodyPr wrap="square">
+            <a:spAutoFit/>
+          </a:bodyPr>
+          <a:lstStyle/>
+          <a:p>
             <a:pPr algn="l"/>
             <a:r>
-              <a:rPr sz="1300" b="0">
-                <a:solidFill>
-                  <a:srgbClr val="1A202C"/>
-                </a:solidFill>
-                <a:latin typeface="Calibri"/>
-              </a:rPr>
-              <a:t>“c40proxy” = the held-out test videos re-transcoded locally, c23→crf40 (ffmpeg). This double-compresses rather than compressing once from raw like official c40, so degradation is harsher/different from the real thing — a documented approximation, used for evaluation only, never for training. Will re-run against official c0/c40 if FaceForensics++ approval arrives.</a:t>
+              <a:rPr sz="1000" b="0">
+                <a:solidFill>
+                  <a:srgbClr val="94A3B8"/>
+                </a:solidFill>
+                <a:latin typeface="Calibri"/>
+              </a:rPr>
+              <a:t>Deepfake Detection — XceptionNet vs. CNN-ViT (23AID205)</a:t>
+            </a:r>
+          </a:p>
+        </p:txBody>
+      </p:sp>
+      <p:sp>
+        <p:nvSpPr>
+          <p:cNvPr id="15" name="TextBox 14"/>
+          <p:cNvSpPr txBox="1"/>
+          <p:nvPr/>
+        </p:nvSpPr>
+        <p:spPr>
+          <a:xfrm>
+            <a:off x="10972800" y="6510528"/>
+            <a:ext cx="822960" cy="274320"/>
+          </a:xfrm>
+          <a:prstGeom prst="rect">
+            <a:avLst/>
+          </a:prstGeom>
+          <a:noFill/>
+        </p:spPr>
+        <p:txBody>
+          <a:bodyPr wrap="square">
+            <a:spAutoFit/>
+          </a:bodyPr>
+          <a:lstStyle/>
+          <a:p>
+            <a:pPr algn="r"/>
+            <a:r>
+              <a:rPr sz="1000" b="0">
+                <a:solidFill>
+                  <a:srgbClr val="94A3B8"/>
+                </a:solidFill>
+                <a:latin typeface="Calibri"/>
+              </a:rPr>
+              <a:t>8/9</a:t>
             </a:r>
           </a:p>
         </p:txBody>
@@ -9500,7 +8599,7 @@
                 </a:solidFill>
                 <a:latin typeface="Calibri"/>
               </a:rPr>
-              <a:t>INTERPRETABILITY</a:t>
+              <a:t>REFERENCES &amp; CONTRIBUTORS</a:t>
             </a:r>
           </a:p>
         </p:txBody>
@@ -9535,7 +8634,7 @@
                 </a:solidFill>
                 <a:latin typeface="Calibri"/>
               </a:rPr>
-              <a:t>Grad-CAM: Why Generalization Fails</a:t>
+              <a:t>Closing</a:t>
             </a:r>
           </a:p>
         </p:txBody>
@@ -9592,8 +8691,8 @@
         </p:nvSpPr>
         <p:spPr>
           <a:xfrm>
-            <a:off x="640080" y="1691640"/>
-            <a:ext cx="10515600" cy="457200"/>
+            <a:off x="640080" y="1783080"/>
+            <a:ext cx="10852800" cy="1600000"/>
           </a:xfrm>
           <a:prstGeom prst="rect">
             <a:avLst/>
@@ -9606,59 +8705,99 @@
           </a:bodyPr>
           <a:lstStyle/>
           <a:p>
-            <a:pPr algn="l"/>
-            <a:r>
-              <a:rPr sz="1350" b="0">
-                <a:solidFill>
-                  <a:srgbClr val="475569"/>
-                </a:solidFill>
-                <a:latin typeface="Calibri"/>
-              </a:rPr>
-              <a:t>Same video, same Deepfakes-only checkpoint. Same-manip: attention locks onto the central face (blending artifacts). Cross-manip to FaceSwap (worst cell): attention collapses off-face — neither model falls back to anything sensible.</a:t>
-            </a:r>
-          </a:p>
-        </p:txBody>
-      </p:sp>
-      <p:pic>
-        <p:nvPicPr>
-          <p:cNvPr id="7" name="Picture 6" descr="gradcam_comparison.png"/>
-          <p:cNvPicPr>
-            <a:picLocks noChangeAspect="1"/>
-          </p:cNvPicPr>
-          <p:nvPr/>
-        </p:nvPicPr>
-        <p:blipFill>
-          <a:blip r:embed="rId2"/>
-          <a:stretch>
-            <a:fillRect/>
-          </a:stretch>
-        </p:blipFill>
-        <p:spPr>
-          <a:xfrm>
-            <a:off x="640080" y="2286000"/>
-            <a:ext cx="5868000" cy="4200000"/>
-          </a:xfrm>
-          <a:prstGeom prst="rect">
-            <a:avLst/>
-          </a:prstGeom>
-        </p:spPr>
-      </p:pic>
-      <p:sp>
-        <p:nvSpPr>
-          <p:cNvPr id="8" name="Rectangle 7"/>
+            <a:pPr>
+              <a:lnSpc>
+                <a:spcPct val="112000"/>
+              </a:lnSpc>
+              <a:spcAft>
+                <a:spcPts val="1000"/>
+              </a:spcAft>
+            </a:pPr>
+            <a:r>
+              <a:rPr sz="1250" b="0">
+                <a:solidFill>
+                  <a:srgbClr val="1A202C"/>
+                </a:solidFill>
+                <a:latin typeface="Calibri"/>
+              </a:rPr>
+              <a:t>▸  Rössler, A. et al. (2019). FaceForensics++: Learning to Detect Manipulated Facial Images. ICCV.</a:t>
+            </a:r>
+          </a:p>
+          <a:p>
+            <a:pPr>
+              <a:lnSpc>
+                <a:spcPct val="112000"/>
+              </a:lnSpc>
+              <a:spcAft>
+                <a:spcPts val="1000"/>
+              </a:spcAft>
+            </a:pPr>
+            <a:r>
+              <a:rPr sz="1250" b="0">
+                <a:solidFill>
+                  <a:srgbClr val="1A202C"/>
+                </a:solidFill>
+                <a:latin typeface="Calibri"/>
+              </a:rPr>
+              <a:t>▸  Chollet, F. (2017). Xception: Deep Learning with Depthwise Separable Convolutions. CVPR.</a:t>
+            </a:r>
+          </a:p>
+          <a:p>
+            <a:pPr>
+              <a:lnSpc>
+                <a:spcPct val="112000"/>
+              </a:lnSpc>
+              <a:spcAft>
+                <a:spcPts val="1000"/>
+              </a:spcAft>
+            </a:pPr>
+            <a:r>
+              <a:rPr sz="1250" b="0">
+                <a:solidFill>
+                  <a:srgbClr val="1A202C"/>
+                </a:solidFill>
+                <a:latin typeface="Calibri"/>
+              </a:rPr>
+              <a:t>▸  Dosovitskiy, A. et al. (2021). An Image is Worth 16x16 Words: Transformers for Image Recognition at Scale. ICLR.</a:t>
+            </a:r>
+          </a:p>
+          <a:p>
+            <a:pPr>
+              <a:lnSpc>
+                <a:spcPct val="112000"/>
+              </a:lnSpc>
+              <a:spcAft>
+                <a:spcPts val="1000"/>
+              </a:spcAft>
+            </a:pPr>
+            <a:r>
+              <a:rPr sz="1250" b="0">
+                <a:solidFill>
+                  <a:srgbClr val="1A202C"/>
+                </a:solidFill>
+                <a:latin typeface="Calibri"/>
+              </a:rPr>
+              <a:t>▸  Selvaraju, R. R. et al. (2017). Grad-CAM: Visual Explanations from Deep Networks via Gradient-based Localization. ICCV.</a:t>
+            </a:r>
+          </a:p>
+        </p:txBody>
+      </p:sp>
+      <p:sp>
+        <p:nvSpPr>
+          <p:cNvPr id="7" name="Rectangle 6"/>
           <p:cNvSpPr/>
           <p:nvPr/>
         </p:nvSpPr>
         <p:spPr>
           <a:xfrm>
-            <a:off x="6782400" y="2286000"/>
-            <a:ext cx="4769215" cy="4114800"/>
+            <a:off x="640080" y="3800000"/>
+            <a:ext cx="10852800" cy="18288"/>
           </a:xfrm>
           <a:prstGeom prst="rect">
             <a:avLst/>
           </a:prstGeom>
           <a:solidFill>
-            <a:srgbClr val="F1F5F9"/>
+            <a:srgbClr val="E2E8F0"/>
           </a:solidFill>
           <a:ln>
             <a:noFill/>
@@ -9689,14 +8828,14 @@
       </p:sp>
       <p:sp>
         <p:nvSpPr>
-          <p:cNvPr id="9" name="TextBox 8"/>
+          <p:cNvPr id="8" name="TextBox 7"/>
           <p:cNvSpPr txBox="1"/>
           <p:nvPr/>
         </p:nvSpPr>
         <p:spPr>
           <a:xfrm>
-            <a:off x="7011000" y="2466000"/>
-            <a:ext cx="4312015" cy="320040"/>
+            <a:off x="640080" y="4000000"/>
+            <a:ext cx="10852800" cy="320040"/>
           </a:xfrm>
           <a:prstGeom prst="rect">
             <a:avLst/>
@@ -9717,21 +8856,21 @@
                 </a:solidFill>
                 <a:latin typeface="Calibri"/>
               </a:rPr>
-              <a:t>DF → FS (worst cell)</a:t>
-            </a:r>
-          </a:p>
-        </p:txBody>
-      </p:sp>
-      <p:sp>
-        <p:nvSpPr>
-          <p:cNvPr id="10" name="TextBox 9"/>
+              <a:t>CONTRIBUTORS</a:t>
+            </a:r>
+          </a:p>
+        </p:txBody>
+      </p:sp>
+      <p:sp>
+        <p:nvSpPr>
+          <p:cNvPr id="9" name="TextBox 8"/>
           <p:cNvSpPr txBox="1"/>
           <p:nvPr/>
         </p:nvSpPr>
         <p:spPr>
           <a:xfrm>
-            <a:off x="7011000" y="2786000"/>
-            <a:ext cx="4312015" cy="365760"/>
+            <a:off x="640080" y="4340000"/>
+            <a:ext cx="10852800" cy="1080000"/>
           </a:xfrm>
           <a:prstGeom prst="rect">
             <a:avLst/>
@@ -9744,29 +8883,93 @@
           </a:bodyPr>
           <a:lstStyle/>
           <a:p>
-            <a:pPr algn="l"/>
-            <a:r>
-              <a:rPr sz="2200" b="1">
-                <a:solidFill>
-                  <a:srgbClr val="0F172A"/>
-                </a:solidFill>
-                <a:latin typeface="Calibri"/>
-              </a:rPr>
-              <a:t>0.256 / 0.198</a:t>
-            </a:r>
-          </a:p>
-        </p:txBody>
-      </p:sp>
-      <p:sp>
-        <p:nvSpPr>
-          <p:cNvPr id="11" name="TextBox 10"/>
+            <a:pPr>
+              <a:lnSpc>
+                <a:spcPct val="112000"/>
+              </a:lnSpc>
+              <a:spcAft>
+                <a:spcPts val="600"/>
+              </a:spcAft>
+            </a:pPr>
+            <a:r>
+              <a:rPr sz="1200" b="1">
+                <a:solidFill>
+                  <a:srgbClr val="1A202C"/>
+                </a:solidFill>
+                <a:latin typeface="Calibri"/>
+              </a:rPr>
+              <a:t>▸  Venugopalan Gangadharan — CB.AI.U4AID25115</a:t>
+            </a:r>
+          </a:p>
+          <a:p>
+            <a:pPr>
+              <a:lnSpc>
+                <a:spcPct val="112000"/>
+              </a:lnSpc>
+              <a:spcAft>
+                <a:spcPts val="600"/>
+              </a:spcAft>
+            </a:pPr>
+            <a:r>
+              <a:rPr sz="1200" b="1">
+                <a:solidFill>
+                  <a:srgbClr val="1A202C"/>
+                </a:solidFill>
+                <a:latin typeface="Calibri"/>
+              </a:rPr>
+              <a:t>▸  Vipin Sudhakar — CB.AI.U4AID25166</a:t>
+            </a:r>
+          </a:p>
+          <a:p>
+            <a:pPr>
+              <a:lnSpc>
+                <a:spcPct val="112000"/>
+              </a:lnSpc>
+              <a:spcAft>
+                <a:spcPts val="600"/>
+              </a:spcAft>
+            </a:pPr>
+            <a:r>
+              <a:rPr sz="1200" b="1">
+                <a:solidFill>
+                  <a:srgbClr val="1A202C"/>
+                </a:solidFill>
+                <a:latin typeface="Calibri"/>
+              </a:rPr>
+              <a:t>▸  Rithvik Arulprakash — CB.AI.U4AID25148</a:t>
+            </a:r>
+          </a:p>
+          <a:p>
+            <a:pPr>
+              <a:lnSpc>
+                <a:spcPct val="112000"/>
+              </a:lnSpc>
+              <a:spcAft>
+                <a:spcPts val="600"/>
+              </a:spcAft>
+            </a:pPr>
+            <a:r>
+              <a:rPr sz="1200" b="1">
+                <a:solidFill>
+                  <a:srgbClr val="1A202C"/>
+                </a:solidFill>
+                <a:latin typeface="Calibri"/>
+              </a:rPr>
+              <a:t>▸  Harshith Kv — CB.AI.U4AID25119</a:t>
+            </a:r>
+          </a:p>
+        </p:txBody>
+      </p:sp>
+      <p:sp>
+        <p:nvSpPr>
+          <p:cNvPr id="10" name="TextBox 9"/>
           <p:cNvSpPr txBox="1"/>
           <p:nvPr/>
         </p:nvSpPr>
         <p:spPr>
           <a:xfrm>
-            <a:off x="7011000" y="3126000"/>
-            <a:ext cx="4312015" cy="320040"/>
+            <a:off x="640080" y="5500000"/>
+            <a:ext cx="10852800" cy="320040"/>
           </a:xfrm>
           <a:prstGeom prst="rect">
             <a:avLst/>
@@ -9781,27 +8984,27 @@
           <a:p>
             <a:pPr algn="l"/>
             <a:r>
-              <a:rPr sz="1050" b="0">
+              <a:rPr sz="1100" b="0">
                 <a:solidFill>
                   <a:srgbClr val="475569"/>
                 </a:solidFill>
                 <a:latin typeface="Calibri"/>
               </a:rPr>
-              <a:t>cross-manip AUC (xception / cnn_vit) — worse than random</a:t>
-            </a:r>
-          </a:p>
-        </p:txBody>
-      </p:sp>
-      <p:sp>
-        <p:nvSpPr>
-          <p:cNvPr id="12" name="TextBox 11"/>
+              <a:t>AI &amp; Data Science — Amrita Vishwa Vidyapeetham, Coimbatore</a:t>
+            </a:r>
+          </a:p>
+        </p:txBody>
+      </p:sp>
+      <p:sp>
+        <p:nvSpPr>
+          <p:cNvPr id="11" name="TextBox 10"/>
           <p:cNvSpPr txBox="1"/>
           <p:nvPr/>
         </p:nvSpPr>
         <p:spPr>
           <a:xfrm>
-            <a:off x="7011000" y="3990933"/>
-            <a:ext cx="4312015" cy="365760"/>
+            <a:off x="640080" y="5850000"/>
+            <a:ext cx="10852800" cy="320040"/>
           </a:xfrm>
           <a:prstGeom prst="rect">
             <a:avLst/>
@@ -9816,27 +9019,27 @@
           <a:p>
             <a:pPr algn="l"/>
             <a:r>
-              <a:rPr sz="2200" b="1">
-                <a:solidFill>
-                  <a:srgbClr val="0F172A"/>
-                </a:solidFill>
-                <a:latin typeface="Calibri"/>
-              </a:rPr>
-              <a:t>1.000 → 0.000</a:t>
-            </a:r>
-          </a:p>
-        </p:txBody>
-      </p:sp>
-      <p:sp>
-        <p:nvSpPr>
-          <p:cNvPr id="13" name="TextBox 12"/>
+              <a:rPr sz="1100" b="1">
+                <a:solidFill>
+                  <a:srgbClr val="0E7490"/>
+                </a:solidFill>
+                <a:latin typeface="Calibri"/>
+              </a:rPr>
+              <a:t>GITHUB REPOSITORY</a:t>
+            </a:r>
+          </a:p>
+        </p:txBody>
+      </p:sp>
+      <p:sp>
+        <p:nvSpPr>
+          <p:cNvPr id="12" name="TextBox 11"/>
           <p:cNvSpPr txBox="1"/>
           <p:nvPr/>
         </p:nvSpPr>
         <p:spPr>
           <a:xfrm>
-            <a:off x="7011000" y="4330933"/>
-            <a:ext cx="4312015" cy="320040"/>
+            <a:off x="640080" y="6100000"/>
+            <a:ext cx="10000000" cy="360000"/>
           </a:xfrm>
           <a:prstGeom prst="rect">
             <a:avLst/>
@@ -9851,27 +9054,27 @@
           <a:p>
             <a:pPr algn="l"/>
             <a:r>
-              <a:rPr sz="1050" b="0">
-                <a:solidFill>
-                  <a:srgbClr val="475569"/>
-                </a:solidFill>
-                <a:latin typeface="Calibri"/>
-              </a:rPr>
-              <a:t>xception fake-prob: same-manip vs. cross-manip</a:t>
-            </a:r>
-          </a:p>
-        </p:txBody>
-      </p:sp>
-      <p:sp>
-        <p:nvSpPr>
-          <p:cNvPr id="14" name="TextBox 13"/>
+              <a:rPr sz="1250" b="1">
+                <a:solidFill>
+                  <a:srgbClr val="22B8CF"/>
+                </a:solidFill>
+                <a:latin typeface="Calibri"/>
+              </a:rPr>
+              <a:t>github.com/DUNE-ODYSSEY/deepfake-detection</a:t>
+            </a:r>
+          </a:p>
+        </p:txBody>
+      </p:sp>
+      <p:sp>
+        <p:nvSpPr>
+          <p:cNvPr id="13" name="TextBox 12"/>
           <p:cNvSpPr txBox="1"/>
           <p:nvPr/>
         </p:nvSpPr>
         <p:spPr>
           <a:xfrm>
-            <a:off x="7011000" y="5195866"/>
-            <a:ext cx="4312015" cy="365760"/>
+            <a:off x="640080" y="6510528"/>
+            <a:ext cx="7315200" cy="274320"/>
           </a:xfrm>
           <a:prstGeom prst="rect">
             <a:avLst/>
@@ -9886,27 +9089,27 @@
           <a:p>
             <a:pPr algn="l"/>
             <a:r>
-              <a:rPr sz="2200" b="1">
-                <a:solidFill>
-                  <a:srgbClr val="0F172A"/>
-                </a:solidFill>
-                <a:latin typeface="Calibri"/>
-              </a:rPr>
-              <a:t>face → background</a:t>
-            </a:r>
-          </a:p>
-        </p:txBody>
-      </p:sp>
-      <p:sp>
-        <p:nvSpPr>
-          <p:cNvPr id="15" name="TextBox 14"/>
+              <a:rPr sz="1000" b="0">
+                <a:solidFill>
+                  <a:srgbClr val="94A3B8"/>
+                </a:solidFill>
+                <a:latin typeface="Calibri"/>
+              </a:rPr>
+              <a:t>Deepfake Detection — XceptionNet vs. CNN-ViT (23AID205)</a:t>
+            </a:r>
+          </a:p>
+        </p:txBody>
+      </p:sp>
+      <p:sp>
+        <p:nvSpPr>
+          <p:cNvPr id="14" name="TextBox 13"/>
           <p:cNvSpPr txBox="1"/>
           <p:nvPr/>
         </p:nvSpPr>
         <p:spPr>
           <a:xfrm>
-            <a:off x="7011000" y="5535866"/>
-            <a:ext cx="4312015" cy="320040"/>
+            <a:off x="10972800" y="6510528"/>
+            <a:ext cx="822960" cy="274320"/>
           </a:xfrm>
           <a:prstGeom prst="rect">
             <a:avLst/>
@@ -9919,42 +9122,7 @@
           </a:bodyPr>
           <a:lstStyle/>
           <a:p>
-            <a:pPr algn="l"/>
-            <a:r>
-              <a:rPr sz="1050" b="0">
-                <a:solidFill>
-                  <a:srgbClr val="475569"/>
-                </a:solidFill>
-                <a:latin typeface="Calibri"/>
-              </a:rPr>
-              <a:t>where attention shifts when the signal is absent</a:t>
-            </a:r>
-          </a:p>
-        </p:txBody>
-      </p:sp>
-      <p:sp>
-        <p:nvSpPr>
-          <p:cNvPr id="16" name="TextBox 15"/>
-          <p:cNvSpPr txBox="1"/>
-          <p:nvPr/>
-        </p:nvSpPr>
-        <p:spPr>
-          <a:xfrm>
-            <a:off x="640080" y="6510528"/>
-            <a:ext cx="7315200" cy="274320"/>
-          </a:xfrm>
-          <a:prstGeom prst="rect">
-            <a:avLst/>
-          </a:prstGeom>
-          <a:noFill/>
-        </p:spPr>
-        <p:txBody>
-          <a:bodyPr wrap="square">
-            <a:spAutoFit/>
-          </a:bodyPr>
-          <a:lstStyle/>
-          <a:p>
-            <a:pPr algn="l"/>
+            <a:pPr algn="r"/>
             <a:r>
               <a:rPr sz="1000" b="0">
                 <a:solidFill>
@@ -9962,42 +9130,7 @@
                 </a:solidFill>
                 <a:latin typeface="Calibri"/>
               </a:rPr>
-              <a:t>Deepfake Detection — XceptionNet vs. CNN-ViT (23AID205)</a:t>
-            </a:r>
-          </a:p>
-        </p:txBody>
-      </p:sp>
-      <p:sp>
-        <p:nvSpPr>
-          <p:cNvPr id="17" name="TextBox 16"/>
-          <p:cNvSpPr txBox="1"/>
-          <p:nvPr/>
-        </p:nvSpPr>
-        <p:spPr>
-          <a:xfrm>
-            <a:off x="10972800" y="6510528"/>
-            <a:ext cx="822960" cy="274320"/>
-          </a:xfrm>
-          <a:prstGeom prst="rect">
-            <a:avLst/>
-          </a:prstGeom>
-          <a:noFill/>
-        </p:spPr>
-        <p:txBody>
-          <a:bodyPr wrap="square">
-            <a:spAutoFit/>
-          </a:bodyPr>
-          <a:lstStyle/>
-          <a:p>
-            <a:pPr algn="r"/>
-            <a:r>
-              <a:rPr sz="1000" b="0">
-                <a:solidFill>
-                  <a:srgbClr val="94A3B8"/>
-                </a:solidFill>
-                <a:latin typeface="Calibri"/>
-              </a:rPr>
-              <a:t>9/11</a:t>
+              <a:t>9/9</a:t>
             </a:r>
           </a:p>
         </p:txBody>
